--- a/docs/proposals/rokid-ultraman-pitch.pptx
+++ b/docs/proposals/rokid-ultraman-pitch.pptx
@@ -15,9 +15,10 @@
     <p:sldId id="263" r:id="rId9"/>
     <p:sldId id="264" r:id="rId10"/>
     <p:sldId id="265" r:id="rId11"/>
+    <p:sldId id="266" r:id="rId12"/>
   </p:sldIdLst>
   <p:notesMasterIdLst>
-    <p:notesMasterId r:id="rId12"/>
+    <p:notesMasterId r:id="rId13"/>
   </p:notesMasterIdLst>
   <p:sldSz cx="12192000" cy="6858000"/>
   <p:notesSz cx="6858000" cy="12192000"/>
@@ -623,6 +624,94 @@
             <a:fld id="{F7021451-1387-4CA6-816F-3879F97B5CBC}" type="slidenum">
               <a:rPr lang="en-US"/>
               <a:t>10</a:t>
+            </a:fld>
+            <a:endParaRPr lang="en-US"/>
+          </a:p>
+        </p:txBody>
+      </p:sp>
+    </p:spTree>
+    <p:extLst>
+      <p:ext uri="{BB962C8B-B14F-4D97-AF65-F5344CB8AC3E}">
+        <p14:creationId xmlns:p14="http://schemas.microsoft.com/office/powerpoint/2010/main" val="1024086991"/>
+      </p:ext>
+    </p:extLst>
+  </p:cSld>
+  <p:clrMapOvr>
+    <a:masterClrMapping/>
+  </p:clrMapOvr>
+</p:notes>
+</file>
+
+<file path=ppt/notesSlides/notesSlide11.xml><?xml version="1.0" encoding="utf-8"?>
+<p:notes xmlns:a="http://schemas.openxmlformats.org/drawingml/2006/main" xmlns:r="http://schemas.openxmlformats.org/officeDocument/2006/relationships" xmlns:p="http://schemas.openxmlformats.org/presentationml/2006/main">
+  <p:cSld>
+    <p:spTree>
+      <p:nvGrpSpPr>
+        <p:cNvPr id="1" name=""/>
+        <p:cNvGrpSpPr/>
+        <p:nvPr/>
+      </p:nvGrpSpPr>
+      <p:grpSpPr>
+        <a:xfrm>
+          <a:off x="0" y="0"/>
+          <a:ext cx="0" cy="0"/>
+          <a:chOff x="0" y="0"/>
+          <a:chExt cx="0" cy="0"/>
+        </a:xfrm>
+      </p:grpSpPr>
+      <p:sp>
+        <p:nvSpPr>
+          <p:cNvPr id="2" name="Slide Image Placeholder 1"/>
+          <p:cNvSpPr>
+            <a:spLocks noGrp="1" noRot="1" noChangeAspect="1"/>
+          </p:cNvSpPr>
+          <p:nvPr>
+            <p:ph type="sldImg"/>
+          </p:nvPr>
+        </p:nvSpPr>
+        <p:spPr/>
+      </p:sp>
+      <p:sp>
+        <p:nvSpPr>
+          <p:cNvPr id="3" name="Notes Placeholder 2"/>
+          <p:cNvSpPr>
+            <a:spLocks noGrp="1"/>
+          </p:cNvSpPr>
+          <p:nvPr>
+            <p:ph type="body" idx="1"/>
+          </p:nvPr>
+        </p:nvSpPr>
+        <p:spPr/>
+        <p:txBody>
+          <a:bodyPr/>
+          <a:lstStyle/>
+          <a:p>
+            <a:r>
+              <a:rPr lang="en-US" dirty="0"/>
+              <a:t/>
+            </a:r>
+            <a:endParaRPr lang="en-US" dirty="0"/>
+          </a:p>
+        </p:txBody>
+      </p:sp>
+      <p:sp>
+        <p:nvSpPr>
+          <p:cNvPr id="4" name="Slide Number Placeholder 3"/>
+          <p:cNvSpPr>
+            <a:spLocks noGrp="1"/>
+          </p:cNvSpPr>
+          <p:nvPr>
+            <p:ph type="sldNum" sz="quarter" idx="10"/>
+          </p:nvPr>
+        </p:nvSpPr>
+        <p:spPr/>
+        <p:txBody>
+          <a:bodyPr/>
+          <a:lstStyle/>
+          <a:p>
+            <a:fld id="{F7021451-1387-4CA6-816F-3879F97B5CBC}" type="slidenum">
+              <a:rPr lang="en-US"/>
+              <a:t>11</a:t>
             </a:fld>
             <a:endParaRPr lang="en-US"/>
           </a:p>
@@ -2015,6 +2104,1301 @@
           <a:chExt cx="0" cy="0"/>
         </a:xfrm>
       </p:grpSpPr>
+      <p:sp>
+        <p:nvSpPr>
+          <p:cNvPr id="2" name="Text 0"/>
+          <p:cNvSpPr/>
+          <p:nvPr/>
+        </p:nvSpPr>
+        <p:spPr>
+          <a:xfrm>
+            <a:off x="2834640" y="274320"/>
+            <a:ext cx="8778240" cy="1828800"/>
+          </a:xfrm>
+          <a:prstGeom prst="rect">
+            <a:avLst/>
+          </a:prstGeom>
+          <a:noFill/>
+          <a:ln/>
+        </p:spPr>
+        <p:txBody>
+          <a:bodyPr wrap="square" lIns="0" tIns="0" rIns="0" bIns="0" rtlCol="0" anchor="ctr"/>
+          <a:lstStyle/>
+          <a:p>
+            <a:pPr algn="r" indent="0" marL="0">
+              <a:buNone/>
+            </a:pPr>
+            <a:r>
+              <a:rPr lang="en-US" sz="10000" b="1" spc="600" kern="0" dirty="0">
+                <a:solidFill>
+                  <a:srgbClr val="181E2B"/>
+                </a:solidFill>
+                <a:latin typeface="Arial Black" pitchFamily="34" charset="0"/>
+                <a:ea typeface="Arial Black" pitchFamily="34" charset="-122"/>
+                <a:cs typeface="Arial Black" pitchFamily="34" charset="-120"/>
+              </a:rPr>
+              <a:t>Q4 2026</a:t>
+            </a:r>
+            <a:endParaRPr lang="en-US" sz="10000" dirty="0"/>
+          </a:p>
+        </p:txBody>
+      </p:sp>
+      <p:sp>
+        <p:nvSpPr>
+          <p:cNvPr id="3" name="Shape 1"/>
+          <p:cNvSpPr/>
+          <p:nvPr/>
+        </p:nvSpPr>
+        <p:spPr>
+          <a:xfrm>
+            <a:off x="676656" y="603504"/>
+            <a:ext cx="91440" cy="91440"/>
+          </a:xfrm>
+          <a:prstGeom prst="ellipse">
+            <a:avLst/>
+          </a:prstGeom>
+          <a:solidFill>
+            <a:srgbClr val="2EA8E0"/>
+          </a:solidFill>
+          <a:ln/>
+          <a:effectLst>
+            <a:outerShdw sx="100000" sy="100000" kx="0" ky="0" algn="bl" rotWithShape="0" blurRad="101600" dist="50800" dir="16200000">
+              <a:srgbClr val="2EA8E0">
+                <a:alpha val="85000"/>
+              </a:srgbClr>
+            </a:outerShdw>
+          </a:effectLst>
+        </p:spPr>
+      </p:sp>
+      <p:sp>
+        <p:nvSpPr>
+          <p:cNvPr id="4" name="Text 2"/>
+          <p:cNvSpPr/>
+          <p:nvPr/>
+        </p:nvSpPr>
+        <p:spPr>
+          <a:xfrm>
+            <a:off x="896112" y="475488"/>
+            <a:ext cx="9601200" cy="365760"/>
+          </a:xfrm>
+          <a:prstGeom prst="rect">
+            <a:avLst/>
+          </a:prstGeom>
+          <a:noFill/>
+          <a:ln/>
+        </p:spPr>
+        <p:txBody>
+          <a:bodyPr wrap="square" lIns="0" tIns="0" rIns="0" bIns="0" rtlCol="0" anchor="ctr"/>
+          <a:lstStyle/>
+          <a:p>
+            <a:pPr indent="0" marL="0">
+              <a:buNone/>
+            </a:pPr>
+            <a:r>
+              <a:rPr lang="en-US" sz="1050" b="1" spc="400" kern="0" dirty="0">
+                <a:solidFill>
+                  <a:srgbClr val="AEB6C4"/>
+                </a:solidFill>
+                <a:latin typeface="Arial" pitchFamily="34" charset="0"/>
+                <a:ea typeface="Arial" pitchFamily="34" charset="-122"/>
+                <a:cs typeface="Arial" pitchFamily="34" charset="-120"/>
+              </a:rPr>
+              <a:t>09 / TIMELINE</a:t>
+            </a:r>
+            <a:endParaRPr lang="en-US" sz="1050" dirty="0"/>
+          </a:p>
+        </p:txBody>
+      </p:sp>
+      <p:sp>
+        <p:nvSpPr>
+          <p:cNvPr id="5" name="Text 3"/>
+          <p:cNvSpPr/>
+          <p:nvPr/>
+        </p:nvSpPr>
+        <p:spPr>
+          <a:xfrm>
+            <a:off x="640080" y="868680"/>
+            <a:ext cx="10927080" cy="731520"/>
+          </a:xfrm>
+          <a:prstGeom prst="rect">
+            <a:avLst/>
+          </a:prstGeom>
+          <a:noFill/>
+          <a:ln/>
+        </p:spPr>
+        <p:txBody>
+          <a:bodyPr wrap="square" lIns="0" tIns="0" rIns="0" bIns="0" rtlCol="0" anchor="ctr"/>
+          <a:lstStyle/>
+          <a:p>
+            <a:pPr indent="0" marL="0">
+              <a:buNone/>
+            </a:pPr>
+            <a:r>
+              <a:rPr lang="en-US" sz="2800" b="1" dirty="0">
+                <a:solidFill>
+                  <a:srgbClr val="FFFFFF"/>
+                </a:solidFill>
+                <a:latin typeface="Yu Gothic" pitchFamily="34" charset="0"/>
+                <a:ea typeface="Yu Gothic" pitchFamily="34" charset="-122"/>
+                <a:cs typeface="Yu Gothic" pitchFamily="34" charset="-120"/>
+              </a:rPr>
+              <a:t>年末商戦から、逆算する</a:t>
+            </a:r>
+            <a:endParaRPr lang="en-US" sz="2800" dirty="0"/>
+          </a:p>
+        </p:txBody>
+      </p:sp>
+      <p:sp>
+        <p:nvSpPr>
+          <p:cNvPr id="6" name="Shape 4"/>
+          <p:cNvSpPr/>
+          <p:nvPr/>
+        </p:nvSpPr>
+        <p:spPr>
+          <a:xfrm>
+            <a:off x="1051560" y="3547872"/>
+            <a:ext cx="9966960" cy="0"/>
+          </a:xfrm>
+          <a:prstGeom prst="line">
+            <a:avLst/>
+          </a:prstGeom>
+          <a:noFill/>
+          <a:ln w="19050">
+            <a:solidFill>
+              <a:srgbClr val="3A4257"/>
+            </a:solidFill>
+            <a:prstDash val="solid"/>
+          </a:ln>
+        </p:spPr>
+      </p:sp>
+      <p:sp>
+        <p:nvSpPr>
+          <p:cNvPr id="7" name="Shape 5"/>
+          <p:cNvSpPr/>
+          <p:nvPr/>
+        </p:nvSpPr>
+        <p:spPr>
+          <a:xfrm>
+            <a:off x="932688" y="3429000"/>
+            <a:ext cx="237744" cy="237744"/>
+          </a:xfrm>
+          <a:prstGeom prst="ellipse">
+            <a:avLst/>
+          </a:prstGeom>
+          <a:solidFill>
+            <a:srgbClr val="C8102E"/>
+          </a:solidFill>
+          <a:ln/>
+          <a:effectLst>
+            <a:outerShdw sx="100000" sy="100000" kx="0" ky="0" algn="bl" rotWithShape="0" blurRad="152400" dist="50800" dir="16200000">
+              <a:srgbClr val="C8102E">
+                <a:alpha val="80000"/>
+              </a:srgbClr>
+            </a:outerShdw>
+          </a:effectLst>
+        </p:spPr>
+      </p:sp>
+      <p:sp>
+        <p:nvSpPr>
+          <p:cNvPr id="8" name="Text 6"/>
+          <p:cNvSpPr/>
+          <p:nvPr/>
+        </p:nvSpPr>
+        <p:spPr>
+          <a:xfrm>
+            <a:off x="182880" y="2624328"/>
+            <a:ext cx="1737360" cy="320040"/>
+          </a:xfrm>
+          <a:prstGeom prst="rect">
+            <a:avLst/>
+          </a:prstGeom>
+          <a:noFill/>
+          <a:ln/>
+        </p:spPr>
+        <p:txBody>
+          <a:bodyPr wrap="square" lIns="0" tIns="0" rIns="0" bIns="0" rtlCol="0" anchor="ctr"/>
+          <a:lstStyle/>
+          <a:p>
+            <a:pPr algn="ctr" indent="0" marL="0">
+              <a:buNone/>
+            </a:pPr>
+            <a:r>
+              <a:rPr lang="en-US" sz="1250" b="1" dirty="0">
+                <a:solidFill>
+                  <a:srgbClr val="E8354F"/>
+                </a:solidFill>
+                <a:latin typeface="Arial" pitchFamily="34" charset="0"/>
+                <a:ea typeface="Arial" pitchFamily="34" charset="-122"/>
+                <a:cs typeface="Arial" pitchFamily="34" charset="-120"/>
+              </a:rPr>
+              <a:t>2026.8</a:t>
+            </a:r>
+            <a:endParaRPr lang="en-US" sz="1250" dirty="0"/>
+          </a:p>
+        </p:txBody>
+      </p:sp>
+      <p:sp>
+        <p:nvSpPr>
+          <p:cNvPr id="9" name="Text 7"/>
+          <p:cNvSpPr/>
+          <p:nvPr/>
+        </p:nvSpPr>
+        <p:spPr>
+          <a:xfrm>
+            <a:off x="182880" y="2944368"/>
+            <a:ext cx="1737360" cy="320040"/>
+          </a:xfrm>
+          <a:prstGeom prst="rect">
+            <a:avLst/>
+          </a:prstGeom>
+          <a:noFill/>
+          <a:ln/>
+        </p:spPr>
+        <p:txBody>
+          <a:bodyPr wrap="square" lIns="0" tIns="0" rIns="0" bIns="0" rtlCol="0" anchor="ctr"/>
+          <a:lstStyle/>
+          <a:p>
+            <a:pPr algn="ctr" indent="0" marL="0">
+              <a:buNone/>
+            </a:pPr>
+            <a:r>
+              <a:rPr lang="en-US" sz="1350" b="1" dirty="0">
+                <a:solidFill>
+                  <a:srgbClr val="FFFFFF"/>
+                </a:solidFill>
+                <a:latin typeface="Yu Gothic" pitchFamily="34" charset="0"/>
+                <a:ea typeface="Yu Gothic" pitchFamily="34" charset="-122"/>
+                <a:cs typeface="Yu Gothic" pitchFamily="34" charset="-120"/>
+              </a:rPr>
+              <a:t>基本合意</a:t>
+            </a:r>
+            <a:endParaRPr lang="en-US" sz="1350" dirty="0"/>
+          </a:p>
+        </p:txBody>
+      </p:sp>
+      <p:sp>
+        <p:nvSpPr>
+          <p:cNvPr id="10" name="Text 8"/>
+          <p:cNvSpPr/>
+          <p:nvPr/>
+        </p:nvSpPr>
+        <p:spPr>
+          <a:xfrm>
+            <a:off x="137160" y="3867912"/>
+            <a:ext cx="1828800" cy="731520"/>
+          </a:xfrm>
+          <a:prstGeom prst="rect">
+            <a:avLst/>
+          </a:prstGeom>
+          <a:noFill/>
+          <a:ln/>
+        </p:spPr>
+        <p:txBody>
+          <a:bodyPr wrap="square" lIns="0" tIns="0" rIns="0" bIns="0" rtlCol="0" anchor="t"/>
+          <a:lstStyle/>
+          <a:p>
+            <a:pPr algn="ctr" indent="0" marL="0">
+              <a:lnSpc>
+                <a:spcPts val="1400"/>
+              </a:lnSpc>
+              <a:buNone/>
+            </a:pPr>
+            <a:r>
+              <a:rPr lang="en-US" sz="1000" dirty="0">
+                <a:solidFill>
+                  <a:srgbClr val="AEB6C4"/>
+                </a:solidFill>
+                <a:latin typeface="Yu Gothic" pitchFamily="34" charset="0"/>
+                <a:ea typeface="Yu Gothic" pitchFamily="34" charset="-122"/>
+                <a:cs typeface="Yu Gothic" pitchFamily="34" charset="-120"/>
+              </a:rPr>
+              <a:t>企画確定</a:t>
+            </a:r>
+            <a:endParaRPr lang="en-US" sz="1000" dirty="0"/>
+          </a:p>
+        </p:txBody>
+      </p:sp>
+      <p:sp>
+        <p:nvSpPr>
+          <p:cNvPr id="11" name="Shape 9"/>
+          <p:cNvSpPr/>
+          <p:nvPr/>
+        </p:nvSpPr>
+        <p:spPr>
+          <a:xfrm>
+            <a:off x="2926080" y="3429000"/>
+            <a:ext cx="237744" cy="237744"/>
+          </a:xfrm>
+          <a:prstGeom prst="ellipse">
+            <a:avLst/>
+          </a:prstGeom>
+          <a:solidFill>
+            <a:srgbClr val="C8102E"/>
+          </a:solidFill>
+          <a:ln/>
+          <a:effectLst>
+            <a:outerShdw sx="100000" sy="100000" kx="0" ky="0" algn="bl" rotWithShape="0" blurRad="152400" dist="50800" dir="16200000">
+              <a:srgbClr val="C8102E">
+                <a:alpha val="80000"/>
+              </a:srgbClr>
+            </a:outerShdw>
+          </a:effectLst>
+        </p:spPr>
+      </p:sp>
+      <p:sp>
+        <p:nvSpPr>
+          <p:cNvPr id="12" name="Text 10"/>
+          <p:cNvSpPr/>
+          <p:nvPr/>
+        </p:nvSpPr>
+        <p:spPr>
+          <a:xfrm>
+            <a:off x="2176272" y="2624328"/>
+            <a:ext cx="1737360" cy="320040"/>
+          </a:xfrm>
+          <a:prstGeom prst="rect">
+            <a:avLst/>
+          </a:prstGeom>
+          <a:noFill/>
+          <a:ln/>
+        </p:spPr>
+        <p:txBody>
+          <a:bodyPr wrap="square" lIns="0" tIns="0" rIns="0" bIns="0" rtlCol="0" anchor="ctr"/>
+          <a:lstStyle/>
+          <a:p>
+            <a:pPr algn="ctr" indent="0" marL="0">
+              <a:buNone/>
+            </a:pPr>
+            <a:r>
+              <a:rPr lang="en-US" sz="1250" b="1" dirty="0">
+                <a:solidFill>
+                  <a:srgbClr val="E8354F"/>
+                </a:solidFill>
+                <a:latin typeface="Arial" pitchFamily="34" charset="0"/>
+                <a:ea typeface="Arial" pitchFamily="34" charset="-122"/>
+                <a:cs typeface="Arial" pitchFamily="34" charset="-120"/>
+              </a:rPr>
+              <a:t>2026.9</a:t>
+            </a:r>
+            <a:endParaRPr lang="en-US" sz="1250" dirty="0"/>
+          </a:p>
+        </p:txBody>
+      </p:sp>
+      <p:sp>
+        <p:nvSpPr>
+          <p:cNvPr id="13" name="Text 11"/>
+          <p:cNvSpPr/>
+          <p:nvPr/>
+        </p:nvSpPr>
+        <p:spPr>
+          <a:xfrm>
+            <a:off x="2176272" y="2944368"/>
+            <a:ext cx="1737360" cy="320040"/>
+          </a:xfrm>
+          <a:prstGeom prst="rect">
+            <a:avLst/>
+          </a:prstGeom>
+          <a:noFill/>
+          <a:ln/>
+        </p:spPr>
+        <p:txBody>
+          <a:bodyPr wrap="square" lIns="0" tIns="0" rIns="0" bIns="0" rtlCol="0" anchor="ctr"/>
+          <a:lstStyle/>
+          <a:p>
+            <a:pPr algn="ctr" indent="0" marL="0">
+              <a:buNone/>
+            </a:pPr>
+            <a:r>
+              <a:rPr lang="en-US" sz="1350" b="1" dirty="0">
+                <a:solidFill>
+                  <a:srgbClr val="FFFFFF"/>
+                </a:solidFill>
+                <a:latin typeface="Yu Gothic" pitchFamily="34" charset="0"/>
+                <a:ea typeface="Yu Gothic" pitchFamily="34" charset="-122"/>
+                <a:cs typeface="Yu Gothic" pitchFamily="34" charset="-120"/>
+              </a:rPr>
+              <a:t>契約締結</a:t>
+            </a:r>
+            <a:endParaRPr lang="en-US" sz="1350" dirty="0"/>
+          </a:p>
+        </p:txBody>
+      </p:sp>
+      <p:sp>
+        <p:nvSpPr>
+          <p:cNvPr id="14" name="Text 12"/>
+          <p:cNvSpPr/>
+          <p:nvPr/>
+        </p:nvSpPr>
+        <p:spPr>
+          <a:xfrm>
+            <a:off x="2130552" y="3867912"/>
+            <a:ext cx="1828800" cy="731520"/>
+          </a:xfrm>
+          <a:prstGeom prst="rect">
+            <a:avLst/>
+          </a:prstGeom>
+          <a:noFill/>
+          <a:ln/>
+        </p:spPr>
+        <p:txBody>
+          <a:bodyPr wrap="square" lIns="0" tIns="0" rIns="0" bIns="0" rtlCol="0" anchor="t"/>
+          <a:lstStyle/>
+          <a:p>
+            <a:pPr algn="ctr" indent="0" marL="0">
+              <a:lnSpc>
+                <a:spcPts val="1400"/>
+              </a:lnSpc>
+              <a:buNone/>
+            </a:pPr>
+            <a:r>
+              <a:rPr lang="en-US" sz="1000" dirty="0">
+                <a:solidFill>
+                  <a:srgbClr val="AEB6C4"/>
+                </a:solidFill>
+                <a:latin typeface="Yu Gothic" pitchFamily="34" charset="0"/>
+                <a:ea typeface="Yu Gothic" pitchFamily="34" charset="-122"/>
+                <a:cs typeface="Yu Gothic" pitchFamily="34" charset="-120"/>
+              </a:rPr>
+              <a:t>監修開始</a:t>
+            </a:r>
+            <a:endParaRPr lang="en-US" sz="1000" dirty="0"/>
+          </a:p>
+        </p:txBody>
+      </p:sp>
+      <p:sp>
+        <p:nvSpPr>
+          <p:cNvPr id="15" name="Shape 13"/>
+          <p:cNvSpPr/>
+          <p:nvPr/>
+        </p:nvSpPr>
+        <p:spPr>
+          <a:xfrm>
+            <a:off x="4919472" y="3429000"/>
+            <a:ext cx="237744" cy="237744"/>
+          </a:xfrm>
+          <a:prstGeom prst="ellipse">
+            <a:avLst/>
+          </a:prstGeom>
+          <a:solidFill>
+            <a:srgbClr val="C8102E"/>
+          </a:solidFill>
+          <a:ln/>
+          <a:effectLst>
+            <a:outerShdw sx="100000" sy="100000" kx="0" ky="0" algn="bl" rotWithShape="0" blurRad="152400" dist="50800" dir="16200000">
+              <a:srgbClr val="C8102E">
+                <a:alpha val="80000"/>
+              </a:srgbClr>
+            </a:outerShdw>
+          </a:effectLst>
+        </p:spPr>
+      </p:sp>
+      <p:sp>
+        <p:nvSpPr>
+          <p:cNvPr id="16" name="Text 14"/>
+          <p:cNvSpPr/>
+          <p:nvPr/>
+        </p:nvSpPr>
+        <p:spPr>
+          <a:xfrm>
+            <a:off x="4169664" y="2624328"/>
+            <a:ext cx="1737360" cy="320040"/>
+          </a:xfrm>
+          <a:prstGeom prst="rect">
+            <a:avLst/>
+          </a:prstGeom>
+          <a:noFill/>
+          <a:ln/>
+        </p:spPr>
+        <p:txBody>
+          <a:bodyPr wrap="square" lIns="0" tIns="0" rIns="0" bIns="0" rtlCol="0" anchor="ctr"/>
+          <a:lstStyle/>
+          <a:p>
+            <a:pPr algn="ctr" indent="0" marL="0">
+              <a:buNone/>
+            </a:pPr>
+            <a:r>
+              <a:rPr lang="en-US" sz="1250" b="1" dirty="0">
+                <a:solidFill>
+                  <a:srgbClr val="E8354F"/>
+                </a:solidFill>
+                <a:latin typeface="Arial" pitchFamily="34" charset="0"/>
+                <a:ea typeface="Arial" pitchFamily="34" charset="-122"/>
+                <a:cs typeface="Arial" pitchFamily="34" charset="-120"/>
+              </a:rPr>
+              <a:t>2026.10</a:t>
+            </a:r>
+            <a:endParaRPr lang="en-US" sz="1250" dirty="0"/>
+          </a:p>
+        </p:txBody>
+      </p:sp>
+      <p:sp>
+        <p:nvSpPr>
+          <p:cNvPr id="17" name="Text 15"/>
+          <p:cNvSpPr/>
+          <p:nvPr/>
+        </p:nvSpPr>
+        <p:spPr>
+          <a:xfrm>
+            <a:off x="4169664" y="2944368"/>
+            <a:ext cx="1737360" cy="320040"/>
+          </a:xfrm>
+          <a:prstGeom prst="rect">
+            <a:avLst/>
+          </a:prstGeom>
+          <a:noFill/>
+          <a:ln/>
+        </p:spPr>
+        <p:txBody>
+          <a:bodyPr wrap="square" lIns="0" tIns="0" rIns="0" bIns="0" rtlCol="0" anchor="ctr"/>
+          <a:lstStyle/>
+          <a:p>
+            <a:pPr algn="ctr" indent="0" marL="0">
+              <a:buNone/>
+            </a:pPr>
+            <a:r>
+              <a:rPr lang="en-US" sz="1350" b="1" dirty="0">
+                <a:solidFill>
+                  <a:srgbClr val="FFFFFF"/>
+                </a:solidFill>
+                <a:latin typeface="Yu Gothic" pitchFamily="34" charset="0"/>
+                <a:ea typeface="Yu Gothic" pitchFamily="34" charset="-122"/>
+                <a:cs typeface="Yu Gothic" pitchFamily="34" charset="-120"/>
+              </a:rPr>
+              <a:t>開発・製造</a:t>
+            </a:r>
+            <a:endParaRPr lang="en-US" sz="1350" dirty="0"/>
+          </a:p>
+        </p:txBody>
+      </p:sp>
+      <p:sp>
+        <p:nvSpPr>
+          <p:cNvPr id="18" name="Text 16"/>
+          <p:cNvSpPr/>
+          <p:nvPr/>
+        </p:nvSpPr>
+        <p:spPr>
+          <a:xfrm>
+            <a:off x="4123944" y="3867912"/>
+            <a:ext cx="1828800" cy="731520"/>
+          </a:xfrm>
+          <a:prstGeom prst="rect">
+            <a:avLst/>
+          </a:prstGeom>
+          <a:noFill/>
+          <a:ln/>
+        </p:spPr>
+        <p:txBody>
+          <a:bodyPr wrap="square" lIns="0" tIns="0" rIns="0" bIns="0" rtlCol="0" anchor="t"/>
+          <a:lstStyle/>
+          <a:p>
+            <a:pPr algn="ctr" indent="0" marL="0">
+              <a:lnSpc>
+                <a:spcPts val="1400"/>
+              </a:lnSpc>
+              <a:buNone/>
+            </a:pPr>
+            <a:r>
+              <a:rPr lang="en-US" sz="1000" dirty="0">
+                <a:solidFill>
+                  <a:srgbClr val="AEB6C4"/>
+                </a:solidFill>
+                <a:latin typeface="Yu Gothic" pitchFamily="34" charset="0"/>
+                <a:ea typeface="Yu Gothic" pitchFamily="34" charset="-122"/>
+                <a:cs typeface="Yu Gothic" pitchFamily="34" charset="-120"/>
+              </a:rPr>
+              <a:t>ULTRAMAN MODE /</a:t>
+            </a:r>
+            <a:endParaRPr lang="en-US" sz="1000" dirty="0"/>
+          </a:p>
+          <a:p>
+            <a:pPr algn="ctr" indent="0" marL="0">
+              <a:lnSpc>
+                <a:spcPts val="1400"/>
+              </a:lnSpc>
+              <a:buNone/>
+            </a:pPr>
+            <a:r>
+              <a:rPr lang="en-US" sz="1000" dirty="0">
+                <a:solidFill>
+                  <a:srgbClr val="AEB6C4"/>
+                </a:solidFill>
+                <a:latin typeface="Yu Gothic" pitchFamily="34" charset="0"/>
+                <a:ea typeface="Yu Gothic" pitchFamily="34" charset="-122"/>
+                <a:cs typeface="Yu Gothic" pitchFamily="34" charset="-120"/>
+              </a:rPr>
+              <a:t>限定モデル着手</a:t>
+            </a:r>
+            <a:endParaRPr lang="en-US" sz="1000" dirty="0"/>
+          </a:p>
+        </p:txBody>
+      </p:sp>
+      <p:sp>
+        <p:nvSpPr>
+          <p:cNvPr id="19" name="Shape 17"/>
+          <p:cNvSpPr/>
+          <p:nvPr/>
+        </p:nvSpPr>
+        <p:spPr>
+          <a:xfrm>
+            <a:off x="6912864" y="3429000"/>
+            <a:ext cx="237744" cy="237744"/>
+          </a:xfrm>
+          <a:prstGeom prst="ellipse">
+            <a:avLst/>
+          </a:prstGeom>
+          <a:solidFill>
+            <a:srgbClr val="C8102E"/>
+          </a:solidFill>
+          <a:ln/>
+          <a:effectLst>
+            <a:outerShdw sx="100000" sy="100000" kx="0" ky="0" algn="bl" rotWithShape="0" blurRad="152400" dist="50800" dir="16200000">
+              <a:srgbClr val="C8102E">
+                <a:alpha val="80000"/>
+              </a:srgbClr>
+            </a:outerShdw>
+          </a:effectLst>
+        </p:spPr>
+      </p:sp>
+      <p:sp>
+        <p:nvSpPr>
+          <p:cNvPr id="20" name="Text 18"/>
+          <p:cNvSpPr/>
+          <p:nvPr/>
+        </p:nvSpPr>
+        <p:spPr>
+          <a:xfrm>
+            <a:off x="6163056" y="2624328"/>
+            <a:ext cx="1737360" cy="320040"/>
+          </a:xfrm>
+          <a:prstGeom prst="rect">
+            <a:avLst/>
+          </a:prstGeom>
+          <a:noFill/>
+          <a:ln/>
+        </p:spPr>
+        <p:txBody>
+          <a:bodyPr wrap="square" lIns="0" tIns="0" rIns="0" bIns="0" rtlCol="0" anchor="ctr"/>
+          <a:lstStyle/>
+          <a:p>
+            <a:pPr algn="ctr" indent="0" marL="0">
+              <a:buNone/>
+            </a:pPr>
+            <a:r>
+              <a:rPr lang="en-US" sz="1250" b="1" dirty="0">
+                <a:solidFill>
+                  <a:srgbClr val="E8354F"/>
+                </a:solidFill>
+                <a:latin typeface="Arial" pitchFamily="34" charset="0"/>
+                <a:ea typeface="Arial" pitchFamily="34" charset="-122"/>
+                <a:cs typeface="Arial" pitchFamily="34" charset="-120"/>
+              </a:rPr>
+              <a:t>2026.11</a:t>
+            </a:r>
+            <a:endParaRPr lang="en-US" sz="1250" dirty="0"/>
+          </a:p>
+        </p:txBody>
+      </p:sp>
+      <p:sp>
+        <p:nvSpPr>
+          <p:cNvPr id="21" name="Text 19"/>
+          <p:cNvSpPr/>
+          <p:nvPr/>
+        </p:nvSpPr>
+        <p:spPr>
+          <a:xfrm>
+            <a:off x="6163056" y="2944368"/>
+            <a:ext cx="1737360" cy="320040"/>
+          </a:xfrm>
+          <a:prstGeom prst="rect">
+            <a:avLst/>
+          </a:prstGeom>
+          <a:noFill/>
+          <a:ln/>
+        </p:spPr>
+        <p:txBody>
+          <a:bodyPr wrap="square" lIns="0" tIns="0" rIns="0" bIns="0" rtlCol="0" anchor="ctr"/>
+          <a:lstStyle/>
+          <a:p>
+            <a:pPr algn="ctr" indent="0" marL="0">
+              <a:buNone/>
+            </a:pPr>
+            <a:r>
+              <a:rPr lang="en-US" sz="1350" b="1" dirty="0">
+                <a:solidFill>
+                  <a:srgbClr val="FFFFFF"/>
+                </a:solidFill>
+                <a:latin typeface="Yu Gothic" pitchFamily="34" charset="0"/>
+                <a:ea typeface="Yu Gothic" pitchFamily="34" charset="-122"/>
+                <a:cs typeface="Yu Gothic" pitchFamily="34" charset="-120"/>
+              </a:rPr>
+              <a:t>発表</a:t>
+            </a:r>
+            <a:endParaRPr lang="en-US" sz="1350" dirty="0"/>
+          </a:p>
+        </p:txBody>
+      </p:sp>
+      <p:sp>
+        <p:nvSpPr>
+          <p:cNvPr id="22" name="Text 20"/>
+          <p:cNvSpPr/>
+          <p:nvPr/>
+        </p:nvSpPr>
+        <p:spPr>
+          <a:xfrm>
+            <a:off x="6117336" y="3867912"/>
+            <a:ext cx="1828800" cy="731520"/>
+          </a:xfrm>
+          <a:prstGeom prst="rect">
+            <a:avLst/>
+          </a:prstGeom>
+          <a:noFill/>
+          <a:ln/>
+        </p:spPr>
+        <p:txBody>
+          <a:bodyPr wrap="square" lIns="0" tIns="0" rIns="0" bIns="0" rtlCol="0" anchor="t"/>
+          <a:lstStyle/>
+          <a:p>
+            <a:pPr algn="ctr" indent="0" marL="0">
+              <a:lnSpc>
+                <a:spcPts val="1400"/>
+              </a:lnSpc>
+              <a:buNone/>
+            </a:pPr>
+            <a:r>
+              <a:rPr lang="en-US" sz="1000" dirty="0">
+                <a:solidFill>
+                  <a:srgbClr val="AEB6C4"/>
+                </a:solidFill>
+                <a:latin typeface="Yu Gothic" pitchFamily="34" charset="0"/>
+                <a:ea typeface="Yu Gothic" pitchFamily="34" charset="-122"/>
+                <a:cs typeface="Yu Gothic" pitchFamily="34" charset="-120"/>
+              </a:rPr>
+              <a:t>年末商戦 ×</a:t>
+            </a:r>
+            <a:endParaRPr lang="en-US" sz="1000" dirty="0"/>
+          </a:p>
+          <a:p>
+            <a:pPr algn="ctr" indent="0" marL="0">
+              <a:lnSpc>
+                <a:spcPts val="1400"/>
+              </a:lnSpc>
+              <a:buNone/>
+            </a:pPr>
+            <a:r>
+              <a:rPr lang="en-US" sz="1000" dirty="0">
+                <a:solidFill>
+                  <a:srgbClr val="AEB6C4"/>
+                </a:solidFill>
+                <a:latin typeface="Yu Gothic" pitchFamily="34" charset="0"/>
+                <a:ea typeface="Yu Gothic" pitchFamily="34" charset="-122"/>
+                <a:cs typeface="Yu Gothic" pitchFamily="34" charset="-120"/>
+              </a:rPr>
+              <a:t>60周年の頂点で</a:t>
+            </a:r>
+            <a:endParaRPr lang="en-US" sz="1000" dirty="0"/>
+          </a:p>
+        </p:txBody>
+      </p:sp>
+      <p:sp>
+        <p:nvSpPr>
+          <p:cNvPr id="23" name="Shape 21"/>
+          <p:cNvSpPr/>
+          <p:nvPr/>
+        </p:nvSpPr>
+        <p:spPr>
+          <a:xfrm>
+            <a:off x="8906256" y="3429000"/>
+            <a:ext cx="237744" cy="237744"/>
+          </a:xfrm>
+          <a:prstGeom prst="ellipse">
+            <a:avLst/>
+          </a:prstGeom>
+          <a:solidFill>
+            <a:srgbClr val="C8102E"/>
+          </a:solidFill>
+          <a:ln/>
+          <a:effectLst>
+            <a:outerShdw sx="100000" sy="100000" kx="0" ky="0" algn="bl" rotWithShape="0" blurRad="152400" dist="50800" dir="16200000">
+              <a:srgbClr val="C8102E">
+                <a:alpha val="80000"/>
+              </a:srgbClr>
+            </a:outerShdw>
+          </a:effectLst>
+        </p:spPr>
+      </p:sp>
+      <p:sp>
+        <p:nvSpPr>
+          <p:cNvPr id="24" name="Text 22"/>
+          <p:cNvSpPr/>
+          <p:nvPr/>
+        </p:nvSpPr>
+        <p:spPr>
+          <a:xfrm>
+            <a:off x="8156448" y="2624328"/>
+            <a:ext cx="1737360" cy="320040"/>
+          </a:xfrm>
+          <a:prstGeom prst="rect">
+            <a:avLst/>
+          </a:prstGeom>
+          <a:noFill/>
+          <a:ln/>
+        </p:spPr>
+        <p:txBody>
+          <a:bodyPr wrap="square" lIns="0" tIns="0" rIns="0" bIns="0" rtlCol="0" anchor="ctr"/>
+          <a:lstStyle/>
+          <a:p>
+            <a:pPr algn="ctr" indent="0" marL="0">
+              <a:buNone/>
+            </a:pPr>
+            <a:r>
+              <a:rPr lang="en-US" sz="1250" b="1" dirty="0">
+                <a:solidFill>
+                  <a:srgbClr val="E8354F"/>
+                </a:solidFill>
+                <a:latin typeface="Arial" pitchFamily="34" charset="0"/>
+                <a:ea typeface="Arial" pitchFamily="34" charset="-122"/>
+                <a:cs typeface="Arial" pitchFamily="34" charset="-120"/>
+              </a:rPr>
+              <a:t>2026.12</a:t>
+            </a:r>
+            <a:endParaRPr lang="en-US" sz="1250" dirty="0"/>
+          </a:p>
+        </p:txBody>
+      </p:sp>
+      <p:sp>
+        <p:nvSpPr>
+          <p:cNvPr id="25" name="Text 23"/>
+          <p:cNvSpPr/>
+          <p:nvPr/>
+        </p:nvSpPr>
+        <p:spPr>
+          <a:xfrm>
+            <a:off x="8156448" y="2944368"/>
+            <a:ext cx="1737360" cy="320040"/>
+          </a:xfrm>
+          <a:prstGeom prst="rect">
+            <a:avLst/>
+          </a:prstGeom>
+          <a:noFill/>
+          <a:ln/>
+        </p:spPr>
+        <p:txBody>
+          <a:bodyPr wrap="square" lIns="0" tIns="0" rIns="0" bIns="0" rtlCol="0" anchor="ctr"/>
+          <a:lstStyle/>
+          <a:p>
+            <a:pPr algn="ctr" indent="0" marL="0">
+              <a:buNone/>
+            </a:pPr>
+            <a:r>
+              <a:rPr lang="en-US" sz="1350" b="1" dirty="0">
+                <a:solidFill>
+                  <a:srgbClr val="FFFFFF"/>
+                </a:solidFill>
+                <a:latin typeface="Yu Gothic" pitchFamily="34" charset="0"/>
+                <a:ea typeface="Yu Gothic" pitchFamily="34" charset="-122"/>
+                <a:cs typeface="Yu Gothic" pitchFamily="34" charset="-120"/>
+              </a:rPr>
+              <a:t>発売・配信</a:t>
+            </a:r>
+            <a:endParaRPr lang="en-US" sz="1350" dirty="0"/>
+          </a:p>
+        </p:txBody>
+      </p:sp>
+      <p:sp>
+        <p:nvSpPr>
+          <p:cNvPr id="26" name="Text 24"/>
+          <p:cNvSpPr/>
+          <p:nvPr/>
+        </p:nvSpPr>
+        <p:spPr>
+          <a:xfrm>
+            <a:off x="8110728" y="3867912"/>
+            <a:ext cx="1828800" cy="731520"/>
+          </a:xfrm>
+          <a:prstGeom prst="rect">
+            <a:avLst/>
+          </a:prstGeom>
+          <a:noFill/>
+          <a:ln/>
+        </p:spPr>
+        <p:txBody>
+          <a:bodyPr wrap="square" lIns="0" tIns="0" rIns="0" bIns="0" rtlCol="0" anchor="t"/>
+          <a:lstStyle/>
+          <a:p>
+            <a:pPr algn="ctr" indent="0" marL="0">
+              <a:lnSpc>
+                <a:spcPts val="1400"/>
+              </a:lnSpc>
+              <a:buNone/>
+            </a:pPr>
+            <a:r>
+              <a:rPr lang="en-US" sz="1000" dirty="0">
+                <a:solidFill>
+                  <a:srgbClr val="AEB6C4"/>
+                </a:solidFill>
+                <a:latin typeface="Yu Gothic" pitchFamily="34" charset="0"/>
+                <a:ea typeface="Yu Gothic" pitchFamily="34" charset="-122"/>
+                <a:cs typeface="Yu Gothic" pitchFamily="34" charset="-120"/>
+              </a:rPr>
+              <a:t>限定モデル /</a:t>
+            </a:r>
+            <a:endParaRPr lang="en-US" sz="1000" dirty="0"/>
+          </a:p>
+          <a:p>
+            <a:pPr algn="ctr" indent="0" marL="0">
+              <a:lnSpc>
+                <a:spcPts val="1400"/>
+              </a:lnSpc>
+              <a:buNone/>
+            </a:pPr>
+            <a:r>
+              <a:rPr lang="en-US" sz="1000" dirty="0">
+                <a:solidFill>
+                  <a:srgbClr val="AEB6C4"/>
+                </a:solidFill>
+                <a:latin typeface="Yu Gothic" pitchFamily="34" charset="0"/>
+                <a:ea typeface="Yu Gothic" pitchFamily="34" charset="-122"/>
+                <a:cs typeface="Yu Gothic" pitchFamily="34" charset="-120"/>
+              </a:rPr>
+              <a:t>体験パック</a:t>
+            </a:r>
+            <a:endParaRPr lang="en-US" sz="1000" dirty="0"/>
+          </a:p>
+        </p:txBody>
+      </p:sp>
+      <p:sp>
+        <p:nvSpPr>
+          <p:cNvPr id="27" name="Shape 25"/>
+          <p:cNvSpPr/>
+          <p:nvPr/>
+        </p:nvSpPr>
+        <p:spPr>
+          <a:xfrm>
+            <a:off x="10899648" y="3429000"/>
+            <a:ext cx="237744" cy="237744"/>
+          </a:xfrm>
+          <a:prstGeom prst="ellipse">
+            <a:avLst/>
+          </a:prstGeom>
+          <a:solidFill>
+            <a:srgbClr val="2EA8E0"/>
+          </a:solidFill>
+          <a:ln/>
+          <a:effectLst>
+            <a:outerShdw sx="100000" sy="100000" kx="0" ky="0" algn="bl" rotWithShape="0" blurRad="152400" dist="50800" dir="16200000">
+              <a:srgbClr val="2EA8E0">
+                <a:alpha val="80000"/>
+              </a:srgbClr>
+            </a:outerShdw>
+          </a:effectLst>
+        </p:spPr>
+      </p:sp>
+      <p:sp>
+        <p:nvSpPr>
+          <p:cNvPr id="28" name="Text 26"/>
+          <p:cNvSpPr/>
+          <p:nvPr/>
+        </p:nvSpPr>
+        <p:spPr>
+          <a:xfrm>
+            <a:off x="10149840" y="2624328"/>
+            <a:ext cx="1737360" cy="320040"/>
+          </a:xfrm>
+          <a:prstGeom prst="rect">
+            <a:avLst/>
+          </a:prstGeom>
+          <a:noFill/>
+          <a:ln/>
+        </p:spPr>
+        <p:txBody>
+          <a:bodyPr wrap="square" lIns="0" tIns="0" rIns="0" bIns="0" rtlCol="0" anchor="ctr"/>
+          <a:lstStyle/>
+          <a:p>
+            <a:pPr algn="ctr" indent="0" marL="0">
+              <a:buNone/>
+            </a:pPr>
+            <a:r>
+              <a:rPr lang="en-US" sz="1250" b="1" dirty="0">
+                <a:solidFill>
+                  <a:srgbClr val="2EA8E0"/>
+                </a:solidFill>
+                <a:latin typeface="Arial" pitchFamily="34" charset="0"/>
+                <a:ea typeface="Arial" pitchFamily="34" charset="-122"/>
+                <a:cs typeface="Arial" pitchFamily="34" charset="-120"/>
+              </a:rPr>
+              <a:t>2027.7.10</a:t>
+            </a:r>
+            <a:endParaRPr lang="en-US" sz="1250" dirty="0"/>
+          </a:p>
+        </p:txBody>
+      </p:sp>
+      <p:sp>
+        <p:nvSpPr>
+          <p:cNvPr id="29" name="Text 27"/>
+          <p:cNvSpPr/>
+          <p:nvPr/>
+        </p:nvSpPr>
+        <p:spPr>
+          <a:xfrm>
+            <a:off x="10149840" y="2944368"/>
+            <a:ext cx="1737360" cy="320040"/>
+          </a:xfrm>
+          <a:prstGeom prst="rect">
+            <a:avLst/>
+          </a:prstGeom>
+          <a:noFill/>
+          <a:ln/>
+        </p:spPr>
+        <p:txBody>
+          <a:bodyPr wrap="square" lIns="0" tIns="0" rIns="0" bIns="0" rtlCol="0" anchor="ctr"/>
+          <a:lstStyle/>
+          <a:p>
+            <a:pPr algn="ctr" indent="0" marL="0">
+              <a:buNone/>
+            </a:pPr>
+            <a:r>
+              <a:rPr lang="en-US" sz="1350" b="1" dirty="0">
+                <a:solidFill>
+                  <a:srgbClr val="FFFFFF"/>
+                </a:solidFill>
+                <a:latin typeface="Yu Gothic" pitchFamily="34" charset="0"/>
+                <a:ea typeface="Yu Gothic" pitchFamily="34" charset="-122"/>
+                <a:cs typeface="Yu Gothic" pitchFamily="34" charset="-120"/>
+              </a:rPr>
+              <a:t>「変身の日」</a:t>
+            </a:r>
+            <a:endParaRPr lang="en-US" sz="1350" dirty="0"/>
+          </a:p>
+        </p:txBody>
+      </p:sp>
+      <p:sp>
+        <p:nvSpPr>
+          <p:cNvPr id="30" name="Text 28"/>
+          <p:cNvSpPr/>
+          <p:nvPr/>
+        </p:nvSpPr>
+        <p:spPr>
+          <a:xfrm>
+            <a:off x="10104120" y="3867912"/>
+            <a:ext cx="1828800" cy="731520"/>
+          </a:xfrm>
+          <a:prstGeom prst="rect">
+            <a:avLst/>
+          </a:prstGeom>
+          <a:noFill/>
+          <a:ln/>
+        </p:spPr>
+        <p:txBody>
+          <a:bodyPr wrap="square" lIns="0" tIns="0" rIns="0" bIns="0" rtlCol="0" anchor="t"/>
+          <a:lstStyle/>
+          <a:p>
+            <a:pPr algn="ctr" indent="0" marL="0">
+              <a:lnSpc>
+                <a:spcPts val="1400"/>
+              </a:lnSpc>
+              <a:buNone/>
+            </a:pPr>
+            <a:r>
+              <a:rPr lang="en-US" sz="1000" dirty="0">
+                <a:solidFill>
+                  <a:srgbClr val="AEB6C4"/>
+                </a:solidFill>
+                <a:latin typeface="Yu Gothic" pitchFamily="34" charset="0"/>
+                <a:ea typeface="Yu Gothic" pitchFamily="34" charset="-122"/>
+                <a:cs typeface="Yu Gothic" pitchFamily="34" charset="-120"/>
+              </a:rPr>
+              <a:t>1周年施策 →</a:t>
+            </a:r>
+            <a:endParaRPr lang="en-US" sz="1000" dirty="0"/>
+          </a:p>
+          <a:p>
+            <a:pPr algn="ctr" indent="0" marL="0">
+              <a:lnSpc>
+                <a:spcPts val="1400"/>
+              </a:lnSpc>
+              <a:buNone/>
+            </a:pPr>
+            <a:r>
+              <a:rPr lang="en-US" sz="1000" dirty="0">
+                <a:solidFill>
+                  <a:srgbClr val="AEB6C4"/>
+                </a:solidFill>
+                <a:latin typeface="Yu Gothic" pitchFamily="34" charset="0"/>
+                <a:ea typeface="Yu Gothic" pitchFamily="34" charset="-122"/>
+                <a:cs typeface="Yu Gothic" pitchFamily="34" charset="-120"/>
+              </a:rPr>
+              <a:t>継続契約へ</a:t>
+            </a:r>
+            <a:endParaRPr lang="en-US" sz="1000" dirty="0"/>
+          </a:p>
+        </p:txBody>
+      </p:sp>
+      <p:sp>
+        <p:nvSpPr>
+          <p:cNvPr id="31" name="Shape 29"/>
+          <p:cNvSpPr/>
+          <p:nvPr/>
+        </p:nvSpPr>
+        <p:spPr>
+          <a:xfrm>
+            <a:off x="640080" y="5257800"/>
+            <a:ext cx="10908792" cy="914400"/>
+          </a:xfrm>
+          <a:prstGeom prst="roundRect">
+            <a:avLst>
+              <a:gd name="adj" fmla="val 10000"/>
+            </a:avLst>
+          </a:prstGeom>
+          <a:solidFill>
+            <a:srgbClr val="141926">
+              <a:alpha val="86000"/>
+            </a:srgbClr>
+          </a:solidFill>
+          <a:ln w="15875">
+            <a:solidFill>
+              <a:srgbClr val="5A2430"/>
+            </a:solidFill>
+            <a:prstDash val="solid"/>
+          </a:ln>
+        </p:spPr>
+      </p:sp>
+      <p:sp>
+        <p:nvSpPr>
+          <p:cNvPr id="32" name="Text 30"/>
+          <p:cNvSpPr/>
+          <p:nvPr/>
+        </p:nvSpPr>
+        <p:spPr>
+          <a:xfrm>
+            <a:off x="960120" y="5257800"/>
+            <a:ext cx="10332720" cy="914400"/>
+          </a:xfrm>
+          <a:prstGeom prst="rect">
+            <a:avLst/>
+          </a:prstGeom>
+          <a:noFill/>
+          <a:ln/>
+        </p:spPr>
+        <p:txBody>
+          <a:bodyPr wrap="square" lIns="0" tIns="0" rIns="0" bIns="0" rtlCol="0" anchor="ctr"/>
+          <a:lstStyle/>
+          <a:p>
+            <a:pPr indent="0" marL="0">
+              <a:lnSpc>
+                <a:spcPts val="1900"/>
+              </a:lnSpc>
+              <a:buNone/>
+            </a:pPr>
+            <a:r>
+              <a:rPr lang="en-US" sz="1300" b="1" dirty="0">
+                <a:solidFill>
+                  <a:srgbClr val="E8354F"/>
+                </a:solidFill>
+                <a:latin typeface="Yu Gothic" pitchFamily="34" charset="0"/>
+                <a:ea typeface="Yu Gothic" pitchFamily="34" charset="-122"/>
+                <a:cs typeface="Yu Gothic" pitchFamily="34" charset="-120"/>
+              </a:rPr>
+              <a:t>11月発表に間に合わせるには、8月中の基本合意が必要です。</a:t>
+            </a:r>
+            <a:pPr indent="0" marL="0">
+              <a:lnSpc>
+                <a:spcPts val="1900"/>
+              </a:lnSpc>
+              <a:buNone/>
+            </a:pPr>
+            <a:r>
+              <a:rPr lang="en-US" sz="1300" dirty="0">
+                <a:solidFill>
+                  <a:srgbClr val="E7EAF0"/>
+                </a:solidFill>
+                <a:latin typeface="Yu Gothic" pitchFamily="34" charset="0"/>
+                <a:ea typeface="Yu Gothic" pitchFamily="34" charset="-122"/>
+                <a:cs typeface="Yu Gothic" pitchFamily="34" charset="-120"/>
+              </a:rPr>
+              <a:t>　意匠変更をカラー・テンプル・充電ケース・起動音に限定することで、この日程は実現可能です。</a:t>
+            </a:r>
+            <a:endParaRPr lang="en-US" sz="1300" dirty="0"/>
+          </a:p>
+        </p:txBody>
+      </p:sp>
+      <p:sp>
+        <p:nvSpPr>
+          <p:cNvPr id="33" name="Text 31"/>
+          <p:cNvSpPr/>
+          <p:nvPr/>
+        </p:nvSpPr>
+        <p:spPr>
+          <a:xfrm>
+            <a:off x="11430000" y="6419088"/>
+            <a:ext cx="548640" cy="292608"/>
+          </a:xfrm>
+          <a:prstGeom prst="rect">
+            <a:avLst/>
+          </a:prstGeom>
+          <a:noFill/>
+          <a:ln/>
+        </p:spPr>
+        <p:txBody>
+          <a:bodyPr wrap="square" lIns="0" tIns="0" rIns="0" bIns="0" rtlCol="0" anchor="ctr"/>
+          <a:lstStyle/>
+          <a:p>
+            <a:pPr algn="r" indent="0" marL="0">
+              <a:buNone/>
+            </a:pPr>
+            <a:r>
+              <a:rPr lang="en-US" sz="1000" dirty="0">
+                <a:solidFill>
+                  <a:srgbClr val="78808F"/>
+                </a:solidFill>
+                <a:latin typeface="Arial" pitchFamily="34" charset="0"/>
+                <a:ea typeface="Arial" pitchFamily="34" charset="-122"/>
+                <a:cs typeface="Arial" pitchFamily="34" charset="-120"/>
+              </a:rPr>
+              <a:t>10</a:t>
+            </a:r>
+            <a:endParaRPr lang="en-US" sz="1000" dirty="0"/>
+          </a:p>
+        </p:txBody>
+      </p:sp>
+    </p:spTree>
+  </p:cSld>
+  <p:clrMapOvr>
+    <a:masterClrMapping/>
+  </p:clrMapOvr>
+</p:sld>
+</file>
+
+<file path=ppt/slides/slide11.xml><?xml version="1.0" encoding="utf-8"?>
+<p:sld xmlns:a="http://schemas.openxmlformats.org/drawingml/2006/main" xmlns:r="http://schemas.openxmlformats.org/officeDocument/2006/relationships" xmlns:p="http://schemas.openxmlformats.org/presentationml/2006/main">
+  <p:cSld name="Slide 11">
+    <p:bg>
+      <p:bgPr>
+        <a:blipFill dpi="0" rotWithShape="1">
+          <a:blip r:embed="rId1">
+            <a:lum/>
+          </a:blip>
+          <a:srcRect/>
+          <a:stretch>
+            <a:fillRect/>
+          </a:stretch>
+        </a:blipFill>
+        <a:effectLst/>
+      </p:bgPr>
+    </p:bg>
+    <p:spTree>
+      <p:nvGrpSpPr>
+        <p:cNvPr id="1" name=""/>
+        <p:cNvGrpSpPr/>
+        <p:nvPr/>
+      </p:nvGrpSpPr>
+      <p:grpSpPr>
+        <a:xfrm>
+          <a:off x="0" y="0"/>
+          <a:ext cx="0" cy="0"/>
+          <a:chOff x="0" y="0"/>
+          <a:chExt cx="0" cy="0"/>
+        </a:xfrm>
+      </p:grpSpPr>
       <p:pic>
         <p:nvPicPr>
           <p:cNvPr id="2" name="Image 0" descr="/tmp/claude-0/-home-user-kessho-lens/63555445-5e6f-583b-ab8a-87e352d31a90/scratchpad/art/ring.png">    </p:cNvPr>
@@ -6530,8 +7914,8 @@
         </p:nvSpPr>
         <p:spPr>
           <a:xfrm>
-            <a:off x="4206240" y="274320"/>
-            <a:ext cx="7406640" cy="2194560"/>
+            <a:off x="5120640" y="274320"/>
+            <a:ext cx="6492240" cy="2194560"/>
           </a:xfrm>
           <a:prstGeom prst="rect">
             <a:avLst/>
@@ -6555,7 +7939,7 @@
                 <a:ea typeface="Arial Black" pitchFamily="34" charset="-122"/>
                 <a:cs typeface="Arial Black" pitchFamily="34" charset="-120"/>
               </a:rPr>
-              <a:t>2026</a:t>
+              <a:t>360</a:t>
             </a:r>
             <a:endParaRPr lang="en-US" sz="12000" dirty="0"/>
           </a:p>
@@ -6621,7 +8005,7 @@
                 <a:ea typeface="Arial" pitchFamily="34" charset="-122"/>
                 <a:cs typeface="Arial" pitchFamily="34" charset="-120"/>
               </a:rPr>
-              <a:t>05 / WHY NOW</a:t>
+              <a:t>05 / PROMOTION</a:t>
             </a:r>
             <a:endParaRPr lang="en-US" sz="1050" dirty="0"/>
           </a:p>
@@ -6660,7 +8044,7 @@
                 <a:ea typeface="Yu Gothic" pitchFamily="34" charset="-122"/>
                 <a:cs typeface="Yu Gothic" pitchFamily="34" charset="-120"/>
               </a:rPr>
-              <a:t>なぜ、今なのか — 2026年にしかない3つの理由</a:t>
+              <a:t>統合キャンペーン「さあ、変身してください。」</a:t>
             </a:r>
             <a:endParaRPr lang="en-US" sz="2800" dirty="0"/>
           </a:p>
@@ -6674,12 +8058,12 @@
         </p:nvSpPr>
         <p:spPr>
           <a:xfrm>
-            <a:off x="640080" y="1965960"/>
-            <a:ext cx="3511296" cy="3977640"/>
+            <a:off x="640080" y="1783080"/>
+            <a:ext cx="5358384" cy="1810512"/>
           </a:xfrm>
           <a:prstGeom prst="roundRect">
             <a:avLst>
-              <a:gd name="adj" fmla="val 2604"/>
+              <a:gd name="adj" fmla="val 5051"/>
             </a:avLst>
           </a:prstGeom>
           <a:solidFill>
@@ -6697,14 +8081,65 @@
       </p:sp>
       <p:sp>
         <p:nvSpPr>
-          <p:cNvPr id="7" name="Text 5"/>
-          <p:cNvSpPr/>
-          <p:nvPr/>
-        </p:nvSpPr>
-        <p:spPr>
-          <a:xfrm>
-            <a:off x="960120" y="2286000"/>
-            <a:ext cx="2871216" cy="868680"/>
+          <p:cNvPr id="7" name="Shape 5"/>
+          <p:cNvSpPr/>
+          <p:nvPr/>
+        </p:nvSpPr>
+        <p:spPr>
+          <a:xfrm>
+            <a:off x="914400" y="2057400"/>
+            <a:ext cx="566928" cy="566928"/>
+          </a:xfrm>
+          <a:prstGeom prst="ellipse">
+            <a:avLst/>
+          </a:prstGeom>
+          <a:solidFill>
+            <a:srgbClr val="C8102E"/>
+          </a:solidFill>
+          <a:ln/>
+          <a:effectLst>
+            <a:outerShdw sx="100000" sy="100000" kx="0" ky="0" algn="bl" rotWithShape="0" blurRad="152400" dist="50800" dir="16200000">
+              <a:srgbClr val="C8102E">
+                <a:alpha val="50000"/>
+              </a:srgbClr>
+            </a:outerShdw>
+          </a:effectLst>
+        </p:spPr>
+      </p:sp>
+      <p:pic>
+        <p:nvPicPr>
+          <p:cNvPr id="8" name="Image 0" descr="/tmp/claude-0/-home-user-kessho-lens/63555445-5e6f-583b-ab8a-87e352d31a90/scratchpad/icons/FaBullhorn.png">    </p:cNvPr>
+          <p:cNvPicPr>
+            <a:picLocks noChangeAspect="1"/>
+          </p:cNvPicPr>
+          <p:nvPr/>
+        </p:nvPicPr>
+        <p:blipFill>
+          <a:blip r:embed="rId2"/>
+          <a:stretch>
+            <a:fillRect/>
+          </a:stretch>
+        </p:blipFill>
+        <p:spPr>
+          <a:xfrm>
+            <a:off x="1067471" y="2210471"/>
+            <a:ext cx="260787" cy="260787"/>
+          </a:xfrm>
+          <a:prstGeom prst="rect">
+            <a:avLst/>
+          </a:prstGeom>
+        </p:spPr>
+      </p:pic>
+      <p:sp>
+        <p:nvSpPr>
+          <p:cNvPr id="9" name="Text 6"/>
+          <p:cNvSpPr/>
+          <p:nvPr/>
+        </p:nvSpPr>
+        <p:spPr>
+          <a:xfrm>
+            <a:off x="1664208" y="1965960"/>
+            <a:ext cx="4169664" cy="365760"/>
           </a:xfrm>
           <a:prstGeom prst="rect">
             <a:avLst/>
@@ -6720,53 +8155,7 @@
               <a:buNone/>
             </a:pPr>
             <a:r>
-              <a:rPr lang="en-US" sz="4400" b="1" dirty="0">
-                <a:solidFill>
-                  <a:srgbClr val="E8354F"/>
-                </a:solidFill>
-                <a:effectLst>
-                  <a:glow rad="114300">
-                    <a:srgbClr val="C8102E">
-                      <a:alpha val="45000"/>
-                    </a:srgbClr>
-                  </a:glow>
-                </a:effectLst>
-                <a:latin typeface="Arial Black" pitchFamily="34" charset="0"/>
-                <a:ea typeface="Arial Black" pitchFamily="34" charset="-122"/>
-                <a:cs typeface="Arial Black" pitchFamily="34" charset="-120"/>
-              </a:rPr>
-              <a:t>60th</a:t>
-            </a:r>
-            <a:endParaRPr lang="en-US" sz="4400" dirty="0"/>
-          </a:p>
-        </p:txBody>
-      </p:sp>
-      <p:sp>
-        <p:nvSpPr>
-          <p:cNvPr id="8" name="Text 6"/>
-          <p:cNvSpPr/>
-          <p:nvPr/>
-        </p:nvSpPr>
-        <p:spPr>
-          <a:xfrm>
-            <a:off x="960120" y="3291840"/>
-            <a:ext cx="2871216" cy="411480"/>
-          </a:xfrm>
-          <a:prstGeom prst="rect">
-            <a:avLst/>
-          </a:prstGeom>
-          <a:noFill/>
-          <a:ln/>
-        </p:spPr>
-        <p:txBody>
-          <a:bodyPr wrap="square" lIns="0" tIns="0" rIns="0" bIns="0" rtlCol="0" anchor="ctr"/>
-          <a:lstStyle/>
-          <a:p>
-            <a:pPr indent="0" marL="0">
-              <a:buNone/>
-            </a:pPr>
-            <a:r>
-              <a:rPr lang="en-US" sz="1550" b="1" dirty="0">
+              <a:rPr lang="en-US" sz="1450" b="1" dirty="0">
                 <a:solidFill>
                   <a:srgbClr val="FFFFFF"/>
                 </a:solidFill>
@@ -6774,22 +8163,22 @@
                 <a:ea typeface="Yu Gothic" pitchFamily="34" charset="-122"/>
                 <a:cs typeface="Yu Gothic" pitchFamily="34" charset="-120"/>
               </a:rPr>
-              <a:t>シリーズ60周年イヤー</a:t>
-            </a:r>
-            <a:endParaRPr lang="en-US" sz="1550" dirty="0"/>
-          </a:p>
-        </p:txBody>
-      </p:sp>
-      <p:sp>
-        <p:nvSpPr>
-          <p:cNvPr id="9" name="Text 7"/>
-          <p:cNvSpPr/>
-          <p:nvPr/>
-        </p:nvSpPr>
-        <p:spPr>
-          <a:xfrm>
-            <a:off x="960120" y="3794760"/>
-            <a:ext cx="2907792" cy="2011680"/>
+              <a:t>TVCM・広告・OOH</a:t>
+            </a:r>
+            <a:endParaRPr lang="en-US" sz="1450" dirty="0"/>
+          </a:p>
+        </p:txBody>
+      </p:sp>
+      <p:sp>
+        <p:nvSpPr>
+          <p:cNvPr id="10" name="Text 7"/>
+          <p:cNvSpPr/>
+          <p:nvPr/>
+        </p:nvSpPr>
+        <p:spPr>
+          <a:xfrm>
+            <a:off x="1664208" y="2350008"/>
+            <a:ext cx="4078224" cy="1143000"/>
           </a:xfrm>
           <a:prstGeom prst="rect">
             <a:avLst/>
@@ -6803,7 +8192,7 @@
           <a:p>
             <a:pPr indent="0" marL="0">
               <a:lnSpc>
-                <a:spcPts val="1700"/>
+                <a:spcPts val="1650"/>
               </a:lnSpc>
               <a:buNone/>
             </a:pPr>
@@ -6816,7 +8205,7 @@
                 <a:ea typeface="Yu Gothic" pitchFamily="34" charset="-122"/>
                 <a:cs typeface="Yu Gothic" pitchFamily="34" charset="-120"/>
               </a:rPr>
-              <a:t>60周年プロジェクトが進行中。新シリーズ『ウルトラマンティオ』放送中、60周年展が全国巡回中。露出と熱量が60年間で最大の年。公式文脈に入れる枠は、今年だけ。</a:t>
+              <a:t>ウルトラマンが Rokid Glasses をかけて変身するTVCM / WEB CM。屋外は都心の巨大ウルトラマンAR演出と連動し、発売を「事件」として見せる。</a:t>
             </a:r>
             <a:endParaRPr lang="en-US" sz="1100" dirty="0"/>
           </a:p>
@@ -6824,18 +8213,18 @@
       </p:sp>
       <p:sp>
         <p:nvSpPr>
-          <p:cNvPr id="10" name="Shape 8"/>
-          <p:cNvSpPr/>
-          <p:nvPr/>
-        </p:nvSpPr>
-        <p:spPr>
-          <a:xfrm>
-            <a:off x="4334256" y="1965960"/>
-            <a:ext cx="3511296" cy="3977640"/>
+          <p:cNvPr id="11" name="Shape 8"/>
+          <p:cNvSpPr/>
+          <p:nvPr/>
+        </p:nvSpPr>
+        <p:spPr>
+          <a:xfrm>
+            <a:off x="6190488" y="1783080"/>
+            <a:ext cx="5358384" cy="1810512"/>
           </a:xfrm>
           <a:prstGeom prst="roundRect">
             <a:avLst>
-              <a:gd name="adj" fmla="val 2604"/>
+              <a:gd name="adj" fmla="val 5051"/>
             </a:avLst>
           </a:prstGeom>
           <a:solidFill>
@@ -6853,14 +8242,65 @@
       </p:sp>
       <p:sp>
         <p:nvSpPr>
-          <p:cNvPr id="11" name="Text 9"/>
-          <p:cNvSpPr/>
-          <p:nvPr/>
-        </p:nvSpPr>
-        <p:spPr>
-          <a:xfrm>
-            <a:off x="4654296" y="2286000"/>
-            <a:ext cx="2871216" cy="868680"/>
+          <p:cNvPr id="12" name="Shape 9"/>
+          <p:cNvSpPr/>
+          <p:nvPr/>
+        </p:nvSpPr>
+        <p:spPr>
+          <a:xfrm>
+            <a:off x="6464808" y="2057400"/>
+            <a:ext cx="566928" cy="566928"/>
+          </a:xfrm>
+          <a:prstGeom prst="ellipse">
+            <a:avLst/>
+          </a:prstGeom>
+          <a:solidFill>
+            <a:srgbClr val="C8102E"/>
+          </a:solidFill>
+          <a:ln/>
+          <a:effectLst>
+            <a:outerShdw sx="100000" sy="100000" kx="0" ky="0" algn="bl" rotWithShape="0" blurRad="152400" dist="50800" dir="16200000">
+              <a:srgbClr val="C8102E">
+                <a:alpha val="50000"/>
+              </a:srgbClr>
+            </a:outerShdw>
+          </a:effectLst>
+        </p:spPr>
+      </p:sp>
+      <p:pic>
+        <p:nvPicPr>
+          <p:cNvPr id="13" name="Image 1" descr="/tmp/claude-0/-home-user-kessho-lens/63555445-5e6f-583b-ab8a-87e352d31a90/scratchpad/icons/FaUsers.png">    </p:cNvPr>
+          <p:cNvPicPr>
+            <a:picLocks noChangeAspect="1"/>
+          </p:cNvPicPr>
+          <p:nvPr/>
+        </p:nvPicPr>
+        <p:blipFill>
+          <a:blip r:embed="rId3"/>
+          <a:stretch>
+            <a:fillRect/>
+          </a:stretch>
+        </p:blipFill>
+        <p:spPr>
+          <a:xfrm>
+            <a:off x="6617879" y="2210471"/>
+            <a:ext cx="260787" cy="260787"/>
+          </a:xfrm>
+          <a:prstGeom prst="rect">
+            <a:avLst/>
+          </a:prstGeom>
+        </p:spPr>
+      </p:pic>
+      <p:sp>
+        <p:nvSpPr>
+          <p:cNvPr id="14" name="Text 10"/>
+          <p:cNvSpPr/>
+          <p:nvPr/>
+        </p:nvSpPr>
+        <p:spPr>
+          <a:xfrm>
+            <a:off x="7214616" y="1965960"/>
+            <a:ext cx="4169664" cy="365760"/>
           </a:xfrm>
           <a:prstGeom prst="rect">
             <a:avLst/>
@@ -6876,53 +8316,7 @@
               <a:buNone/>
             </a:pPr>
             <a:r>
-              <a:rPr lang="en-US" sz="4400" b="1" dirty="0">
-                <a:solidFill>
-                  <a:srgbClr val="E8354F"/>
-                </a:solidFill>
-                <a:effectLst>
-                  <a:glow rad="114300">
-                    <a:srgbClr val="C8102E">
-                      <a:alpha val="45000"/>
-                    </a:srgbClr>
-                  </a:glow>
-                </a:effectLst>
-                <a:latin typeface="Arial Black" pitchFamily="34" charset="0"/>
-                <a:ea typeface="Arial Black" pitchFamily="34" charset="-122"/>
-                <a:cs typeface="Arial Black" pitchFamily="34" charset="-120"/>
-              </a:rPr>
-              <a:t>7.10</a:t>
-            </a:r>
-            <a:endParaRPr lang="en-US" sz="4400" dirty="0"/>
-          </a:p>
-        </p:txBody>
-      </p:sp>
-      <p:sp>
-        <p:nvSpPr>
-          <p:cNvPr id="12" name="Text 10"/>
-          <p:cNvSpPr/>
-          <p:nvPr/>
-        </p:nvSpPr>
-        <p:spPr>
-          <a:xfrm>
-            <a:off x="4654296" y="3291840"/>
-            <a:ext cx="2871216" cy="411480"/>
-          </a:xfrm>
-          <a:prstGeom prst="rect">
-            <a:avLst/>
-          </a:prstGeom>
-          <a:noFill/>
-          <a:ln/>
-        </p:spPr>
-        <p:txBody>
-          <a:bodyPr wrap="square" lIns="0" tIns="0" rIns="0" bIns="0" rtlCol="0" anchor="ctr"/>
-          <a:lstStyle/>
-          <a:p>
-            <a:pPr indent="0" marL="0">
-              <a:buNone/>
-            </a:pPr>
-            <a:r>
-              <a:rPr lang="en-US" sz="1550" b="1" dirty="0">
+              <a:rPr lang="en-US" sz="1450" b="1" dirty="0">
                 <a:solidFill>
                   <a:srgbClr val="FFFFFF"/>
                 </a:solidFill>
@@ -6930,22 +8324,22 @@
                 <a:ea typeface="Yu Gothic" pitchFamily="34" charset="-122"/>
                 <a:cs typeface="Yu Gothic" pitchFamily="34" charset="-120"/>
               </a:rPr>
-              <a:t>運命の発売日</a:t>
-            </a:r>
-            <a:endParaRPr lang="en-US" sz="1550" dirty="0"/>
-          </a:p>
-        </p:txBody>
-      </p:sp>
-      <p:sp>
-        <p:nvSpPr>
-          <p:cNvPr id="13" name="Text 11"/>
-          <p:cNvSpPr/>
-          <p:nvPr/>
-        </p:nvSpPr>
-        <p:spPr>
-          <a:xfrm>
-            <a:off x="4654296" y="3794760"/>
-            <a:ext cx="2907792" cy="2011680"/>
+              <a:t>イベント・PR</a:t>
+            </a:r>
+            <a:endParaRPr lang="en-US" sz="1450" dirty="0"/>
+          </a:p>
+        </p:txBody>
+      </p:sp>
+      <p:sp>
+        <p:nvSpPr>
+          <p:cNvPr id="15" name="Text 11"/>
+          <p:cNvSpPr/>
+          <p:nvPr/>
+        </p:nvSpPr>
+        <p:spPr>
+          <a:xfrm>
+            <a:off x="7214616" y="2350008"/>
+            <a:ext cx="4078224" cy="1143000"/>
           </a:xfrm>
           <a:prstGeom prst="rect">
             <a:avLst/>
@@ -6959,7 +8353,7 @@
           <a:p>
             <a:pPr indent="0" marL="0">
               <a:lnSpc>
-                <a:spcPts val="1700"/>
+                <a:spcPts val="1650"/>
               </a:lnSpc>
               <a:buNone/>
             </a:pPr>
@@ -6972,7 +8366,7 @@
                 <a:ea typeface="Yu Gothic" pitchFamily="34" charset="-122"/>
                 <a:cs typeface="Yu Gothic" pitchFamily="34" charset="-120"/>
               </a:rPr>
-              <a:t>Rokid Glasses の日本発売日は「ウルトラマンの日」と同日。この偶然を必然に変え、毎年7月10日を「変身の日」として更新し続ける記念日設計ができる。</a:t>
+              <a:t>共同発表会にウルトラマンが登壇。7月10日「変身の日」と60周年展のステージに連動させ、発表そのものをニュース化する。</a:t>
             </a:r>
             <a:endParaRPr lang="en-US" sz="1100" dirty="0"/>
           </a:p>
@@ -6980,18 +8374,18 @@
       </p:sp>
       <p:sp>
         <p:nvSpPr>
-          <p:cNvPr id="14" name="Shape 12"/>
-          <p:cNvSpPr/>
-          <p:nvPr/>
-        </p:nvSpPr>
-        <p:spPr>
-          <a:xfrm>
-            <a:off x="8028432" y="1965960"/>
-            <a:ext cx="3511296" cy="3977640"/>
+          <p:cNvPr id="16" name="Shape 12"/>
+          <p:cNvSpPr/>
+          <p:nvPr/>
+        </p:nvSpPr>
+        <p:spPr>
+          <a:xfrm>
+            <a:off x="640080" y="3776472"/>
+            <a:ext cx="5358384" cy="1810512"/>
           </a:xfrm>
           <a:prstGeom prst="roundRect">
             <a:avLst>
-              <a:gd name="adj" fmla="val 2604"/>
+              <a:gd name="adj" fmla="val 5051"/>
             </a:avLst>
           </a:prstGeom>
           <a:solidFill>
@@ -7009,14 +8403,65 @@
       </p:sp>
       <p:sp>
         <p:nvSpPr>
-          <p:cNvPr id="15" name="Text 13"/>
-          <p:cNvSpPr/>
-          <p:nvPr/>
-        </p:nvSpPr>
-        <p:spPr>
-          <a:xfrm>
-            <a:off x="8348472" y="2286000"/>
-            <a:ext cx="2871216" cy="868680"/>
+          <p:cNvPr id="17" name="Shape 13"/>
+          <p:cNvSpPr/>
+          <p:nvPr/>
+        </p:nvSpPr>
+        <p:spPr>
+          <a:xfrm>
+            <a:off x="914400" y="4050792"/>
+            <a:ext cx="566928" cy="566928"/>
+          </a:xfrm>
+          <a:prstGeom prst="ellipse">
+            <a:avLst/>
+          </a:prstGeom>
+          <a:solidFill>
+            <a:srgbClr val="C8102E"/>
+          </a:solidFill>
+          <a:ln/>
+          <a:effectLst>
+            <a:outerShdw sx="100000" sy="100000" kx="0" ky="0" algn="bl" rotWithShape="0" blurRad="152400" dist="50800" dir="16200000">
+              <a:srgbClr val="C8102E">
+                <a:alpha val="50000"/>
+              </a:srgbClr>
+            </a:outerShdw>
+          </a:effectLst>
+        </p:spPr>
+      </p:sp>
+      <p:pic>
+        <p:nvPicPr>
+          <p:cNvPr id="18" name="Image 2" descr="/tmp/claude-0/-home-user-kessho-lens/63555445-5e6f-583b-ab8a-87e352d31a90/scratchpad/icons/FaStore.png">    </p:cNvPr>
+          <p:cNvPicPr>
+            <a:picLocks noChangeAspect="1"/>
+          </p:cNvPicPr>
+          <p:nvPr/>
+        </p:nvPicPr>
+        <p:blipFill>
+          <a:blip r:embed="rId4"/>
+          <a:stretch>
+            <a:fillRect/>
+          </a:stretch>
+        </p:blipFill>
+        <p:spPr>
+          <a:xfrm>
+            <a:off x="1067471" y="4203863"/>
+            <a:ext cx="260787" cy="260787"/>
+          </a:xfrm>
+          <a:prstGeom prst="rect">
+            <a:avLst/>
+          </a:prstGeom>
+        </p:spPr>
+      </p:pic>
+      <p:sp>
+        <p:nvSpPr>
+          <p:cNvPr id="19" name="Text 14"/>
+          <p:cNvSpPr/>
+          <p:nvPr/>
+        </p:nvSpPr>
+        <p:spPr>
+          <a:xfrm>
+            <a:off x="1664208" y="3959352"/>
+            <a:ext cx="4169664" cy="365760"/>
           </a:xfrm>
           <a:prstGeom prst="rect">
             <a:avLst/>
@@ -7032,111 +8477,279 @@
               <a:buNone/>
             </a:pPr>
             <a:r>
-              <a:rPr lang="en-US" sz="4400" b="1" dirty="0">
+              <a:rPr lang="en-US" sz="1450" b="1" dirty="0">
+                <a:solidFill>
+                  <a:srgbClr val="FFFFFF"/>
+                </a:solidFill>
+                <a:latin typeface="Yu Gothic" pitchFamily="34" charset="0"/>
+                <a:ea typeface="Yu Gothic" pitchFamily="34" charset="-122"/>
+                <a:cs typeface="Yu Gothic" pitchFamily="34" charset="-120"/>
+              </a:rPr>
+              <a:t>店頭・体験</a:t>
+            </a:r>
+            <a:endParaRPr lang="en-US" sz="1450" dirty="0"/>
+          </a:p>
+        </p:txBody>
+      </p:sp>
+      <p:sp>
+        <p:nvSpPr>
+          <p:cNvPr id="20" name="Text 15"/>
+          <p:cNvSpPr/>
+          <p:nvPr/>
+        </p:nvSpPr>
+        <p:spPr>
+          <a:xfrm>
+            <a:off x="1664208" y="4343400"/>
+            <a:ext cx="4078224" cy="1143000"/>
+          </a:xfrm>
+          <a:prstGeom prst="rect">
+            <a:avLst/>
+          </a:prstGeom>
+          <a:noFill/>
+          <a:ln/>
+        </p:spPr>
+        <p:txBody>
+          <a:bodyPr wrap="square" lIns="0" tIns="0" rIns="0" bIns="0" rtlCol="0" anchor="t"/>
+          <a:lstStyle/>
+          <a:p>
+            <a:pPr indent="0" marL="0">
+              <a:lnSpc>
+                <a:spcPts val="1650"/>
+              </a:lnSpc>
+              <a:buNone/>
+            </a:pPr>
+            <a:r>
+              <a:rPr lang="en-US" sz="1100" dirty="0">
+                <a:solidFill>
+                  <a:srgbClr val="AEB6C4"/>
+                </a:solidFill>
+                <a:latin typeface="Yu Gothic" pitchFamily="34" charset="0"/>
+                <a:ea typeface="Yu Gothic" pitchFamily="34" charset="-122"/>
+                <a:cs typeface="Yu Gothic" pitchFamily="34" charset="-120"/>
+              </a:rPr>
+              <a:t>5都市ポップアップ + 量販約75店舗で「変身体験」デモを標準化。フィナーレの巨大ウルトラマン召喚が購入転換の山場になる。</a:t>
+            </a:r>
+            <a:endParaRPr lang="en-US" sz="1100" dirty="0"/>
+          </a:p>
+        </p:txBody>
+      </p:sp>
+      <p:sp>
+        <p:nvSpPr>
+          <p:cNvPr id="21" name="Shape 16"/>
+          <p:cNvSpPr/>
+          <p:nvPr/>
+        </p:nvSpPr>
+        <p:spPr>
+          <a:xfrm>
+            <a:off x="6190488" y="3776472"/>
+            <a:ext cx="5358384" cy="1810512"/>
+          </a:xfrm>
+          <a:prstGeom prst="roundRect">
+            <a:avLst>
+              <a:gd name="adj" fmla="val 5051"/>
+            </a:avLst>
+          </a:prstGeom>
+          <a:solidFill>
+            <a:srgbClr val="141926">
+              <a:alpha val="86000"/>
+            </a:srgbClr>
+          </a:solidFill>
+          <a:ln w="12700">
+            <a:solidFill>
+              <a:srgbClr val="2A3140"/>
+            </a:solidFill>
+            <a:prstDash val="solid"/>
+          </a:ln>
+        </p:spPr>
+      </p:sp>
+      <p:sp>
+        <p:nvSpPr>
+          <p:cNvPr id="22" name="Shape 17"/>
+          <p:cNvSpPr/>
+          <p:nvPr/>
+        </p:nvSpPr>
+        <p:spPr>
+          <a:xfrm>
+            <a:off x="6464808" y="4050792"/>
+            <a:ext cx="566928" cy="566928"/>
+          </a:xfrm>
+          <a:prstGeom prst="ellipse">
+            <a:avLst/>
+          </a:prstGeom>
+          <a:solidFill>
+            <a:srgbClr val="C8102E"/>
+          </a:solidFill>
+          <a:ln/>
+          <a:effectLst>
+            <a:outerShdw sx="100000" sy="100000" kx="0" ky="0" algn="bl" rotWithShape="0" blurRad="152400" dist="50800" dir="16200000">
+              <a:srgbClr val="C8102E">
+                <a:alpha val="50000"/>
+              </a:srgbClr>
+            </a:outerShdw>
+          </a:effectLst>
+        </p:spPr>
+      </p:sp>
+      <p:pic>
+        <p:nvPicPr>
+          <p:cNvPr id="23" name="Image 3" descr="/tmp/claude-0/-home-user-kessho-lens/63555445-5e6f-583b-ab8a-87e352d31a90/scratchpad/icons/FaHashtag.png">    </p:cNvPr>
+          <p:cNvPicPr>
+            <a:picLocks noChangeAspect="1"/>
+          </p:cNvPicPr>
+          <p:nvPr/>
+        </p:nvPicPr>
+        <p:blipFill>
+          <a:blip r:embed="rId5"/>
+          <a:stretch>
+            <a:fillRect/>
+          </a:stretch>
+        </p:blipFill>
+        <p:spPr>
+          <a:xfrm>
+            <a:off x="6617879" y="4203863"/>
+            <a:ext cx="260787" cy="260787"/>
+          </a:xfrm>
+          <a:prstGeom prst="rect">
+            <a:avLst/>
+          </a:prstGeom>
+        </p:spPr>
+      </p:pic>
+      <p:sp>
+        <p:nvSpPr>
+          <p:cNvPr id="24" name="Text 18"/>
+          <p:cNvSpPr/>
+          <p:nvPr/>
+        </p:nvSpPr>
+        <p:spPr>
+          <a:xfrm>
+            <a:off x="7214616" y="3959352"/>
+            <a:ext cx="4169664" cy="365760"/>
+          </a:xfrm>
+          <a:prstGeom prst="rect">
+            <a:avLst/>
+          </a:prstGeom>
+          <a:noFill/>
+          <a:ln/>
+        </p:spPr>
+        <p:txBody>
+          <a:bodyPr wrap="square" lIns="0" tIns="0" rIns="0" bIns="0" rtlCol="0" anchor="ctr"/>
+          <a:lstStyle/>
+          <a:p>
+            <a:pPr indent="0" marL="0">
+              <a:buNone/>
+            </a:pPr>
+            <a:r>
+              <a:rPr lang="en-US" sz="1450" b="1" dirty="0">
+                <a:solidFill>
+                  <a:srgbClr val="FFFFFF"/>
+                </a:solidFill>
+                <a:latin typeface="Yu Gothic" pitchFamily="34" charset="0"/>
+                <a:ea typeface="Yu Gothic" pitchFamily="34" charset="-122"/>
+                <a:cs typeface="Yu Gothic" pitchFamily="34" charset="-120"/>
+              </a:rPr>
+              <a:t>SNS・UGC</a:t>
+            </a:r>
+            <a:endParaRPr lang="en-US" sz="1450" dirty="0"/>
+          </a:p>
+        </p:txBody>
+      </p:sp>
+      <p:sp>
+        <p:nvSpPr>
+          <p:cNvPr id="25" name="Text 19"/>
+          <p:cNvSpPr/>
+          <p:nvPr/>
+        </p:nvSpPr>
+        <p:spPr>
+          <a:xfrm>
+            <a:off x="7214616" y="4343400"/>
+            <a:ext cx="4078224" cy="1143000"/>
+          </a:xfrm>
+          <a:prstGeom prst="rect">
+            <a:avLst/>
+          </a:prstGeom>
+          <a:noFill/>
+          <a:ln/>
+        </p:spPr>
+        <p:txBody>
+          <a:bodyPr wrap="square" lIns="0" tIns="0" rIns="0" bIns="0" rtlCol="0" anchor="t"/>
+          <a:lstStyle/>
+          <a:p>
+            <a:pPr indent="0" marL="0">
+              <a:lnSpc>
+                <a:spcPts val="1650"/>
+              </a:lnSpc>
+              <a:buNone/>
+            </a:pPr>
+            <a:r>
+              <a:rPr lang="en-US" sz="1100" dirty="0">
+                <a:solidFill>
+                  <a:srgbClr val="AEB6C4"/>
+                </a:solidFill>
+                <a:latin typeface="Yu Gothic" pitchFamily="34" charset="0"/>
+                <a:ea typeface="Yu Gothic" pitchFamily="34" charset="-122"/>
+                <a:cs typeface="Yu Gothic" pitchFamily="34" charset="-120"/>
+              </a:rPr>
+              <a:t>「#変身してみた」光線撮影チャレンジ。公式素材の提供とリポスト運用で、購入者自身がキャンペーンの広告塔になる。</a:t>
+            </a:r>
+            <a:endParaRPr lang="en-US" sz="1100" dirty="0"/>
+          </a:p>
+        </p:txBody>
+      </p:sp>
+      <p:sp>
+        <p:nvSpPr>
+          <p:cNvPr id="26" name="Text 20"/>
+          <p:cNvSpPr/>
+          <p:nvPr/>
+        </p:nvSpPr>
+        <p:spPr>
+          <a:xfrm>
+            <a:off x="640080" y="5943600"/>
+            <a:ext cx="10881360" cy="502920"/>
+          </a:xfrm>
+          <a:prstGeom prst="rect">
+            <a:avLst/>
+          </a:prstGeom>
+          <a:noFill/>
+          <a:ln/>
+        </p:spPr>
+        <p:txBody>
+          <a:bodyPr wrap="square" lIns="0" tIns="0" rIns="0" bIns="0" rtlCol="0" anchor="ctr"/>
+          <a:lstStyle/>
+          <a:p>
+            <a:pPr indent="0" marL="0">
+              <a:buNone/>
+            </a:pPr>
+            <a:r>
+              <a:rPr lang="en-US" sz="1650" b="1" dirty="0">
+                <a:solidFill>
+                  <a:srgbClr val="FFFFFF"/>
+                </a:solidFill>
+                <a:latin typeface="Yu Gothic" pitchFamily="34" charset="0"/>
+                <a:ea typeface="Yu Gothic" pitchFamily="34" charset="-122"/>
+                <a:cs typeface="Yu Gothic" pitchFamily="34" charset="-120"/>
+              </a:rPr>
+              <a:t>限定モデルは「点」にすぎません。</a:t>
+            </a:r>
+            <a:pPr indent="0" marL="0">
+              <a:buNone/>
+            </a:pPr>
+            <a:r>
+              <a:rPr lang="en-US" sz="1650" b="1" dirty="0">
                 <a:solidFill>
                   <a:srgbClr val="E8354F"/>
                 </a:solidFill>
-                <a:effectLst>
-                  <a:glow rad="114300">
-                    <a:srgbClr val="C8102E">
-                      <a:alpha val="45000"/>
-                    </a:srgbClr>
-                  </a:glow>
-                </a:effectLst>
-                <a:latin typeface="Arial Black" pitchFamily="34" charset="0"/>
-                <a:ea typeface="Arial Black" pitchFamily="34" charset="-122"/>
-                <a:cs typeface="Arial Black" pitchFamily="34" charset="-120"/>
-              </a:rPr>
-              <a:t>1st</a:t>
-            </a:r>
-            <a:endParaRPr lang="en-US" sz="4400" dirty="0"/>
-          </a:p>
-        </p:txBody>
-      </p:sp>
-      <p:sp>
-        <p:nvSpPr>
-          <p:cNvPr id="16" name="Text 14"/>
-          <p:cNvSpPr/>
-          <p:nvPr/>
-        </p:nvSpPr>
-        <p:spPr>
-          <a:xfrm>
-            <a:off x="8348472" y="3291840"/>
-            <a:ext cx="2871216" cy="411480"/>
-          </a:xfrm>
-          <a:prstGeom prst="rect">
-            <a:avLst/>
-          </a:prstGeom>
-          <a:noFill/>
-          <a:ln/>
-        </p:spPr>
-        <p:txBody>
-          <a:bodyPr wrap="square" lIns="0" tIns="0" rIns="0" bIns="0" rtlCol="0" anchor="ctr"/>
-          <a:lstStyle/>
-          <a:p>
-            <a:pPr indent="0" marL="0">
-              <a:buNone/>
-            </a:pPr>
-            <a:r>
-              <a:rPr lang="en-US" sz="1550" b="1" dirty="0">
-                <a:solidFill>
-                  <a:srgbClr val="FFFFFF"/>
-                </a:solidFill>
-                <a:latin typeface="Yu Gothic" pitchFamily="34" charset="0"/>
-                <a:ea typeface="Yu Gothic" pitchFamily="34" charset="-122"/>
-                <a:cs typeface="Yu Gothic" pitchFamily="34" charset="-120"/>
-              </a:rPr>
-              <a:t>最初のIP体験の定義権</a:t>
-            </a:r>
-            <a:endParaRPr lang="en-US" sz="1550" dirty="0"/>
-          </a:p>
-        </p:txBody>
-      </p:sp>
-      <p:sp>
-        <p:nvSpPr>
-          <p:cNvPr id="17" name="Text 15"/>
-          <p:cNvSpPr/>
-          <p:nvPr/>
-        </p:nvSpPr>
-        <p:spPr>
-          <a:xfrm>
-            <a:off x="8348472" y="3794760"/>
-            <a:ext cx="2907792" cy="2011680"/>
-          </a:xfrm>
-          <a:prstGeom prst="rect">
-            <a:avLst/>
-          </a:prstGeom>
-          <a:noFill/>
-          <a:ln/>
-        </p:spPr>
-        <p:txBody>
-          <a:bodyPr wrap="square" lIns="0" tIns="0" rIns="0" bIns="0" rtlCol="0" anchor="t"/>
-          <a:lstStyle/>
-          <a:p>
-            <a:pPr indent="0" marL="0">
-              <a:lnSpc>
-                <a:spcPts val="1700"/>
-              </a:lnSpc>
-              <a:buNone/>
-            </a:pPr>
-            <a:r>
-              <a:rPr lang="en-US" sz="1100" dirty="0">
-                <a:solidFill>
-                  <a:srgbClr val="AEB6C4"/>
-                </a:solidFill>
-                <a:latin typeface="Yu Gothic" pitchFamily="34" charset="0"/>
-                <a:ea typeface="Yu Gothic" pitchFamily="34" charset="-122"/>
-                <a:cs typeface="Yu Gothic" pitchFamily="34" charset="-120"/>
-              </a:rPr>
-              <a:t>ARグラスは機能訴求から体験訴求へ移る直前。カテゴリ最初の代表的IP体験を作ったブランドが、以後数年の連想を独占する。年末商戦前が最後の窓。</a:t>
-            </a:r>
-            <a:endParaRPr lang="en-US" sz="1100" dirty="0"/>
-          </a:p>
-        </p:txBody>
-      </p:sp>
-      <p:sp>
-        <p:nvSpPr>
-          <p:cNvPr id="18" name="Text 16"/>
+                <a:latin typeface="Yu Gothic" pitchFamily="34" charset="0"/>
+                <a:ea typeface="Yu Gothic" pitchFamily="34" charset="-122"/>
+                <a:cs typeface="Yu Gothic" pitchFamily="34" charset="-120"/>
+              </a:rPr>
+              <a:t>広告・イベント・店頭・SNSの全面で、ウルトラマンが「面」を張ります。</a:t>
+            </a:r>
+            <a:endParaRPr lang="en-US" sz="1650" dirty="0"/>
+          </a:p>
+        </p:txBody>
+      </p:sp>
+      <p:sp>
+        <p:nvSpPr>
+          <p:cNvPr id="27" name="Text 21"/>
           <p:cNvSpPr/>
           <p:nvPr/>
         </p:nvSpPr>
@@ -7221,7 +8834,7 @@
         <p:spPr>
           <a:xfrm>
             <a:off x="4206240" y="274320"/>
-            <a:ext cx="7406640" cy="2011680"/>
+            <a:ext cx="7406640" cy="2194560"/>
           </a:xfrm>
           <a:prstGeom prst="rect">
             <a:avLst/>
@@ -7237,7 +8850,7 @@
               <a:buNone/>
             </a:pPr>
             <a:r>
-              <a:rPr lang="en-US" sz="11000" b="1" spc="600" kern="0" dirty="0">
+              <a:rPr lang="en-US" sz="12000" b="1" spc="600" kern="0" dirty="0">
                 <a:solidFill>
                   <a:srgbClr val="181E2B"/>
                 </a:solidFill>
@@ -7245,9 +8858,9 @@
                 <a:ea typeface="Arial Black" pitchFamily="34" charset="-122"/>
                 <a:cs typeface="Arial Black" pitchFamily="34" charset="-120"/>
               </a:rPr>
-              <a:t>PLAN</a:t>
-            </a:r>
-            <a:endParaRPr lang="en-US" sz="11000" dirty="0"/>
+              <a:t>2026</a:t>
+            </a:r>
+            <a:endParaRPr lang="en-US" sz="12000" dirty="0"/>
           </a:p>
         </p:txBody>
       </p:sp>
@@ -7311,7 +8924,7 @@
                 <a:ea typeface="Arial" pitchFamily="34" charset="-122"/>
                 <a:cs typeface="Arial" pitchFamily="34" charset="-120"/>
               </a:rPr>
-              <a:t>06 / PROPOSAL</a:t>
+              <a:t>06 / WHY NOW</a:t>
             </a:r>
             <a:endParaRPr lang="en-US" sz="1050" dirty="0"/>
           </a:p>
@@ -7350,7 +8963,7 @@
                 <a:ea typeface="Yu Gothic" pitchFamily="34" charset="-122"/>
                 <a:cs typeface="Yu Gothic" pitchFamily="34" charset="-120"/>
               </a:rPr>
-              <a:t>ご提案 — 2つのプラン</a:t>
+              <a:t>なぜ、今なのか — 2026年にしかない3つの理由</a:t>
             </a:r>
             <a:endParaRPr lang="en-US" sz="2800" dirty="0"/>
           </a:p>
@@ -7364,12 +8977,12 @@
         </p:nvSpPr>
         <p:spPr>
           <a:xfrm>
-            <a:off x="640080" y="1691640"/>
-            <a:ext cx="5349240" cy="4389120"/>
+            <a:off x="640080" y="1965960"/>
+            <a:ext cx="3511296" cy="3977640"/>
           </a:xfrm>
           <a:prstGeom prst="roundRect">
             <a:avLst>
-              <a:gd name="adj" fmla="val 2083"/>
+              <a:gd name="adj" fmla="val 2604"/>
             </a:avLst>
           </a:prstGeom>
           <a:solidFill>
@@ -7387,65 +9000,14 @@
       </p:sp>
       <p:sp>
         <p:nvSpPr>
-          <p:cNvPr id="7" name="Shape 5"/>
-          <p:cNvSpPr/>
-          <p:nvPr/>
-        </p:nvSpPr>
-        <p:spPr>
-          <a:xfrm>
-            <a:off x="969264" y="1975104"/>
-            <a:ext cx="566928" cy="566928"/>
-          </a:xfrm>
-          <a:prstGeom prst="ellipse">
-            <a:avLst/>
-          </a:prstGeom>
-          <a:solidFill>
-            <a:srgbClr val="C8102E"/>
-          </a:solidFill>
-          <a:ln/>
-          <a:effectLst>
-            <a:outerShdw sx="100000" sy="100000" kx="0" ky="0" algn="bl" rotWithShape="0" blurRad="152400" dist="50800" dir="16200000">
-              <a:srgbClr val="C8102E">
-                <a:alpha val="50000"/>
-              </a:srgbClr>
-            </a:outerShdw>
-          </a:effectLst>
-        </p:spPr>
-      </p:sp>
-      <p:pic>
-        <p:nvPicPr>
-          <p:cNvPr id="8" name="Image 0" descr="/tmp/claude-0/-home-user-kessho-lens/63555445-5e6f-583b-ab8a-87e352d31a90/scratchpad/icons/FaBolt.png">    </p:cNvPr>
-          <p:cNvPicPr>
-            <a:picLocks noChangeAspect="1"/>
-          </p:cNvPicPr>
-          <p:nvPr/>
-        </p:nvPicPr>
-        <p:blipFill>
-          <a:blip r:embed="rId2"/>
-          <a:stretch>
-            <a:fillRect/>
-          </a:stretch>
-        </p:blipFill>
-        <p:spPr>
-          <a:xfrm>
-            <a:off x="1122335" y="2128175"/>
-            <a:ext cx="260787" cy="260787"/>
-          </a:xfrm>
-          <a:prstGeom prst="rect">
-            <a:avLst/>
-          </a:prstGeom>
-        </p:spPr>
-      </p:pic>
-      <p:sp>
-        <p:nvSpPr>
-          <p:cNvPr id="9" name="Text 6"/>
-          <p:cNvSpPr/>
-          <p:nvPr/>
-        </p:nvSpPr>
-        <p:spPr>
-          <a:xfrm>
-            <a:off x="1691640" y="1975104"/>
-            <a:ext cx="4114800" cy="566928"/>
+          <p:cNvPr id="7" name="Text 5"/>
+          <p:cNvSpPr/>
+          <p:nvPr/>
+        </p:nvSpPr>
+        <p:spPr>
+          <a:xfrm>
+            <a:off x="960120" y="2286000"/>
+            <a:ext cx="2871216" cy="868680"/>
           </a:xfrm>
           <a:prstGeom prst="rect">
             <a:avLst/>
@@ -7461,470 +9023,7 @@
               <a:buNone/>
             </a:pPr>
             <a:r>
-              <a:rPr lang="en-US" sz="1100" b="1" spc="200" kern="0" dirty="0">
-                <a:solidFill>
-                  <a:srgbClr val="78808F"/>
-                </a:solidFill>
-                <a:latin typeface="Arial" pitchFamily="34" charset="0"/>
-                <a:ea typeface="Arial" pitchFamily="34" charset="-122"/>
-                <a:cs typeface="Arial" pitchFamily="34" charset="-120"/>
-              </a:rPr>
-              <a:t>PLAN S</a:t>
-            </a:r>
-            <a:pPr indent="0" marL="0">
-              <a:buNone/>
-            </a:pPr>
-            <a:r>
-              <a:rPr lang="en-US" sz="1900" b="1" spc="100" kern="0" dirty="0">
-                <a:solidFill>
-                  <a:srgbClr val="FFFFFF"/>
-                </a:solidFill>
-                <a:latin typeface="Arial" pitchFamily="34" charset="0"/>
-                <a:ea typeface="Arial" pitchFamily="34" charset="-122"/>
-                <a:cs typeface="Arial" pitchFamily="34" charset="-120"/>
-              </a:rPr>
-              <a:t>　SPARK</a:t>
-            </a:r>
-            <a:endParaRPr lang="en-US" sz="1100" dirty="0"/>
-          </a:p>
-        </p:txBody>
-      </p:sp>
-      <p:sp>
-        <p:nvSpPr>
-          <p:cNvPr id="10" name="Text 7"/>
-          <p:cNvSpPr/>
-          <p:nvPr/>
-        </p:nvSpPr>
-        <p:spPr>
-          <a:xfrm>
-            <a:off x="969264" y="2697480"/>
-            <a:ext cx="4572000" cy="548640"/>
-          </a:xfrm>
-          <a:prstGeom prst="rect">
-            <a:avLst/>
-          </a:prstGeom>
-          <a:noFill/>
-          <a:ln/>
-        </p:spPr>
-        <p:txBody>
-          <a:bodyPr wrap="square" lIns="0" tIns="0" rIns="0" bIns="0" rtlCol="0" anchor="ctr"/>
-          <a:lstStyle/>
-          <a:p>
-            <a:pPr indent="0" marL="0">
-              <a:buNone/>
-            </a:pPr>
-            <a:r>
-              <a:rPr lang="en-US" sz="3500" b="1" dirty="0">
-                <a:solidFill>
-                  <a:srgbClr val="FFFFFF"/>
-                </a:solidFill>
-                <a:latin typeface="Arial" pitchFamily="34" charset="0"/>
-                <a:ea typeface="Arial" pitchFamily="34" charset="-122"/>
-                <a:cs typeface="Arial" pitchFamily="34" charset="-120"/>
-              </a:rPr>
-              <a:t>3,000</a:t>
-            </a:r>
-            <a:pPr indent="0" marL="0">
-              <a:buNone/>
-            </a:pPr>
-            <a:r>
-              <a:rPr lang="en-US" sz="1500" b="1" dirty="0">
-                <a:solidFill>
-                  <a:srgbClr val="AEB6C4"/>
-                </a:solidFill>
-                <a:latin typeface="Yu Gothic" pitchFamily="34" charset="0"/>
-                <a:ea typeface="Yu Gothic" pitchFamily="34" charset="-122"/>
-                <a:cs typeface="Yu Gothic" pitchFamily="34" charset="-120"/>
-              </a:rPr>
-              <a:t> 万円</a:t>
-            </a:r>
-            <a:pPr indent="0" marL="0">
-              <a:buNone/>
-            </a:pPr>
-            <a:r>
-              <a:rPr lang="en-US" sz="1000" dirty="0">
-                <a:solidFill>
-                  <a:srgbClr val="78808F"/>
-                </a:solidFill>
-                <a:latin typeface="Yu Gothic" pitchFamily="34" charset="0"/>
-                <a:ea typeface="Yu Gothic" pitchFamily="34" charset="-122"/>
-                <a:cs typeface="Yu Gothic" pitchFamily="34" charset="-120"/>
-              </a:rPr>
-              <a:t>（税別）</a:t>
-            </a:r>
-            <a:endParaRPr lang="en-US" sz="3500" dirty="0"/>
-          </a:p>
-        </p:txBody>
-      </p:sp>
-      <p:sp>
-        <p:nvSpPr>
-          <p:cNvPr id="11" name="Text 8"/>
-          <p:cNvSpPr/>
-          <p:nvPr/>
-        </p:nvSpPr>
-        <p:spPr>
-          <a:xfrm>
-            <a:off x="969264" y="3383280"/>
-            <a:ext cx="4709160" cy="2514600"/>
-          </a:xfrm>
-          <a:prstGeom prst="rect">
-            <a:avLst/>
-          </a:prstGeom>
-          <a:noFill/>
-          <a:ln/>
-        </p:spPr>
-        <p:txBody>
-          <a:bodyPr wrap="square" lIns="0" tIns="0" rIns="0" bIns="0" rtlCol="0" anchor="t"/>
-          <a:lstStyle/>
-          <a:p>
-            <a:pPr marL="152400" indent="-152400">
-              <a:lnSpc>
-                <a:spcPts val="1600"/>
-              </a:lnSpc>
-              <a:spcAft>
-                <a:spcPts val="800"/>
-              </a:spcAft>
-              <a:buSzPct val="100000"/>
-              <a:buChar char="▪"/>
-            </a:pPr>
-            <a:r>
-              <a:rPr lang="en-US" sz="1150" dirty="0">
-                <a:solidFill>
-                  <a:srgbClr val="E7EAF0"/>
-                </a:solidFill>
-                <a:latin typeface="Yu Gothic" pitchFamily="34" charset="0"/>
-                <a:ea typeface="Yu Gothic" pitchFamily="34" charset="-122"/>
-                <a:cs typeface="Yu Gothic" pitchFamily="34" charset="-120"/>
-              </a:rPr>
-              <a:t>AR体験パック「ULTRAMAN MODE」開発・供与（光線撮影／カラータイマー通知／防衛隊ナビ）</a:t>
-            </a:r>
-            <a:endParaRPr lang="en-US" sz="1150" dirty="0"/>
-          </a:p>
-          <a:p>
-            <a:pPr marL="152400" indent="-152400">
-              <a:lnSpc>
-                <a:spcPts val="1600"/>
-              </a:lnSpc>
-              <a:spcAft>
-                <a:spcPts val="800"/>
-              </a:spcAft>
-              <a:buSzPct val="100000"/>
-              <a:buChar char="▪"/>
-            </a:pPr>
-            <a:r>
-              <a:rPr lang="en-US" sz="1150" dirty="0">
-                <a:solidFill>
-                  <a:srgbClr val="E7EAF0"/>
-                </a:solidFill>
-                <a:latin typeface="Yu Gothic" pitchFamily="34" charset="0"/>
-                <a:ea typeface="Yu Gothic" pitchFamily="34" charset="-122"/>
-                <a:cs typeface="Yu Gothic" pitchFamily="34" charset="-120"/>
-              </a:rPr>
-              <a:t>5都市ポップアップに「変身体験」コーナー</a:t>
-            </a:r>
-            <a:endParaRPr lang="en-US" sz="1150" dirty="0"/>
-          </a:p>
-          <a:p>
-            <a:pPr marL="152400" indent="-152400">
-              <a:lnSpc>
-                <a:spcPts val="1600"/>
-              </a:lnSpc>
-              <a:spcAft>
-                <a:spcPts val="800"/>
-              </a:spcAft>
-              <a:buSzPct val="100000"/>
-              <a:buChar char="▪"/>
-            </a:pPr>
-            <a:r>
-              <a:rPr lang="en-US" sz="1150" dirty="0">
-                <a:solidFill>
-                  <a:srgbClr val="E7EAF0"/>
-                </a:solidFill>
-                <a:latin typeface="Yu Gothic" pitchFamily="34" charset="0"/>
-                <a:ea typeface="Yu Gothic" pitchFamily="34" charset="-122"/>
-                <a:cs typeface="Yu Gothic" pitchFamily="34" charset="-120"/>
-              </a:rPr>
-              <a:t>7月10日「ウルトラマンの日」共同PR</a:t>
-            </a:r>
-            <a:endParaRPr lang="en-US" sz="1150" dirty="0"/>
-          </a:p>
-          <a:p>
-            <a:pPr marL="152400" indent="-152400">
-              <a:lnSpc>
-                <a:spcPts val="1600"/>
-              </a:lnSpc>
-              <a:spcAft>
-                <a:spcPts val="800"/>
-              </a:spcAft>
-              <a:buSzPct val="100000"/>
-              <a:buChar char="▪"/>
-            </a:pPr>
-            <a:r>
-              <a:rPr lang="en-US" sz="1150" dirty="0">
-                <a:solidFill>
-                  <a:srgbClr val="E7EAF0"/>
-                </a:solidFill>
-                <a:latin typeface="Yu Gothic" pitchFamily="34" charset="0"/>
-                <a:ea typeface="Yu Gothic" pitchFamily="34" charset="-122"/>
-                <a:cs typeface="Yu Gothic" pitchFamily="34" charset="-120"/>
-              </a:rPr>
-              <a:t>円谷公式監修 + 3Dアセット供与</a:t>
-            </a:r>
-            <a:endParaRPr lang="en-US" sz="1150" dirty="0"/>
-          </a:p>
-          <a:p>
-            <a:pPr marL="152400" indent="-152400">
-              <a:lnSpc>
-                <a:spcPts val="1600"/>
-              </a:lnSpc>
-              <a:spcAft>
-                <a:spcPts val="800"/>
-              </a:spcAft>
-              <a:buSzPct val="100000"/>
-              <a:buChar char="▪"/>
-            </a:pPr>
-            <a:r>
-              <a:rPr lang="en-US" sz="1150" dirty="0">
-                <a:solidFill>
-                  <a:srgbClr val="E7EAF0"/>
-                </a:solidFill>
-                <a:latin typeface="Yu Gothic" pitchFamily="34" charset="0"/>
-                <a:ea typeface="Yu Gothic" pitchFamily="34" charset="-122"/>
-                <a:cs typeface="Yu Gothic" pitchFamily="34" charset="-120"/>
-              </a:rPr>
-              <a:t>許諾範囲: プロモ + デジタル／日本国内12ヶ月</a:t>
-            </a:r>
-            <a:endParaRPr lang="en-US" sz="1150" dirty="0"/>
-          </a:p>
-        </p:txBody>
-      </p:sp>
-      <p:sp>
-        <p:nvSpPr>
-          <p:cNvPr id="12" name="Shape 9"/>
-          <p:cNvSpPr/>
-          <p:nvPr/>
-        </p:nvSpPr>
-        <p:spPr>
-          <a:xfrm>
-            <a:off x="6199632" y="1508760"/>
-            <a:ext cx="5349240" cy="4572000"/>
-          </a:xfrm>
-          <a:prstGeom prst="roundRect">
-            <a:avLst>
-              <a:gd name="adj" fmla="val 2000"/>
-            </a:avLst>
-          </a:prstGeom>
-          <a:solidFill>
-            <a:srgbClr val="141926">
-              <a:alpha val="86000"/>
-            </a:srgbClr>
-          </a:solidFill>
-          <a:ln w="19050">
-            <a:solidFill>
-              <a:srgbClr val="C8102E"/>
-            </a:solidFill>
-            <a:prstDash val="solid"/>
-          </a:ln>
-          <a:effectLst>
-            <a:outerShdw sx="100000" sy="100000" kx="0" ky="0" algn="bl" rotWithShape="0" blurRad="279400" dist="50800" dir="16200000">
-              <a:srgbClr val="C8102E">
-                <a:alpha val="35000"/>
-              </a:srgbClr>
-            </a:outerShdw>
-          </a:effectLst>
-        </p:spPr>
-      </p:sp>
-      <p:sp>
-        <p:nvSpPr>
-          <p:cNvPr id="13" name="Shape 10"/>
-          <p:cNvSpPr/>
-          <p:nvPr/>
-        </p:nvSpPr>
-        <p:spPr>
-          <a:xfrm>
-            <a:off x="10442448" y="1700784"/>
-            <a:ext cx="868680" cy="347472"/>
-          </a:xfrm>
-          <a:prstGeom prst="roundRect">
-            <a:avLst>
-              <a:gd name="adj" fmla="val 50000"/>
-            </a:avLst>
-          </a:prstGeom>
-          <a:solidFill>
-            <a:srgbClr val="C8102E"/>
-          </a:solidFill>
-          <a:ln/>
-        </p:spPr>
-      </p:sp>
-      <p:sp>
-        <p:nvSpPr>
-          <p:cNvPr id="14" name="Text 11"/>
-          <p:cNvSpPr/>
-          <p:nvPr/>
-        </p:nvSpPr>
-        <p:spPr>
-          <a:xfrm>
-            <a:off x="10442448" y="1700784"/>
-            <a:ext cx="868680" cy="347472"/>
-          </a:xfrm>
-          <a:prstGeom prst="rect">
-            <a:avLst/>
-          </a:prstGeom>
-          <a:noFill/>
-          <a:ln/>
-        </p:spPr>
-        <p:txBody>
-          <a:bodyPr wrap="square" lIns="0" tIns="0" rIns="0" bIns="0" rtlCol="0" anchor="ctr"/>
-          <a:lstStyle/>
-          <a:p>
-            <a:pPr algn="ctr" indent="0" marL="0">
-              <a:buNone/>
-            </a:pPr>
-            <a:r>
-              <a:rPr lang="en-US" sz="1150" b="1" dirty="0">
-                <a:solidFill>
-                  <a:srgbClr val="FFFFFF"/>
-                </a:solidFill>
-                <a:latin typeface="Yu Gothic" pitchFamily="34" charset="0"/>
-                <a:ea typeface="Yu Gothic" pitchFamily="34" charset="-122"/>
-                <a:cs typeface="Yu Gothic" pitchFamily="34" charset="-120"/>
-              </a:rPr>
-              <a:t>推奨</a:t>
-            </a:r>
-            <a:endParaRPr lang="en-US" sz="1150" dirty="0"/>
-          </a:p>
-        </p:txBody>
-      </p:sp>
-      <p:sp>
-        <p:nvSpPr>
-          <p:cNvPr id="15" name="Shape 12"/>
-          <p:cNvSpPr/>
-          <p:nvPr/>
-        </p:nvSpPr>
-        <p:spPr>
-          <a:xfrm>
-            <a:off x="6528816" y="2157984"/>
-            <a:ext cx="566928" cy="566928"/>
-          </a:xfrm>
-          <a:prstGeom prst="ellipse">
-            <a:avLst/>
-          </a:prstGeom>
-          <a:solidFill>
-            <a:srgbClr val="C8102E"/>
-          </a:solidFill>
-          <a:ln/>
-          <a:effectLst>
-            <a:outerShdw sx="100000" sy="100000" kx="0" ky="0" algn="bl" rotWithShape="0" blurRad="152400" dist="50800" dir="16200000">
-              <a:srgbClr val="C8102E">
-                <a:alpha val="50000"/>
-              </a:srgbClr>
-            </a:outerShdw>
-          </a:effectLst>
-        </p:spPr>
-      </p:sp>
-      <p:pic>
-        <p:nvPicPr>
-          <p:cNvPr id="16" name="Image 1" descr="/tmp/claude-0/-home-user-kessho-lens/63555445-5e6f-583b-ab8a-87e352d31a90/scratchpad/icons/FaGem.png">    </p:cNvPr>
-          <p:cNvPicPr>
-            <a:picLocks noChangeAspect="1"/>
-          </p:cNvPicPr>
-          <p:nvPr/>
-        </p:nvPicPr>
-        <p:blipFill>
-          <a:blip r:embed="rId3"/>
-          <a:stretch>
-            <a:fillRect/>
-          </a:stretch>
-        </p:blipFill>
-        <p:spPr>
-          <a:xfrm>
-            <a:off x="6681887" y="2311055"/>
-            <a:ext cx="260787" cy="260787"/>
-          </a:xfrm>
-          <a:prstGeom prst="rect">
-            <a:avLst/>
-          </a:prstGeom>
-        </p:spPr>
-      </p:pic>
-      <p:sp>
-        <p:nvSpPr>
-          <p:cNvPr id="17" name="Text 13"/>
-          <p:cNvSpPr/>
-          <p:nvPr/>
-        </p:nvSpPr>
-        <p:spPr>
-          <a:xfrm>
-            <a:off x="7251192" y="2157984"/>
-            <a:ext cx="4069080" cy="566928"/>
-          </a:xfrm>
-          <a:prstGeom prst="rect">
-            <a:avLst/>
-          </a:prstGeom>
-          <a:noFill/>
-          <a:ln/>
-        </p:spPr>
-        <p:txBody>
-          <a:bodyPr wrap="square" lIns="0" tIns="0" rIns="0" bIns="0" rtlCol="0" anchor="ctr"/>
-          <a:lstStyle/>
-          <a:p>
-            <a:pPr indent="0" marL="0">
-              <a:buNone/>
-            </a:pPr>
-            <a:r>
-              <a:rPr lang="en-US" sz="1100" b="1" spc="200" kern="0" dirty="0">
-                <a:solidFill>
-                  <a:srgbClr val="78808F"/>
-                </a:solidFill>
-                <a:latin typeface="Arial" pitchFamily="34" charset="0"/>
-                <a:ea typeface="Arial" pitchFamily="34" charset="-122"/>
-                <a:cs typeface="Arial" pitchFamily="34" charset="-120"/>
-              </a:rPr>
-              <a:t>PLAN U</a:t>
-            </a:r>
-            <a:pPr indent="0" marL="0">
-              <a:buNone/>
-            </a:pPr>
-            <a:r>
-              <a:rPr lang="en-US" sz="1700" b="1" spc="100" kern="0" dirty="0">
-                <a:solidFill>
-                  <a:srgbClr val="FFFFFF"/>
-                </a:solidFill>
-                <a:latin typeface="Arial" pitchFamily="34" charset="0"/>
-                <a:ea typeface="Arial" pitchFamily="34" charset="-122"/>
-                <a:cs typeface="Arial" pitchFamily="34" charset="-120"/>
-              </a:rPr>
-              <a:t>　ULTRAMAN EDITION</a:t>
-            </a:r>
-            <a:endParaRPr lang="en-US" sz="1100" dirty="0"/>
-          </a:p>
-        </p:txBody>
-      </p:sp>
-      <p:sp>
-        <p:nvSpPr>
-          <p:cNvPr id="18" name="Text 14"/>
-          <p:cNvSpPr/>
-          <p:nvPr/>
-        </p:nvSpPr>
-        <p:spPr>
-          <a:xfrm>
-            <a:off x="6528816" y="2852928"/>
-            <a:ext cx="4572000" cy="548640"/>
-          </a:xfrm>
-          <a:prstGeom prst="rect">
-            <a:avLst/>
-          </a:prstGeom>
-          <a:noFill/>
-          <a:ln/>
-        </p:spPr>
-        <p:txBody>
-          <a:bodyPr wrap="square" lIns="0" tIns="0" rIns="0" bIns="0" rtlCol="0" anchor="ctr"/>
-          <a:lstStyle/>
-          <a:p>
-            <a:pPr indent="0" marL="0">
-              <a:buNone/>
-            </a:pPr>
-            <a:r>
-              <a:rPr lang="en-US" sz="3500" b="1" dirty="0">
+              <a:rPr lang="en-US" sz="4400" b="1" dirty="0">
                 <a:solidFill>
                   <a:srgbClr val="E8354F"/>
                 </a:solidFill>
@@ -7935,17 +9034,42 @@
                     </a:srgbClr>
                   </a:glow>
                 </a:effectLst>
-                <a:latin typeface="Arial" pitchFamily="34" charset="0"/>
-                <a:ea typeface="Arial" pitchFamily="34" charset="-122"/>
-                <a:cs typeface="Arial" pitchFamily="34" charset="-120"/>
-              </a:rPr>
-              <a:t>8,000</a:t>
-            </a:r>
-            <a:pPr indent="0" marL="0">
-              <a:buNone/>
-            </a:pPr>
-            <a:r>
-              <a:rPr lang="en-US" sz="1500" b="1" dirty="0">
+                <a:latin typeface="Arial Black" pitchFamily="34" charset="0"/>
+                <a:ea typeface="Arial Black" pitchFamily="34" charset="-122"/>
+                <a:cs typeface="Arial Black" pitchFamily="34" charset="-120"/>
+              </a:rPr>
+              <a:t>60th</a:t>
+            </a:r>
+            <a:endParaRPr lang="en-US" sz="4400" dirty="0"/>
+          </a:p>
+        </p:txBody>
+      </p:sp>
+      <p:sp>
+        <p:nvSpPr>
+          <p:cNvPr id="8" name="Text 6"/>
+          <p:cNvSpPr/>
+          <p:nvPr/>
+        </p:nvSpPr>
+        <p:spPr>
+          <a:xfrm>
+            <a:off x="960120" y="3291840"/>
+            <a:ext cx="2871216" cy="411480"/>
+          </a:xfrm>
+          <a:prstGeom prst="rect">
+            <a:avLst/>
+          </a:prstGeom>
+          <a:noFill/>
+          <a:ln/>
+        </p:spPr>
+        <p:txBody>
+          <a:bodyPr wrap="square" lIns="0" tIns="0" rIns="0" bIns="0" rtlCol="0" anchor="ctr"/>
+          <a:lstStyle/>
+          <a:p>
+            <a:pPr indent="0" marL="0">
+              <a:buNone/>
+            </a:pPr>
+            <a:r>
+              <a:rPr lang="en-US" sz="1550" b="1" dirty="0">
                 <a:solidFill>
                   <a:srgbClr val="FFFFFF"/>
                 </a:solidFill>
@@ -7953,13 +9077,41 @@
                 <a:ea typeface="Yu Gothic" pitchFamily="34" charset="-122"/>
                 <a:cs typeface="Yu Gothic" pitchFamily="34" charset="-120"/>
               </a:rPr>
-              <a:t> 万円</a:t>
-            </a:r>
-            <a:pPr indent="0" marL="0">
-              <a:buNone/>
-            </a:pPr>
-            <a:r>
-              <a:rPr lang="en-US" sz="1000" dirty="0">
+              <a:t>シリーズ60周年イヤー</a:t>
+            </a:r>
+            <a:endParaRPr lang="en-US" sz="1550" dirty="0"/>
+          </a:p>
+        </p:txBody>
+      </p:sp>
+      <p:sp>
+        <p:nvSpPr>
+          <p:cNvPr id="9" name="Text 7"/>
+          <p:cNvSpPr/>
+          <p:nvPr/>
+        </p:nvSpPr>
+        <p:spPr>
+          <a:xfrm>
+            <a:off x="960120" y="3794760"/>
+            <a:ext cx="2907792" cy="2011680"/>
+          </a:xfrm>
+          <a:prstGeom prst="rect">
+            <a:avLst/>
+          </a:prstGeom>
+          <a:noFill/>
+          <a:ln/>
+        </p:spPr>
+        <p:txBody>
+          <a:bodyPr wrap="square" lIns="0" tIns="0" rIns="0" bIns="0" rtlCol="0" anchor="t"/>
+          <a:lstStyle/>
+          <a:p>
+            <a:pPr indent="0" marL="0">
+              <a:lnSpc>
+                <a:spcPts val="1700"/>
+              </a:lnSpc>
+              <a:buNone/>
+            </a:pPr>
+            <a:r>
+              <a:rPr lang="en-US" sz="1100" dirty="0">
                 <a:solidFill>
                   <a:srgbClr val="AEB6C4"/>
                 </a:solidFill>
@@ -7967,22 +9119,136 @@
                 <a:ea typeface="Yu Gothic" pitchFamily="34" charset="-122"/>
                 <a:cs typeface="Yu Gothic" pitchFamily="34" charset="-120"/>
               </a:rPr>
-              <a:t>（税別）</a:t>
-            </a:r>
-            <a:endParaRPr lang="en-US" sz="3500" dirty="0"/>
-          </a:p>
-        </p:txBody>
-      </p:sp>
-      <p:sp>
-        <p:nvSpPr>
-          <p:cNvPr id="19" name="Text 15"/>
-          <p:cNvSpPr/>
-          <p:nvPr/>
-        </p:nvSpPr>
-        <p:spPr>
-          <a:xfrm>
-            <a:off x="6528816" y="3520440"/>
-            <a:ext cx="4754880" cy="2468880"/>
+              <a:t>60周年プロジェクトが進行中。新シリーズ『ウルトラマンティオ』放送中、60周年展が全国巡回中。露出と熱量が60年間で最大の年。公式文脈に入れる枠は、今年だけ。</a:t>
+            </a:r>
+            <a:endParaRPr lang="en-US" sz="1100" dirty="0"/>
+          </a:p>
+        </p:txBody>
+      </p:sp>
+      <p:sp>
+        <p:nvSpPr>
+          <p:cNvPr id="10" name="Shape 8"/>
+          <p:cNvSpPr/>
+          <p:nvPr/>
+        </p:nvSpPr>
+        <p:spPr>
+          <a:xfrm>
+            <a:off x="4334256" y="1965960"/>
+            <a:ext cx="3511296" cy="3977640"/>
+          </a:xfrm>
+          <a:prstGeom prst="roundRect">
+            <a:avLst>
+              <a:gd name="adj" fmla="val 2604"/>
+            </a:avLst>
+          </a:prstGeom>
+          <a:solidFill>
+            <a:srgbClr val="141926">
+              <a:alpha val="86000"/>
+            </a:srgbClr>
+          </a:solidFill>
+          <a:ln w="12700">
+            <a:solidFill>
+              <a:srgbClr val="2A3140"/>
+            </a:solidFill>
+            <a:prstDash val="solid"/>
+          </a:ln>
+        </p:spPr>
+      </p:sp>
+      <p:sp>
+        <p:nvSpPr>
+          <p:cNvPr id="11" name="Text 9"/>
+          <p:cNvSpPr/>
+          <p:nvPr/>
+        </p:nvSpPr>
+        <p:spPr>
+          <a:xfrm>
+            <a:off x="4654296" y="2286000"/>
+            <a:ext cx="2871216" cy="868680"/>
+          </a:xfrm>
+          <a:prstGeom prst="rect">
+            <a:avLst/>
+          </a:prstGeom>
+          <a:noFill/>
+          <a:ln/>
+        </p:spPr>
+        <p:txBody>
+          <a:bodyPr wrap="square" lIns="0" tIns="0" rIns="0" bIns="0" rtlCol="0" anchor="ctr"/>
+          <a:lstStyle/>
+          <a:p>
+            <a:pPr indent="0" marL="0">
+              <a:buNone/>
+            </a:pPr>
+            <a:r>
+              <a:rPr lang="en-US" sz="4400" b="1" dirty="0">
+                <a:solidFill>
+                  <a:srgbClr val="E8354F"/>
+                </a:solidFill>
+                <a:effectLst>
+                  <a:glow rad="114300">
+                    <a:srgbClr val="C8102E">
+                      <a:alpha val="45000"/>
+                    </a:srgbClr>
+                  </a:glow>
+                </a:effectLst>
+                <a:latin typeface="Arial Black" pitchFamily="34" charset="0"/>
+                <a:ea typeface="Arial Black" pitchFamily="34" charset="-122"/>
+                <a:cs typeface="Arial Black" pitchFamily="34" charset="-120"/>
+              </a:rPr>
+              <a:t>7.10</a:t>
+            </a:r>
+            <a:endParaRPr lang="en-US" sz="4400" dirty="0"/>
+          </a:p>
+        </p:txBody>
+      </p:sp>
+      <p:sp>
+        <p:nvSpPr>
+          <p:cNvPr id="12" name="Text 10"/>
+          <p:cNvSpPr/>
+          <p:nvPr/>
+        </p:nvSpPr>
+        <p:spPr>
+          <a:xfrm>
+            <a:off x="4654296" y="3291840"/>
+            <a:ext cx="2871216" cy="411480"/>
+          </a:xfrm>
+          <a:prstGeom prst="rect">
+            <a:avLst/>
+          </a:prstGeom>
+          <a:noFill/>
+          <a:ln/>
+        </p:spPr>
+        <p:txBody>
+          <a:bodyPr wrap="square" lIns="0" tIns="0" rIns="0" bIns="0" rtlCol="0" anchor="ctr"/>
+          <a:lstStyle/>
+          <a:p>
+            <a:pPr indent="0" marL="0">
+              <a:buNone/>
+            </a:pPr>
+            <a:r>
+              <a:rPr lang="en-US" sz="1550" b="1" dirty="0">
+                <a:solidFill>
+                  <a:srgbClr val="FFFFFF"/>
+                </a:solidFill>
+                <a:latin typeface="Yu Gothic" pitchFamily="34" charset="0"/>
+                <a:ea typeface="Yu Gothic" pitchFamily="34" charset="-122"/>
+                <a:cs typeface="Yu Gothic" pitchFamily="34" charset="-120"/>
+              </a:rPr>
+              <a:t>運命の発売日</a:t>
+            </a:r>
+            <a:endParaRPr lang="en-US" sz="1550" dirty="0"/>
+          </a:p>
+        </p:txBody>
+      </p:sp>
+      <p:sp>
+        <p:nvSpPr>
+          <p:cNvPr id="13" name="Text 11"/>
+          <p:cNvSpPr/>
+          <p:nvPr/>
+        </p:nvSpPr>
+        <p:spPr>
+          <a:xfrm>
+            <a:off x="4654296" y="3794760"/>
+            <a:ext cx="2907792" cy="2011680"/>
           </a:xfrm>
           <a:prstGeom prst="rect">
             <a:avLst/>
@@ -7996,15 +9262,12 @@
           <a:p>
             <a:pPr indent="0" marL="0">
               <a:lnSpc>
-                <a:spcPts val="1600"/>
+                <a:spcPts val="1700"/>
               </a:lnSpc>
-              <a:spcAft>
-                <a:spcPts val="600"/>
-              </a:spcAft>
-              <a:buNone/>
-            </a:pPr>
-            <a:r>
-              <a:rPr lang="en-US" sz="1150" i="1" dirty="0">
+              <a:buNone/>
+            </a:pPr>
+            <a:r>
+              <a:rPr lang="en-US" sz="1100" dirty="0">
                 <a:solidFill>
                   <a:srgbClr val="AEB6C4"/>
                 </a:solidFill>
@@ -8012,177 +9275,171 @@
                 <a:ea typeface="Yu Gothic" pitchFamily="34" charset="-122"/>
                 <a:cs typeface="Yu Gothic" pitchFamily="34" charset="-120"/>
               </a:rPr>
-              <a:t>Plan S のすべて、に加えて——</a:t>
-            </a:r>
-            <a:endParaRPr lang="en-US" sz="1150" dirty="0"/>
-          </a:p>
-          <a:p>
-            <a:pPr marL="152400" indent="-152400">
+              <a:t>Rokid Glasses の日本発売日は「ウルトラマンの日」と同日。この偶然を必然に変え、毎年7月10日を「変身の日」として更新し続ける記念日設計ができる。</a:t>
+            </a:r>
+            <a:endParaRPr lang="en-US" sz="1100" dirty="0"/>
+          </a:p>
+        </p:txBody>
+      </p:sp>
+      <p:sp>
+        <p:nvSpPr>
+          <p:cNvPr id="14" name="Shape 12"/>
+          <p:cNvSpPr/>
+          <p:nvPr/>
+        </p:nvSpPr>
+        <p:spPr>
+          <a:xfrm>
+            <a:off x="8028432" y="1965960"/>
+            <a:ext cx="3511296" cy="3977640"/>
+          </a:xfrm>
+          <a:prstGeom prst="roundRect">
+            <a:avLst>
+              <a:gd name="adj" fmla="val 2604"/>
+            </a:avLst>
+          </a:prstGeom>
+          <a:solidFill>
+            <a:srgbClr val="141926">
+              <a:alpha val="86000"/>
+            </a:srgbClr>
+          </a:solidFill>
+          <a:ln w="12700">
+            <a:solidFill>
+              <a:srgbClr val="2A3140"/>
+            </a:solidFill>
+            <a:prstDash val="solid"/>
+          </a:ln>
+        </p:spPr>
+      </p:sp>
+      <p:sp>
+        <p:nvSpPr>
+          <p:cNvPr id="15" name="Text 13"/>
+          <p:cNvSpPr/>
+          <p:nvPr/>
+        </p:nvSpPr>
+        <p:spPr>
+          <a:xfrm>
+            <a:off x="8348472" y="2286000"/>
+            <a:ext cx="2871216" cy="868680"/>
+          </a:xfrm>
+          <a:prstGeom prst="rect">
+            <a:avLst/>
+          </a:prstGeom>
+          <a:noFill/>
+          <a:ln/>
+        </p:spPr>
+        <p:txBody>
+          <a:bodyPr wrap="square" lIns="0" tIns="0" rIns="0" bIns="0" rtlCol="0" anchor="ctr"/>
+          <a:lstStyle/>
+          <a:p>
+            <a:pPr indent="0" marL="0">
+              <a:buNone/>
+            </a:pPr>
+            <a:r>
+              <a:rPr lang="en-US" sz="4400" b="1" dirty="0">
+                <a:solidFill>
+                  <a:srgbClr val="E8354F"/>
+                </a:solidFill>
+                <a:effectLst>
+                  <a:glow rad="114300">
+                    <a:srgbClr val="C8102E">
+                      <a:alpha val="45000"/>
+                    </a:srgbClr>
+                  </a:glow>
+                </a:effectLst>
+                <a:latin typeface="Arial Black" pitchFamily="34" charset="0"/>
+                <a:ea typeface="Arial Black" pitchFamily="34" charset="-122"/>
+                <a:cs typeface="Arial Black" pitchFamily="34" charset="-120"/>
+              </a:rPr>
+              <a:t>1st</a:t>
+            </a:r>
+            <a:endParaRPr lang="en-US" sz="4400" dirty="0"/>
+          </a:p>
+        </p:txBody>
+      </p:sp>
+      <p:sp>
+        <p:nvSpPr>
+          <p:cNvPr id="16" name="Text 14"/>
+          <p:cNvSpPr/>
+          <p:nvPr/>
+        </p:nvSpPr>
+        <p:spPr>
+          <a:xfrm>
+            <a:off x="8348472" y="3291840"/>
+            <a:ext cx="2871216" cy="411480"/>
+          </a:xfrm>
+          <a:prstGeom prst="rect">
+            <a:avLst/>
+          </a:prstGeom>
+          <a:noFill/>
+          <a:ln/>
+        </p:spPr>
+        <p:txBody>
+          <a:bodyPr wrap="square" lIns="0" tIns="0" rIns="0" bIns="0" rtlCol="0" anchor="ctr"/>
+          <a:lstStyle/>
+          <a:p>
+            <a:pPr indent="0" marL="0">
+              <a:buNone/>
+            </a:pPr>
+            <a:r>
+              <a:rPr lang="en-US" sz="1550" b="1" dirty="0">
+                <a:solidFill>
+                  <a:srgbClr val="FFFFFF"/>
+                </a:solidFill>
+                <a:latin typeface="Yu Gothic" pitchFamily="34" charset="0"/>
+                <a:ea typeface="Yu Gothic" pitchFamily="34" charset="-122"/>
+                <a:cs typeface="Yu Gothic" pitchFamily="34" charset="-120"/>
+              </a:rPr>
+              <a:t>最初のIP体験の定義権</a:t>
+            </a:r>
+            <a:endParaRPr lang="en-US" sz="1550" dirty="0"/>
+          </a:p>
+        </p:txBody>
+      </p:sp>
+      <p:sp>
+        <p:nvSpPr>
+          <p:cNvPr id="17" name="Text 15"/>
+          <p:cNvSpPr/>
+          <p:nvPr/>
+        </p:nvSpPr>
+        <p:spPr>
+          <a:xfrm>
+            <a:off x="8348472" y="3794760"/>
+            <a:ext cx="2907792" cy="2011680"/>
+          </a:xfrm>
+          <a:prstGeom prst="rect">
+            <a:avLst/>
+          </a:prstGeom>
+          <a:noFill/>
+          <a:ln/>
+        </p:spPr>
+        <p:txBody>
+          <a:bodyPr wrap="square" lIns="0" tIns="0" rIns="0" bIns="0" rtlCol="0" anchor="t"/>
+          <a:lstStyle/>
+          <a:p>
+            <a:pPr indent="0" marL="0">
               <a:lnSpc>
-                <a:spcPts val="1600"/>
+                <a:spcPts val="1700"/>
               </a:lnSpc>
-              <a:spcAft>
-                <a:spcPts val="600"/>
-              </a:spcAft>
-              <a:buSzPct val="100000"/>
-              <a:buChar char="▪"/>
-            </a:pPr>
-            <a:r>
-              <a:rPr lang="en-US" sz="1150" dirty="0">
-                <a:solidFill>
-                  <a:srgbClr val="E7EAF0"/>
-                </a:solidFill>
-                <a:latin typeface="Yu Gothic" pitchFamily="34" charset="0"/>
-                <a:ea typeface="Yu Gothic" pitchFamily="34" charset="-122"/>
-                <a:cs typeface="Yu Gothic" pitchFamily="34" charset="-120"/>
-              </a:rPr>
-              <a:t>限定モデル「ULTRAMAN EDITION」3,000台（カラータイマー型ケース・変身音・シリアルNo.・60周年ロゴ）</a:t>
-            </a:r>
-            <a:endParaRPr lang="en-US" sz="1150" dirty="0"/>
-          </a:p>
-          <a:p>
-            <a:pPr marL="152400" indent="-152400">
-              <a:lnSpc>
-                <a:spcPts val="1600"/>
-              </a:lnSpc>
-              <a:spcAft>
-                <a:spcPts val="600"/>
-              </a:spcAft>
-              <a:buSzPct val="100000"/>
-              <a:buChar char="▪"/>
-            </a:pPr>
-            <a:r>
-              <a:rPr lang="en-US" sz="1150" dirty="0">
-                <a:solidFill>
-                  <a:srgbClr val="E7EAF0"/>
-                </a:solidFill>
-                <a:latin typeface="Yu Gothic" pitchFamily="34" charset="0"/>
-                <a:ea typeface="Yu Gothic" pitchFamily="34" charset="-122"/>
-                <a:cs typeface="Yu Gothic" pitchFamily="34" charset="-120"/>
-              </a:rPr>
-              <a:t>「ウルトラマンシリーズ60周年展」体験ブース出展枠 ※</a:t>
-            </a:r>
-            <a:endParaRPr lang="en-US" sz="1150" dirty="0"/>
-          </a:p>
-          <a:p>
-            <a:pPr marL="152400" indent="-152400">
-              <a:lnSpc>
-                <a:spcPts val="1600"/>
-              </a:lnSpc>
-              <a:spcAft>
-                <a:spcPts val="600"/>
-              </a:spcAft>
-              <a:buSzPct val="100000"/>
-              <a:buChar char="▪"/>
-            </a:pPr>
-            <a:r>
-              <a:rPr lang="en-US" sz="1150" dirty="0">
-                <a:solidFill>
-                  <a:srgbClr val="E7EAF0"/>
-                </a:solidFill>
-                <a:latin typeface="Yu Gothic" pitchFamily="34" charset="0"/>
-                <a:ea typeface="Yu Gothic" pitchFamily="34" charset="-122"/>
-                <a:cs typeface="Yu Gothic" pitchFamily="34" charset="-120"/>
-              </a:rPr>
-              <a:t>TVCM・店頭販促物へのキャラクター使用</a:t>
-            </a:r>
-            <a:endParaRPr lang="en-US" sz="1150" dirty="0"/>
-          </a:p>
-          <a:p>
-            <a:pPr marL="152400" indent="-152400">
-              <a:lnSpc>
-                <a:spcPts val="1600"/>
-              </a:lnSpc>
-              <a:spcAft>
-                <a:spcPts val="600"/>
-              </a:spcAft>
-              <a:buSzPct val="100000"/>
-              <a:buChar char="▪"/>
-            </a:pPr>
-            <a:r>
-              <a:rPr lang="en-US" sz="1150" dirty="0">
-                <a:solidFill>
-                  <a:srgbClr val="E7EAF0"/>
-                </a:solidFill>
-                <a:latin typeface="Yu Gothic" pitchFamily="34" charset="0"/>
-                <a:ea typeface="Yu Gothic" pitchFamily="34" charset="-122"/>
-                <a:cs typeface="Yu Gothic" pitchFamily="34" charset="-120"/>
-              </a:rPr>
-              <a:t>『ウルトラマンティオ』放送連動タイアップ ※</a:t>
-            </a:r>
-            <a:endParaRPr lang="en-US" sz="1150" dirty="0"/>
-          </a:p>
-          <a:p>
-            <a:pPr marL="152400" indent="-152400">
-              <a:lnSpc>
-                <a:spcPts val="1600"/>
-              </a:lnSpc>
-              <a:spcAft>
-                <a:spcPts val="600"/>
-              </a:spcAft>
-              <a:buSzPct val="100000"/>
-              <a:buChar char="▪"/>
-            </a:pPr>
-            <a:r>
-              <a:rPr lang="en-US" sz="1150" dirty="0">
-                <a:solidFill>
-                  <a:srgbClr val="E7EAF0"/>
-                </a:solidFill>
-                <a:latin typeface="Yu Gothic" pitchFamily="34" charset="0"/>
-                <a:ea typeface="Yu Gothic" pitchFamily="34" charset="-122"/>
-                <a:cs typeface="Yu Gothic" pitchFamily="34" charset="-120"/>
-              </a:rPr>
-              <a:t>中国・北米・欧州 Rokid 販路の優先交渉権</a:t>
-            </a:r>
-            <a:endParaRPr lang="en-US" sz="1150" dirty="0"/>
-          </a:p>
-        </p:txBody>
-      </p:sp>
-      <p:sp>
-        <p:nvSpPr>
-          <p:cNvPr id="20" name="Text 16"/>
-          <p:cNvSpPr/>
-          <p:nvPr/>
-        </p:nvSpPr>
-        <p:spPr>
-          <a:xfrm>
-            <a:off x="640080" y="6309360"/>
-            <a:ext cx="10927080" cy="384048"/>
-          </a:xfrm>
-          <a:prstGeom prst="rect">
-            <a:avLst/>
-          </a:prstGeom>
-          <a:noFill/>
-          <a:ln/>
-        </p:spPr>
-        <p:txBody>
-          <a:bodyPr wrap="square" lIns="0" tIns="0" rIns="0" bIns="0" rtlCol="0" anchor="t"/>
-          <a:lstStyle/>
-          <a:p>
-            <a:pPr indent="0" marL="0">
-              <a:lnSpc>
-                <a:spcPts val="1250"/>
-              </a:lnSpc>
-              <a:buNone/>
-            </a:pPr>
-            <a:r>
-              <a:rPr lang="en-US" sz="900" dirty="0">
-                <a:solidFill>
-                  <a:srgbClr val="78808F"/>
-                </a:solidFill>
-                <a:latin typeface="Yu Gothic" pitchFamily="34" charset="0"/>
-                <a:ea typeface="Yu Gothic" pitchFamily="34" charset="-122"/>
-                <a:cs typeface="Yu Gothic" pitchFamily="34" charset="-120"/>
-              </a:rPr>
-              <a:t>※ 60周年イベント・番組連動の実施形態は円谷社内の企画枠調整を経て確定。ハード製造原価・アプリ実装費は Rokid 様負担、売上ロイヤリティ設計は別途協議（MG充当方式も可）。</a:t>
-            </a:r>
-            <a:endParaRPr lang="en-US" sz="900" dirty="0"/>
-          </a:p>
-        </p:txBody>
-      </p:sp>
-      <p:sp>
-        <p:nvSpPr>
-          <p:cNvPr id="21" name="Text 17"/>
+              <a:buNone/>
+            </a:pPr>
+            <a:r>
+              <a:rPr lang="en-US" sz="1100" dirty="0">
+                <a:solidFill>
+                  <a:srgbClr val="AEB6C4"/>
+                </a:solidFill>
+                <a:latin typeface="Yu Gothic" pitchFamily="34" charset="0"/>
+                <a:ea typeface="Yu Gothic" pitchFamily="34" charset="-122"/>
+                <a:cs typeface="Yu Gothic" pitchFamily="34" charset="-120"/>
+              </a:rPr>
+              <a:t>ARグラスは機能訴求から体験訴求へ移る直前。カテゴリ最初の代表的IP体験を作ったブランドが、以後数年の連想を独占する。年末商戦前が最後の窓。</a:t>
+            </a:r>
+            <a:endParaRPr lang="en-US" sz="1100" dirty="0"/>
+          </a:p>
+        </p:txBody>
+      </p:sp>
+      <p:sp>
+        <p:nvSpPr>
+          <p:cNvPr id="18" name="Text 16"/>
           <p:cNvSpPr/>
           <p:nvPr/>
         </p:nvSpPr>
@@ -8266,8 +9523,8 @@
         </p:nvSpPr>
         <p:spPr>
           <a:xfrm>
-            <a:off x="3291840" y="274320"/>
-            <a:ext cx="8321040" cy="1920240"/>
+            <a:off x="4206240" y="274320"/>
+            <a:ext cx="7406640" cy="2011680"/>
           </a:xfrm>
           <a:prstGeom prst="rect">
             <a:avLst/>
@@ -8283,7 +9540,7 @@
               <a:buNone/>
             </a:pPr>
             <a:r>
-              <a:rPr lang="en-US" sz="10500" b="1" spc="600" kern="0" dirty="0">
+              <a:rPr lang="en-US" sz="11000" b="1" spc="600" kern="0" dirty="0">
                 <a:solidFill>
                   <a:srgbClr val="181E2B"/>
                 </a:solidFill>
@@ -8291,9 +9548,9 @@
                 <a:ea typeface="Arial Black" pitchFamily="34" charset="-122"/>
                 <a:cs typeface="Arial Black" pitchFamily="34" charset="-120"/>
               </a:rPr>
-              <a:t>IMPACT</a:t>
-            </a:r>
-            <a:endParaRPr lang="en-US" sz="10500" dirty="0"/>
+              <a:t>PLAN</a:t>
+            </a:r>
+            <a:endParaRPr lang="en-US" sz="11000" dirty="0"/>
           </a:p>
         </p:txBody>
       </p:sp>
@@ -8357,7 +9614,7 @@
                 <a:ea typeface="Arial" pitchFamily="34" charset="-122"/>
                 <a:cs typeface="Arial" pitchFamily="34" charset="-120"/>
               </a:rPr>
-              <a:t>07 / IMPACT</a:t>
+              <a:t>07 / PROPOSAL</a:t>
             </a:r>
             <a:endParaRPr lang="en-US" sz="1050" dirty="0"/>
           </a:p>
@@ -8396,7 +9653,7 @@
                 <a:ea typeface="Yu Gothic" pitchFamily="34" charset="-122"/>
                 <a:cs typeface="Yu Gothic" pitchFamily="34" charset="-120"/>
               </a:rPr>
-              <a:t>期待効果（初年度目安）</a:t>
+              <a:t>ご提案 — 2つのプラン</a:t>
             </a:r>
             <a:endParaRPr lang="en-US" sz="2800" dirty="0"/>
           </a:p>
@@ -8410,8 +9667,37 @@
         </p:nvSpPr>
         <p:spPr>
           <a:xfrm>
-            <a:off x="1700784" y="2148840"/>
-            <a:ext cx="603504" cy="603504"/>
+            <a:off x="640080" y="1691640"/>
+            <a:ext cx="5349240" cy="4389120"/>
+          </a:xfrm>
+          <a:prstGeom prst="roundRect">
+            <a:avLst>
+              <a:gd name="adj" fmla="val 2083"/>
+            </a:avLst>
+          </a:prstGeom>
+          <a:solidFill>
+            <a:srgbClr val="141926">
+              <a:alpha val="86000"/>
+            </a:srgbClr>
+          </a:solidFill>
+          <a:ln w="12700">
+            <a:solidFill>
+              <a:srgbClr val="2A3140"/>
+            </a:solidFill>
+            <a:prstDash val="solid"/>
+          </a:ln>
+        </p:spPr>
+      </p:sp>
+      <p:sp>
+        <p:nvSpPr>
+          <p:cNvPr id="7" name="Shape 5"/>
+          <p:cNvSpPr/>
+          <p:nvPr/>
+        </p:nvSpPr>
+        <p:spPr>
+          <a:xfrm>
+            <a:off x="969264" y="1975104"/>
+            <a:ext cx="566928" cy="566928"/>
           </a:xfrm>
           <a:prstGeom prst="ellipse">
             <a:avLst/>
@@ -8431,7 +9717,7 @@
       </p:sp>
       <p:pic>
         <p:nvPicPr>
-          <p:cNvPr id="7" name="Image 0" descr="/tmp/claude-0/-home-user-kessho-lens/63555445-5e6f-583b-ab8a-87e352d31a90/scratchpad/icons/FaStore.png">    </p:cNvPr>
+          <p:cNvPr id="8" name="Image 0" descr="/tmp/claude-0/-home-user-kessho-lens/63555445-5e6f-583b-ab8a-87e352d31a90/scratchpad/icons/FaBolt.png">    </p:cNvPr>
           <p:cNvPicPr>
             <a:picLocks noChangeAspect="1"/>
           </p:cNvPicPr>
@@ -8445,8 +9731,8 @@
         </p:blipFill>
         <p:spPr>
           <a:xfrm>
-            <a:off x="1863730" y="2311786"/>
-            <a:ext cx="277612" cy="277612"/>
+            <a:off x="1122335" y="2128175"/>
+            <a:ext cx="260787" cy="260787"/>
           </a:xfrm>
           <a:prstGeom prst="rect">
             <a:avLst/>
@@ -8455,14 +9741,14 @@
       </p:pic>
       <p:sp>
         <p:nvSpPr>
-          <p:cNvPr id="8" name="Text 5"/>
-          <p:cNvSpPr/>
-          <p:nvPr/>
-        </p:nvSpPr>
-        <p:spPr>
-          <a:xfrm>
-            <a:off x="731520" y="2971800"/>
-            <a:ext cx="2542032" cy="731520"/>
+          <p:cNvPr id="9" name="Text 6"/>
+          <p:cNvSpPr/>
+          <p:nvPr/>
+        </p:nvSpPr>
+        <p:spPr>
+          <a:xfrm>
+            <a:off x="1691640" y="1975104"/>
+            <a:ext cx="4114800" cy="566928"/>
           </a:xfrm>
           <a:prstGeom prst="rect">
             <a:avLst/>
@@ -8474,48 +9760,115 @@
           <a:bodyPr wrap="square" lIns="0" tIns="0" rIns="0" bIns="0" rtlCol="0" anchor="ctr"/>
           <a:lstStyle/>
           <a:p>
-            <a:pPr algn="ctr" indent="0" marL="0">
-              <a:buNone/>
-            </a:pPr>
-            <a:r>
-              <a:rPr lang="en-US" sz="3800" b="1" dirty="0">
-                <a:solidFill>
-                  <a:srgbClr val="FFFFFF"/>
+            <a:pPr indent="0" marL="0">
+              <a:buNone/>
+            </a:pPr>
+            <a:r>
+              <a:rPr lang="en-US" sz="1100" b="1" spc="200" kern="0" dirty="0">
+                <a:solidFill>
+                  <a:srgbClr val="78808F"/>
                 </a:solidFill>
                 <a:latin typeface="Arial" pitchFamily="34" charset="0"/>
                 <a:ea typeface="Arial" pitchFamily="34" charset="-122"/>
                 <a:cs typeface="Arial" pitchFamily="34" charset="-120"/>
               </a:rPr>
-              <a:t>10万</a:t>
-            </a:r>
-            <a:pPr algn="ctr" indent="0" marL="0">
-              <a:buNone/>
-            </a:pPr>
-            <a:r>
-              <a:rPr lang="en-US" sz="1700" b="1" dirty="0">
-                <a:solidFill>
-                  <a:srgbClr val="E8354F"/>
-                </a:solidFill>
-                <a:latin typeface="Yu Gothic" pitchFamily="34" charset="0"/>
-                <a:ea typeface="Yu Gothic" pitchFamily="34" charset="-122"/>
-                <a:cs typeface="Yu Gothic" pitchFamily="34" charset="-120"/>
-              </a:rPr>
-              <a:t> 人</a:t>
-            </a:r>
-            <a:endParaRPr lang="en-US" sz="3800" dirty="0"/>
-          </a:p>
-        </p:txBody>
-      </p:sp>
-      <p:sp>
-        <p:nvSpPr>
-          <p:cNvPr id="9" name="Text 6"/>
-          <p:cNvSpPr/>
-          <p:nvPr/>
-        </p:nvSpPr>
-        <p:spPr>
-          <a:xfrm>
-            <a:off x="822960" y="3794760"/>
-            <a:ext cx="2359152" cy="777240"/>
+              <a:t>PLAN S</a:t>
+            </a:r>
+            <a:pPr indent="0" marL="0">
+              <a:buNone/>
+            </a:pPr>
+            <a:r>
+              <a:rPr lang="en-US" sz="1900" b="1" spc="100" kern="0" dirty="0">
+                <a:solidFill>
+                  <a:srgbClr val="FFFFFF"/>
+                </a:solidFill>
+                <a:latin typeface="Arial" pitchFamily="34" charset="0"/>
+                <a:ea typeface="Arial" pitchFamily="34" charset="-122"/>
+                <a:cs typeface="Arial" pitchFamily="34" charset="-120"/>
+              </a:rPr>
+              <a:t>　SPARK</a:t>
+            </a:r>
+            <a:endParaRPr lang="en-US" sz="1100" dirty="0"/>
+          </a:p>
+        </p:txBody>
+      </p:sp>
+      <p:sp>
+        <p:nvSpPr>
+          <p:cNvPr id="10" name="Text 7"/>
+          <p:cNvSpPr/>
+          <p:nvPr/>
+        </p:nvSpPr>
+        <p:spPr>
+          <a:xfrm>
+            <a:off x="969264" y="2697480"/>
+            <a:ext cx="4572000" cy="548640"/>
+          </a:xfrm>
+          <a:prstGeom prst="rect">
+            <a:avLst/>
+          </a:prstGeom>
+          <a:noFill/>
+          <a:ln/>
+        </p:spPr>
+        <p:txBody>
+          <a:bodyPr wrap="square" lIns="0" tIns="0" rIns="0" bIns="0" rtlCol="0" anchor="ctr"/>
+          <a:lstStyle/>
+          <a:p>
+            <a:pPr indent="0" marL="0">
+              <a:buNone/>
+            </a:pPr>
+            <a:r>
+              <a:rPr lang="en-US" sz="3500" b="1" dirty="0">
+                <a:solidFill>
+                  <a:srgbClr val="FFFFFF"/>
+                </a:solidFill>
+                <a:latin typeface="Arial" pitchFamily="34" charset="0"/>
+                <a:ea typeface="Arial" pitchFamily="34" charset="-122"/>
+                <a:cs typeface="Arial" pitchFamily="34" charset="-120"/>
+              </a:rPr>
+              <a:t>3,000</a:t>
+            </a:r>
+            <a:pPr indent="0" marL="0">
+              <a:buNone/>
+            </a:pPr>
+            <a:r>
+              <a:rPr lang="en-US" sz="1500" b="1" dirty="0">
+                <a:solidFill>
+                  <a:srgbClr val="AEB6C4"/>
+                </a:solidFill>
+                <a:latin typeface="Yu Gothic" pitchFamily="34" charset="0"/>
+                <a:ea typeface="Yu Gothic" pitchFamily="34" charset="-122"/>
+                <a:cs typeface="Yu Gothic" pitchFamily="34" charset="-120"/>
+              </a:rPr>
+              <a:t> 万円</a:t>
+            </a:r>
+            <a:pPr indent="0" marL="0">
+              <a:buNone/>
+            </a:pPr>
+            <a:r>
+              <a:rPr lang="en-US" sz="1000" dirty="0">
+                <a:solidFill>
+                  <a:srgbClr val="78808F"/>
+                </a:solidFill>
+                <a:latin typeface="Yu Gothic" pitchFamily="34" charset="0"/>
+                <a:ea typeface="Yu Gothic" pitchFamily="34" charset="-122"/>
+                <a:cs typeface="Yu Gothic" pitchFamily="34" charset="-120"/>
+              </a:rPr>
+              <a:t>（税別）</a:t>
+            </a:r>
+            <a:endParaRPr lang="en-US" sz="3500" dirty="0"/>
+          </a:p>
+        </p:txBody>
+      </p:sp>
+      <p:sp>
+        <p:nvSpPr>
+          <p:cNvPr id="11" name="Text 8"/>
+          <p:cNvSpPr/>
+          <p:nvPr/>
+        </p:nvSpPr>
+        <p:spPr>
+          <a:xfrm>
+            <a:off x="969264" y="3383280"/>
+            <a:ext cx="4709160" cy="2606040"/>
           </a:xfrm>
           <a:prstGeom prst="rect">
             <a:avLst/>
@@ -8527,80 +9880,258 @@
           <a:bodyPr wrap="square" lIns="0" tIns="0" rIns="0" bIns="0" rtlCol="0" anchor="t"/>
           <a:lstStyle/>
           <a:p>
-            <a:pPr algn="ctr" indent="0" marL="0">
+            <a:pPr marL="152400" indent="-152400">
               <a:lnSpc>
-                <a:spcPts val="1600"/>
+                <a:spcPts val="1550"/>
               </a:lnSpc>
-              <a:buNone/>
-            </a:pPr>
-            <a:r>
-              <a:rPr lang="en-US" sz="1150" dirty="0">
-                <a:solidFill>
-                  <a:srgbClr val="AEB6C4"/>
-                </a:solidFill>
-                <a:latin typeface="Yu Gothic" pitchFamily="34" charset="0"/>
-                <a:ea typeface="Yu Gothic" pitchFamily="34" charset="-122"/>
-                <a:cs typeface="Yu Gothic" pitchFamily="34" charset="-120"/>
-              </a:rPr>
-              <a:t>店頭・イベントでの</a:t>
-            </a:r>
-            <a:endParaRPr lang="en-US" sz="1150" dirty="0"/>
-          </a:p>
-          <a:p>
-            <a:pPr algn="ctr" indent="0" marL="0">
+              <a:spcAft>
+                <a:spcPts val="600"/>
+              </a:spcAft>
+              <a:buSzPct val="100000"/>
+              <a:buChar char="▪"/>
+            </a:pPr>
+            <a:r>
+              <a:rPr lang="en-US" sz="1100" dirty="0">
+                <a:solidFill>
+                  <a:srgbClr val="E7EAF0"/>
+                </a:solidFill>
+                <a:latin typeface="Yu Gothic" pitchFamily="34" charset="0"/>
+                <a:ea typeface="Yu Gothic" pitchFamily="34" charset="-122"/>
+                <a:cs typeface="Yu Gothic" pitchFamily="34" charset="-120"/>
+              </a:rPr>
+              <a:t>WEB CM・SNS広告へのキャラクター使用（「さあ、変身してください。」）</a:t>
+            </a:r>
+            <a:endParaRPr lang="en-US" sz="1100" dirty="0"/>
+          </a:p>
+          <a:p>
+            <a:pPr marL="152400" indent="-152400">
               <a:lnSpc>
-                <a:spcPts val="1600"/>
+                <a:spcPts val="1550"/>
               </a:lnSpc>
-              <a:buNone/>
-            </a:pPr>
-            <a:r>
-              <a:rPr lang="en-US" sz="1150" dirty="0">
-                <a:solidFill>
-                  <a:srgbClr val="AEB6C4"/>
-                </a:solidFill>
-                <a:latin typeface="Yu Gothic" pitchFamily="34" charset="0"/>
-                <a:ea typeface="Yu Gothic" pitchFamily="34" charset="-122"/>
-                <a:cs typeface="Yu Gothic" pitchFamily="34" charset="-120"/>
-              </a:rPr>
-              <a:t>装着体験</a:t>
-            </a:r>
-            <a:endParaRPr lang="en-US" sz="1150" dirty="0"/>
-          </a:p>
-        </p:txBody>
-      </p:sp>
-      <p:sp>
-        <p:nvSpPr>
-          <p:cNvPr id="10" name="Shape 7"/>
-          <p:cNvSpPr/>
-          <p:nvPr/>
-        </p:nvSpPr>
-        <p:spPr>
-          <a:xfrm>
-            <a:off x="3364992" y="2148840"/>
-            <a:ext cx="0" cy="2651760"/>
-          </a:xfrm>
-          <a:prstGeom prst="line">
-            <a:avLst/>
-          </a:prstGeom>
-          <a:noFill/>
-          <a:ln w="12700">
+              <a:spcAft>
+                <a:spcPts val="600"/>
+              </a:spcAft>
+              <a:buSzPct val="100000"/>
+              <a:buChar char="▪"/>
+            </a:pPr>
+            <a:r>
+              <a:rPr lang="en-US" sz="1100" dirty="0">
+                <a:solidFill>
+                  <a:srgbClr val="E7EAF0"/>
+                </a:solidFill>
+                <a:latin typeface="Yu Gothic" pitchFamily="34" charset="0"/>
+                <a:ea typeface="Yu Gothic" pitchFamily="34" charset="-122"/>
+                <a:cs typeface="Yu Gothic" pitchFamily="34" charset="-120"/>
+              </a:rPr>
+              <a:t>SNSキャンペーン「#変身してみた」設計 + 公式素材供与</a:t>
+            </a:r>
+            <a:endParaRPr lang="en-US" sz="1100" dirty="0"/>
+          </a:p>
+          <a:p>
+            <a:pPr marL="152400" indent="-152400">
+              <a:lnSpc>
+                <a:spcPts val="1550"/>
+              </a:lnSpc>
+              <a:spcAft>
+                <a:spcPts val="600"/>
+              </a:spcAft>
+              <a:buSzPct val="100000"/>
+              <a:buChar char="▪"/>
+            </a:pPr>
+            <a:r>
+              <a:rPr lang="en-US" sz="1100" dirty="0">
+                <a:solidFill>
+                  <a:srgbClr val="E7EAF0"/>
+                </a:solidFill>
+                <a:latin typeface="Yu Gothic" pitchFamily="34" charset="0"/>
+                <a:ea typeface="Yu Gothic" pitchFamily="34" charset="-122"/>
+                <a:cs typeface="Yu Gothic" pitchFamily="34" charset="-120"/>
+              </a:rPr>
+              <a:t>AR体験パック「ULTRAMAN MODE」開発・供与（光線撮影／カラータイマー通知／防衛隊ナビ）</a:t>
+            </a:r>
+            <a:endParaRPr lang="en-US" sz="1100" dirty="0"/>
+          </a:p>
+          <a:p>
+            <a:pPr marL="152400" indent="-152400">
+              <a:lnSpc>
+                <a:spcPts val="1550"/>
+              </a:lnSpc>
+              <a:spcAft>
+                <a:spcPts val="600"/>
+              </a:spcAft>
+              <a:buSzPct val="100000"/>
+              <a:buChar char="▪"/>
+            </a:pPr>
+            <a:r>
+              <a:rPr lang="en-US" sz="1100" dirty="0">
+                <a:solidFill>
+                  <a:srgbClr val="E7EAF0"/>
+                </a:solidFill>
+                <a:latin typeface="Yu Gothic" pitchFamily="34" charset="0"/>
+                <a:ea typeface="Yu Gothic" pitchFamily="34" charset="-122"/>
+                <a:cs typeface="Yu Gothic" pitchFamily="34" charset="-120"/>
+              </a:rPr>
+              <a:t>5都市ポップアップ「変身体験」+ 7月10日共同PR</a:t>
+            </a:r>
+            <a:endParaRPr lang="en-US" sz="1100" dirty="0"/>
+          </a:p>
+          <a:p>
+            <a:pPr marL="152400" indent="-152400">
+              <a:lnSpc>
+                <a:spcPts val="1550"/>
+              </a:lnSpc>
+              <a:spcAft>
+                <a:spcPts val="600"/>
+              </a:spcAft>
+              <a:buSzPct val="100000"/>
+              <a:buChar char="▪"/>
+            </a:pPr>
+            <a:r>
+              <a:rPr lang="en-US" sz="1100" dirty="0">
+                <a:solidFill>
+                  <a:srgbClr val="E7EAF0"/>
+                </a:solidFill>
+                <a:latin typeface="Yu Gothic" pitchFamily="34" charset="0"/>
+                <a:ea typeface="Yu Gothic" pitchFamily="34" charset="-122"/>
+                <a:cs typeface="Yu Gothic" pitchFamily="34" charset="-120"/>
+              </a:rPr>
+              <a:t>円谷公式監修 + 3Dアセット供与</a:t>
+            </a:r>
+            <a:endParaRPr lang="en-US" sz="1100" dirty="0"/>
+          </a:p>
+          <a:p>
+            <a:pPr marL="152400" indent="-152400">
+              <a:lnSpc>
+                <a:spcPts val="1550"/>
+              </a:lnSpc>
+              <a:spcAft>
+                <a:spcPts val="600"/>
+              </a:spcAft>
+              <a:buSzPct val="100000"/>
+              <a:buChar char="▪"/>
+            </a:pPr>
+            <a:r>
+              <a:rPr lang="en-US" sz="1100" dirty="0">
+                <a:solidFill>
+                  <a:srgbClr val="E7EAF0"/>
+                </a:solidFill>
+                <a:latin typeface="Yu Gothic" pitchFamily="34" charset="0"/>
+                <a:ea typeface="Yu Gothic" pitchFamily="34" charset="-122"/>
+                <a:cs typeface="Yu Gothic" pitchFamily="34" charset="-120"/>
+              </a:rPr>
+              <a:t>許諾範囲: プロモ + デジタル／日本国内12ヶ月</a:t>
+            </a:r>
+            <a:endParaRPr lang="en-US" sz="1100" dirty="0"/>
+          </a:p>
+        </p:txBody>
+      </p:sp>
+      <p:sp>
+        <p:nvSpPr>
+          <p:cNvPr id="12" name="Shape 9"/>
+          <p:cNvSpPr/>
+          <p:nvPr/>
+        </p:nvSpPr>
+        <p:spPr>
+          <a:xfrm>
+            <a:off x="6199632" y="1508760"/>
+            <a:ext cx="5349240" cy="4572000"/>
+          </a:xfrm>
+          <a:prstGeom prst="roundRect">
+            <a:avLst>
+              <a:gd name="adj" fmla="val 2000"/>
+            </a:avLst>
+          </a:prstGeom>
+          <a:solidFill>
+            <a:srgbClr val="141926">
+              <a:alpha val="86000"/>
+            </a:srgbClr>
+          </a:solidFill>
+          <a:ln w="19050">
             <a:solidFill>
-              <a:srgbClr val="2A3140"/>
+              <a:srgbClr val="C8102E"/>
             </a:solidFill>
             <a:prstDash val="solid"/>
           </a:ln>
-        </p:spPr>
-      </p:sp>
-      <p:sp>
-        <p:nvSpPr>
-          <p:cNvPr id="11" name="Shape 8"/>
-          <p:cNvSpPr/>
-          <p:nvPr/>
-        </p:nvSpPr>
-        <p:spPr>
-          <a:xfrm>
-            <a:off x="4425696" y="2148840"/>
-            <a:ext cx="603504" cy="603504"/>
+          <a:effectLst>
+            <a:outerShdw sx="100000" sy="100000" kx="0" ky="0" algn="bl" rotWithShape="0" blurRad="279400" dist="50800" dir="16200000">
+              <a:srgbClr val="C8102E">
+                <a:alpha val="35000"/>
+              </a:srgbClr>
+            </a:outerShdw>
+          </a:effectLst>
+        </p:spPr>
+      </p:sp>
+      <p:sp>
+        <p:nvSpPr>
+          <p:cNvPr id="13" name="Shape 10"/>
+          <p:cNvSpPr/>
+          <p:nvPr/>
+        </p:nvSpPr>
+        <p:spPr>
+          <a:xfrm>
+            <a:off x="10442448" y="1700784"/>
+            <a:ext cx="868680" cy="347472"/>
+          </a:xfrm>
+          <a:prstGeom prst="roundRect">
+            <a:avLst>
+              <a:gd name="adj" fmla="val 50000"/>
+            </a:avLst>
+          </a:prstGeom>
+          <a:solidFill>
+            <a:srgbClr val="C8102E"/>
+          </a:solidFill>
+          <a:ln/>
+        </p:spPr>
+      </p:sp>
+      <p:sp>
+        <p:nvSpPr>
+          <p:cNvPr id="14" name="Text 11"/>
+          <p:cNvSpPr/>
+          <p:nvPr/>
+        </p:nvSpPr>
+        <p:spPr>
+          <a:xfrm>
+            <a:off x="10442448" y="1700784"/>
+            <a:ext cx="868680" cy="347472"/>
+          </a:xfrm>
+          <a:prstGeom prst="rect">
+            <a:avLst/>
+          </a:prstGeom>
+          <a:noFill/>
+          <a:ln/>
+        </p:spPr>
+        <p:txBody>
+          <a:bodyPr wrap="square" lIns="0" tIns="0" rIns="0" bIns="0" rtlCol="0" anchor="ctr"/>
+          <a:lstStyle/>
+          <a:p>
+            <a:pPr algn="ctr" indent="0" marL="0">
+              <a:buNone/>
+            </a:pPr>
+            <a:r>
+              <a:rPr lang="en-US" sz="1150" b="1" dirty="0">
+                <a:solidFill>
+                  <a:srgbClr val="FFFFFF"/>
+                </a:solidFill>
+                <a:latin typeface="Yu Gothic" pitchFamily="34" charset="0"/>
+                <a:ea typeface="Yu Gothic" pitchFamily="34" charset="-122"/>
+                <a:cs typeface="Yu Gothic" pitchFamily="34" charset="-120"/>
+              </a:rPr>
+              <a:t>推奨</a:t>
+            </a:r>
+            <a:endParaRPr lang="en-US" sz="1150" dirty="0"/>
+          </a:p>
+        </p:txBody>
+      </p:sp>
+      <p:sp>
+        <p:nvSpPr>
+          <p:cNvPr id="15" name="Shape 12"/>
+          <p:cNvSpPr/>
+          <p:nvPr/>
+        </p:nvSpPr>
+        <p:spPr>
+          <a:xfrm>
+            <a:off x="6528816" y="2157984"/>
+            <a:ext cx="566928" cy="566928"/>
           </a:xfrm>
           <a:prstGeom prst="ellipse">
             <a:avLst/>
@@ -8620,7 +10151,7 @@
       </p:sp>
       <p:pic>
         <p:nvPicPr>
-          <p:cNvPr id="12" name="Image 1" descr="/tmp/claude-0/-home-user-kessho-lens/63555445-5e6f-583b-ab8a-87e352d31a90/scratchpad/icons/FaHashtag.png">    </p:cNvPr>
+          <p:cNvPr id="16" name="Image 1" descr="/tmp/claude-0/-home-user-kessho-lens/63555445-5e6f-583b-ab8a-87e352d31a90/scratchpad/icons/FaGem.png">    </p:cNvPr>
           <p:cNvPicPr>
             <a:picLocks noChangeAspect="1"/>
           </p:cNvPicPr>
@@ -8634,8 +10165,8 @@
         </p:blipFill>
         <p:spPr>
           <a:xfrm>
-            <a:off x="4588642" y="2311786"/>
-            <a:ext cx="277612" cy="277612"/>
+            <a:off x="6681887" y="2311055"/>
+            <a:ext cx="260787" cy="260787"/>
           </a:xfrm>
           <a:prstGeom prst="rect">
             <a:avLst/>
@@ -8644,14 +10175,14 @@
       </p:pic>
       <p:sp>
         <p:nvSpPr>
-          <p:cNvPr id="13" name="Text 9"/>
-          <p:cNvSpPr/>
-          <p:nvPr/>
-        </p:nvSpPr>
-        <p:spPr>
-          <a:xfrm>
-            <a:off x="3456432" y="2971800"/>
-            <a:ext cx="2542032" cy="731520"/>
+          <p:cNvPr id="17" name="Text 13"/>
+          <p:cNvSpPr/>
+          <p:nvPr/>
+        </p:nvSpPr>
+        <p:spPr>
+          <a:xfrm>
+            <a:off x="7251192" y="2157984"/>
+            <a:ext cx="4069080" cy="566928"/>
           </a:xfrm>
           <a:prstGeom prst="rect">
             <a:avLst/>
@@ -8663,200 +10194,25 @@
           <a:bodyPr wrap="square" lIns="0" tIns="0" rIns="0" bIns="0" rtlCol="0" anchor="ctr"/>
           <a:lstStyle/>
           <a:p>
-            <a:pPr algn="ctr" indent="0" marL="0">
-              <a:buNone/>
-            </a:pPr>
-            <a:r>
-              <a:rPr lang="en-US" sz="3800" b="1" dirty="0">
-                <a:solidFill>
-                  <a:srgbClr val="FFFFFF"/>
+            <a:pPr indent="0" marL="0">
+              <a:buNone/>
+            </a:pPr>
+            <a:r>
+              <a:rPr lang="en-US" sz="1100" b="1" spc="200" kern="0" dirty="0">
+                <a:solidFill>
+                  <a:srgbClr val="78808F"/>
                 </a:solidFill>
                 <a:latin typeface="Arial" pitchFamily="34" charset="0"/>
                 <a:ea typeface="Arial" pitchFamily="34" charset="-122"/>
                 <a:cs typeface="Arial" pitchFamily="34" charset="-120"/>
               </a:rPr>
-              <a:t>1万</a:t>
-            </a:r>
-            <a:pPr algn="ctr" indent="0" marL="0">
-              <a:buNone/>
-            </a:pPr>
-            <a:r>
-              <a:rPr lang="en-US" sz="1700" b="1" dirty="0">
-                <a:solidFill>
-                  <a:srgbClr val="E8354F"/>
-                </a:solidFill>
-                <a:latin typeface="Yu Gothic" pitchFamily="34" charset="0"/>
-                <a:ea typeface="Yu Gothic" pitchFamily="34" charset="-122"/>
-                <a:cs typeface="Yu Gothic" pitchFamily="34" charset="-120"/>
-              </a:rPr>
-              <a:t> 件</a:t>
-            </a:r>
-            <a:endParaRPr lang="en-US" sz="3800" dirty="0"/>
-          </a:p>
-        </p:txBody>
-      </p:sp>
-      <p:sp>
-        <p:nvSpPr>
-          <p:cNvPr id="14" name="Text 10"/>
-          <p:cNvSpPr/>
-          <p:nvPr/>
-        </p:nvSpPr>
-        <p:spPr>
-          <a:xfrm>
-            <a:off x="3547872" y="3794760"/>
-            <a:ext cx="2359152" cy="777240"/>
-          </a:xfrm>
-          <a:prstGeom prst="rect">
-            <a:avLst/>
-          </a:prstGeom>
-          <a:noFill/>
-          <a:ln/>
-        </p:spPr>
-        <p:txBody>
-          <a:bodyPr wrap="square" lIns="0" tIns="0" rIns="0" bIns="0" rtlCol="0" anchor="t"/>
-          <a:lstStyle/>
-          <a:p>
-            <a:pPr algn="ctr" indent="0" marL="0">
-              <a:lnSpc>
-                <a:spcPts val="1600"/>
-              </a:lnSpc>
-              <a:buNone/>
-            </a:pPr>
-            <a:r>
-              <a:rPr lang="en-US" sz="1150" dirty="0">
-                <a:solidFill>
-                  <a:srgbClr val="AEB6C4"/>
-                </a:solidFill>
-                <a:latin typeface="Yu Gothic" pitchFamily="34" charset="0"/>
-                <a:ea typeface="Yu Gothic" pitchFamily="34" charset="-122"/>
-                <a:cs typeface="Yu Gothic" pitchFamily="34" charset="-120"/>
-              </a:rPr>
-              <a:t>光線撮影UGC</a:t>
-            </a:r>
-            <a:endParaRPr lang="en-US" sz="1150" dirty="0"/>
-          </a:p>
-          <a:p>
-            <a:pPr algn="ctr" indent="0" marL="0">
-              <a:lnSpc>
-                <a:spcPts val="1600"/>
-              </a:lnSpc>
-              <a:buNone/>
-            </a:pPr>
-            <a:r>
-              <a:rPr lang="en-US" sz="1150" dirty="0">
-                <a:solidFill>
-                  <a:srgbClr val="AEB6C4"/>
-                </a:solidFill>
-                <a:latin typeface="Yu Gothic" pitchFamily="34" charset="0"/>
-                <a:ea typeface="Yu Gothic" pitchFamily="34" charset="-122"/>
-                <a:cs typeface="Yu Gothic" pitchFamily="34" charset="-120"/>
-              </a:rPr>
-              <a:t>（SNS投稿）</a:t>
-            </a:r>
-            <a:endParaRPr lang="en-US" sz="1150" dirty="0"/>
-          </a:p>
-        </p:txBody>
-      </p:sp>
-      <p:sp>
-        <p:nvSpPr>
-          <p:cNvPr id="15" name="Shape 11"/>
-          <p:cNvSpPr/>
-          <p:nvPr/>
-        </p:nvSpPr>
-        <p:spPr>
-          <a:xfrm>
-            <a:off x="6089904" y="2148840"/>
-            <a:ext cx="0" cy="2651760"/>
-          </a:xfrm>
-          <a:prstGeom prst="line">
-            <a:avLst/>
-          </a:prstGeom>
-          <a:noFill/>
-          <a:ln w="12700">
-            <a:solidFill>
-              <a:srgbClr val="2A3140"/>
-            </a:solidFill>
-            <a:prstDash val="solid"/>
-          </a:ln>
-        </p:spPr>
-      </p:sp>
-      <p:sp>
-        <p:nvSpPr>
-          <p:cNvPr id="16" name="Shape 12"/>
-          <p:cNvSpPr/>
-          <p:nvPr/>
-        </p:nvSpPr>
-        <p:spPr>
-          <a:xfrm>
-            <a:off x="7150608" y="2148840"/>
-            <a:ext cx="603504" cy="603504"/>
-          </a:xfrm>
-          <a:prstGeom prst="ellipse">
-            <a:avLst/>
-          </a:prstGeom>
-          <a:solidFill>
-            <a:srgbClr val="C8102E"/>
-          </a:solidFill>
-          <a:ln/>
-          <a:effectLst>
-            <a:outerShdw sx="100000" sy="100000" kx="0" ky="0" algn="bl" rotWithShape="0" blurRad="152400" dist="50800" dir="16200000">
-              <a:srgbClr val="C8102E">
-                <a:alpha val="50000"/>
-              </a:srgbClr>
-            </a:outerShdw>
-          </a:effectLst>
-        </p:spPr>
-      </p:sp>
-      <p:pic>
-        <p:nvPicPr>
-          <p:cNvPr id="17" name="Image 2" descr="/tmp/claude-0/-home-user-kessho-lens/63555445-5e6f-583b-ab8a-87e352d31a90/scratchpad/icons/FaYenSign.png">    </p:cNvPr>
-          <p:cNvPicPr>
-            <a:picLocks noChangeAspect="1"/>
-          </p:cNvPicPr>
-          <p:nvPr/>
-        </p:nvPicPr>
-        <p:blipFill>
-          <a:blip r:embed="rId4"/>
-          <a:stretch>
-            <a:fillRect/>
-          </a:stretch>
-        </p:blipFill>
-        <p:spPr>
-          <a:xfrm>
-            <a:off x="7313554" y="2311786"/>
-            <a:ext cx="277612" cy="277612"/>
-          </a:xfrm>
-          <a:prstGeom prst="rect">
-            <a:avLst/>
-          </a:prstGeom>
-        </p:spPr>
-      </p:pic>
-      <p:sp>
-        <p:nvSpPr>
-          <p:cNvPr id="18" name="Text 13"/>
-          <p:cNvSpPr/>
-          <p:nvPr/>
-        </p:nvSpPr>
-        <p:spPr>
-          <a:xfrm>
-            <a:off x="6181344" y="2971800"/>
-            <a:ext cx="2542032" cy="731520"/>
-          </a:xfrm>
-          <a:prstGeom prst="rect">
-            <a:avLst/>
-          </a:prstGeom>
-          <a:noFill/>
-          <a:ln/>
-        </p:spPr>
-        <p:txBody>
-          <a:bodyPr wrap="square" lIns="0" tIns="0" rIns="0" bIns="0" rtlCol="0" anchor="ctr"/>
-          <a:lstStyle/>
-          <a:p>
-            <a:pPr algn="ctr" indent="0" marL="0">
-              <a:buNone/>
-            </a:pPr>
-            <a:r>
-              <a:rPr lang="en-US" sz="3800" b="1" dirty="0">
+              <a:t>PLAN U</a:t>
+            </a:r>
+            <a:pPr indent="0" marL="0">
+              <a:buNone/>
+            </a:pPr>
+            <a:r>
+              <a:rPr lang="en-US" sz="1700" b="1" spc="100" kern="0" dirty="0">
                 <a:solidFill>
                   <a:srgbClr val="FFFFFF"/>
                 </a:solidFill>
@@ -8864,225 +10220,96 @@
                 <a:ea typeface="Arial" pitchFamily="34" charset="-122"/>
                 <a:cs typeface="Arial" pitchFamily="34" charset="-120"/>
               </a:rPr>
-              <a:t>3.3億</a:t>
-            </a:r>
-            <a:pPr algn="ctr" indent="0" marL="0">
-              <a:buNone/>
-            </a:pPr>
-            <a:r>
-              <a:rPr lang="en-US" sz="1700" b="1" dirty="0">
+              <a:t>　ULTRAMAN EDITION</a:t>
+            </a:r>
+            <a:endParaRPr lang="en-US" sz="1100" dirty="0"/>
+          </a:p>
+        </p:txBody>
+      </p:sp>
+      <p:sp>
+        <p:nvSpPr>
+          <p:cNvPr id="18" name="Text 14"/>
+          <p:cNvSpPr/>
+          <p:nvPr/>
+        </p:nvSpPr>
+        <p:spPr>
+          <a:xfrm>
+            <a:off x="6528816" y="2852928"/>
+            <a:ext cx="4572000" cy="548640"/>
+          </a:xfrm>
+          <a:prstGeom prst="rect">
+            <a:avLst/>
+          </a:prstGeom>
+          <a:noFill/>
+          <a:ln/>
+        </p:spPr>
+        <p:txBody>
+          <a:bodyPr wrap="square" lIns="0" tIns="0" rIns="0" bIns="0" rtlCol="0" anchor="ctr"/>
+          <a:lstStyle/>
+          <a:p>
+            <a:pPr indent="0" marL="0">
+              <a:buNone/>
+            </a:pPr>
+            <a:r>
+              <a:rPr lang="en-US" sz="3500" b="1" dirty="0">
                 <a:solidFill>
                   <a:srgbClr val="E8354F"/>
                 </a:solidFill>
-                <a:latin typeface="Yu Gothic" pitchFamily="34" charset="0"/>
-                <a:ea typeface="Yu Gothic" pitchFamily="34" charset="-122"/>
-                <a:cs typeface="Yu Gothic" pitchFamily="34" charset="-120"/>
-              </a:rPr>
-              <a:t> 円</a:t>
-            </a:r>
-            <a:endParaRPr lang="en-US" sz="3800" dirty="0"/>
-          </a:p>
-        </p:txBody>
-      </p:sp>
-      <p:sp>
-        <p:nvSpPr>
-          <p:cNvPr id="19" name="Text 14"/>
-          <p:cNvSpPr/>
-          <p:nvPr/>
-        </p:nvSpPr>
-        <p:spPr>
-          <a:xfrm>
-            <a:off x="6272784" y="3794760"/>
-            <a:ext cx="2359152" cy="777240"/>
-          </a:xfrm>
-          <a:prstGeom prst="rect">
-            <a:avLst/>
-          </a:prstGeom>
-          <a:noFill/>
-          <a:ln/>
-        </p:spPr>
-        <p:txBody>
-          <a:bodyPr wrap="square" lIns="0" tIns="0" rIns="0" bIns="0" rtlCol="0" anchor="t"/>
-          <a:lstStyle/>
-          <a:p>
-            <a:pPr algn="ctr" indent="0" marL="0">
-              <a:lnSpc>
-                <a:spcPts val="1600"/>
-              </a:lnSpc>
-              <a:buNone/>
-            </a:pPr>
-            <a:r>
-              <a:rPr lang="en-US" sz="1150" dirty="0">
-                <a:solidFill>
-                  <a:srgbClr val="AEB6C4"/>
-                </a:solidFill>
-                <a:latin typeface="Yu Gothic" pitchFamily="34" charset="0"/>
-                <a:ea typeface="Yu Gothic" pitchFamily="34" charset="-122"/>
-                <a:cs typeface="Yu Gothic" pitchFamily="34" charset="-120"/>
-              </a:rPr>
-              <a:t>限定モデル小売規模</a:t>
-            </a:r>
-            <a:endParaRPr lang="en-US" sz="1150" dirty="0"/>
-          </a:p>
-          <a:p>
-            <a:pPr algn="ctr" indent="0" marL="0">
-              <a:lnSpc>
-                <a:spcPts val="1600"/>
-              </a:lnSpc>
-              <a:buNone/>
-            </a:pPr>
-            <a:r>
-              <a:rPr lang="en-US" sz="1150" dirty="0">
-                <a:solidFill>
-                  <a:srgbClr val="AEB6C4"/>
-                </a:solidFill>
-                <a:latin typeface="Yu Gothic" pitchFamily="34" charset="0"/>
-                <a:ea typeface="Yu Gothic" pitchFamily="34" charset="-122"/>
-                <a:cs typeface="Yu Gothic" pitchFamily="34" charset="-120"/>
-              </a:rPr>
-              <a:t>（3,000台完売時）</a:t>
-            </a:r>
-            <a:endParaRPr lang="en-US" sz="1150" dirty="0"/>
-          </a:p>
-        </p:txBody>
-      </p:sp>
-      <p:sp>
-        <p:nvSpPr>
-          <p:cNvPr id="20" name="Shape 15"/>
-          <p:cNvSpPr/>
-          <p:nvPr/>
-        </p:nvSpPr>
-        <p:spPr>
-          <a:xfrm>
-            <a:off x="8814816" y="2148840"/>
-            <a:ext cx="0" cy="2651760"/>
-          </a:xfrm>
-          <a:prstGeom prst="line">
-            <a:avLst/>
-          </a:prstGeom>
-          <a:noFill/>
-          <a:ln w="12700">
-            <a:solidFill>
-              <a:srgbClr val="2A3140"/>
-            </a:solidFill>
-            <a:prstDash val="solid"/>
-          </a:ln>
-        </p:spPr>
-      </p:sp>
-      <p:sp>
-        <p:nvSpPr>
-          <p:cNvPr id="21" name="Shape 16"/>
-          <p:cNvSpPr/>
-          <p:nvPr/>
-        </p:nvSpPr>
-        <p:spPr>
-          <a:xfrm>
-            <a:off x="9875520" y="2148840"/>
-            <a:ext cx="603504" cy="603504"/>
-          </a:xfrm>
-          <a:prstGeom prst="ellipse">
-            <a:avLst/>
-          </a:prstGeom>
-          <a:solidFill>
-            <a:srgbClr val="C8102E"/>
-          </a:solidFill>
-          <a:ln/>
-          <a:effectLst>
-            <a:outerShdw sx="100000" sy="100000" kx="0" ky="0" algn="bl" rotWithShape="0" blurRad="152400" dist="50800" dir="16200000">
-              <a:srgbClr val="C8102E">
-                <a:alpha val="50000"/>
-              </a:srgbClr>
-            </a:outerShdw>
-          </a:effectLst>
-        </p:spPr>
-      </p:sp>
-      <p:pic>
-        <p:nvPicPr>
-          <p:cNvPr id="22" name="Image 3" descr="/tmp/claude-0/-home-user-kessho-lens/63555445-5e6f-583b-ab8a-87e352d31a90/scratchpad/icons/FaBullhorn.png">    </p:cNvPr>
-          <p:cNvPicPr>
-            <a:picLocks noChangeAspect="1"/>
-          </p:cNvPicPr>
-          <p:nvPr/>
-        </p:nvPicPr>
-        <p:blipFill>
-          <a:blip r:embed="rId5"/>
-          <a:stretch>
-            <a:fillRect/>
-          </a:stretch>
-        </p:blipFill>
-        <p:spPr>
-          <a:xfrm>
-            <a:off x="10038466" y="2311786"/>
-            <a:ext cx="277612" cy="277612"/>
-          </a:xfrm>
-          <a:prstGeom prst="rect">
-            <a:avLst/>
-          </a:prstGeom>
-        </p:spPr>
-      </p:pic>
-      <p:sp>
-        <p:nvSpPr>
-          <p:cNvPr id="23" name="Text 17"/>
-          <p:cNvSpPr/>
-          <p:nvPr/>
-        </p:nvSpPr>
-        <p:spPr>
-          <a:xfrm>
-            <a:off x="8906256" y="2971800"/>
-            <a:ext cx="2542032" cy="731520"/>
-          </a:xfrm>
-          <a:prstGeom prst="rect">
-            <a:avLst/>
-          </a:prstGeom>
-          <a:noFill/>
-          <a:ln/>
-        </p:spPr>
-        <p:txBody>
-          <a:bodyPr wrap="square" lIns="0" tIns="0" rIns="0" bIns="0" rtlCol="0" anchor="ctr"/>
-          <a:lstStyle/>
-          <a:p>
-            <a:pPr algn="ctr" indent="0" marL="0">
-              <a:buNone/>
-            </a:pPr>
-            <a:r>
-              <a:rPr lang="en-US" sz="3800" b="1" dirty="0">
-                <a:solidFill>
-                  <a:srgbClr val="FFFFFF"/>
-                </a:solidFill>
+                <a:effectLst>
+                  <a:glow rad="114300">
+                    <a:srgbClr val="C8102E">
+                      <a:alpha val="45000"/>
+                    </a:srgbClr>
+                  </a:glow>
+                </a:effectLst>
                 <a:latin typeface="Arial" pitchFamily="34" charset="0"/>
                 <a:ea typeface="Arial" pitchFamily="34" charset="-122"/>
                 <a:cs typeface="Arial" pitchFamily="34" charset="-120"/>
               </a:rPr>
-              <a:t>5億</a:t>
-            </a:r>
-            <a:pPr algn="ctr" indent="0" marL="0">
-              <a:buNone/>
-            </a:pPr>
-            <a:r>
-              <a:rPr lang="en-US" sz="1700" b="1" dirty="0">
-                <a:solidFill>
-                  <a:srgbClr val="E8354F"/>
-                </a:solidFill>
-                <a:latin typeface="Yu Gothic" pitchFamily="34" charset="0"/>
-                <a:ea typeface="Yu Gothic" pitchFamily="34" charset="-122"/>
-                <a:cs typeface="Yu Gothic" pitchFamily="34" charset="-120"/>
-              </a:rPr>
-              <a:t> 円+</a:t>
-            </a:r>
-            <a:endParaRPr lang="en-US" sz="3800" dirty="0"/>
-          </a:p>
-        </p:txBody>
-      </p:sp>
-      <p:sp>
-        <p:nvSpPr>
-          <p:cNvPr id="24" name="Text 18"/>
-          <p:cNvSpPr/>
-          <p:nvPr/>
-        </p:nvSpPr>
-        <p:spPr>
-          <a:xfrm>
-            <a:off x="8997696" y="3794760"/>
-            <a:ext cx="2359152" cy="777240"/>
+              <a:t>8,000</a:t>
+            </a:r>
+            <a:pPr indent="0" marL="0">
+              <a:buNone/>
+            </a:pPr>
+            <a:r>
+              <a:rPr lang="en-US" sz="1500" b="1" dirty="0">
+                <a:solidFill>
+                  <a:srgbClr val="FFFFFF"/>
+                </a:solidFill>
+                <a:latin typeface="Yu Gothic" pitchFamily="34" charset="0"/>
+                <a:ea typeface="Yu Gothic" pitchFamily="34" charset="-122"/>
+                <a:cs typeface="Yu Gothic" pitchFamily="34" charset="-120"/>
+              </a:rPr>
+              <a:t> 万円</a:t>
+            </a:r>
+            <a:pPr indent="0" marL="0">
+              <a:buNone/>
+            </a:pPr>
+            <a:r>
+              <a:rPr lang="en-US" sz="1000" dirty="0">
+                <a:solidFill>
+                  <a:srgbClr val="AEB6C4"/>
+                </a:solidFill>
+                <a:latin typeface="Yu Gothic" pitchFamily="34" charset="0"/>
+                <a:ea typeface="Yu Gothic" pitchFamily="34" charset="-122"/>
+                <a:cs typeface="Yu Gothic" pitchFamily="34" charset="-120"/>
+              </a:rPr>
+              <a:t>（税別）</a:t>
+            </a:r>
+            <a:endParaRPr lang="en-US" sz="3500" dirty="0"/>
+          </a:p>
+        </p:txBody>
+      </p:sp>
+      <p:sp>
+        <p:nvSpPr>
+          <p:cNvPr id="19" name="Text 15"/>
+          <p:cNvSpPr/>
+          <p:nvPr/>
+        </p:nvSpPr>
+        <p:spPr>
+          <a:xfrm>
+            <a:off x="6528816" y="3520440"/>
+            <a:ext cx="4754880" cy="2468880"/>
           </a:xfrm>
           <a:prstGeom prst="rect">
             <a:avLst/>
@@ -9094,14 +10321,17 @@
           <a:bodyPr wrap="square" lIns="0" tIns="0" rIns="0" bIns="0" rtlCol="0" anchor="t"/>
           <a:lstStyle/>
           <a:p>
-            <a:pPr algn="ctr" indent="0" marL="0">
+            <a:pPr indent="0" marL="0">
               <a:lnSpc>
-                <a:spcPts val="1600"/>
+                <a:spcPts val="1550"/>
               </a:lnSpc>
-              <a:buNone/>
-            </a:pPr>
-            <a:r>
-              <a:rPr lang="en-US" sz="1150" dirty="0">
+              <a:spcAft>
+                <a:spcPts val="600"/>
+              </a:spcAft>
+              <a:buNone/>
+            </a:pPr>
+            <a:r>
+              <a:rPr lang="en-US" sz="1100" i="1" dirty="0">
                 <a:solidFill>
                   <a:srgbClr val="AEB6C4"/>
                 </a:solidFill>
@@ -9109,65 +10339,142 @@
                 <a:ea typeface="Yu Gothic" pitchFamily="34" charset="-122"/>
                 <a:cs typeface="Yu Gothic" pitchFamily="34" charset="-120"/>
               </a:rPr>
-              <a:t>メディア露出換算</a:t>
-            </a:r>
-            <a:endParaRPr lang="en-US" sz="1150" dirty="0"/>
-          </a:p>
-          <a:p>
-            <a:pPr algn="ctr" indent="0" marL="0">
+              <a:t>Plan S のすべて、に加えて——</a:t>
+            </a:r>
+            <a:endParaRPr lang="en-US" sz="1100" dirty="0"/>
+          </a:p>
+          <a:p>
+            <a:pPr marL="152400" indent="-152400">
               <a:lnSpc>
-                <a:spcPts val="1600"/>
+                <a:spcPts val="1550"/>
               </a:lnSpc>
-              <a:buNone/>
-            </a:pPr>
-            <a:r>
-              <a:rPr lang="en-US" sz="1150" dirty="0">
-                <a:solidFill>
-                  <a:srgbClr val="AEB6C4"/>
-                </a:solidFill>
-                <a:latin typeface="Yu Gothic" pitchFamily="34" charset="0"/>
-                <a:ea typeface="Yu Gothic" pitchFamily="34" charset="-122"/>
-                <a:cs typeface="Yu Gothic" pitchFamily="34" charset="-120"/>
-              </a:rPr>
-              <a:t>（Plan U 実施時）</a:t>
-            </a:r>
-            <a:endParaRPr lang="en-US" sz="1150" dirty="0"/>
-          </a:p>
-        </p:txBody>
-      </p:sp>
-      <p:sp>
-        <p:nvSpPr>
-          <p:cNvPr id="25" name="Shape 19"/>
-          <p:cNvSpPr/>
-          <p:nvPr/>
-        </p:nvSpPr>
-        <p:spPr>
-          <a:xfrm>
-            <a:off x="640080" y="5212080"/>
-            <a:ext cx="10908792" cy="0"/>
-          </a:xfrm>
-          <a:prstGeom prst="line">
-            <a:avLst/>
-          </a:prstGeom>
-          <a:noFill/>
-          <a:ln w="12700">
-            <a:solidFill>
-              <a:srgbClr val="2A3140"/>
-            </a:solidFill>
-            <a:prstDash val="solid"/>
-          </a:ln>
-        </p:spPr>
-      </p:sp>
-      <p:sp>
-        <p:nvSpPr>
-          <p:cNvPr id="26" name="Text 20"/>
-          <p:cNvSpPr/>
-          <p:nvPr/>
-        </p:nvSpPr>
-        <p:spPr>
-          <a:xfrm>
-            <a:off x="640080" y="5440680"/>
-            <a:ext cx="10927080" cy="868680"/>
+              <a:spcAft>
+                <a:spcPts val="600"/>
+              </a:spcAft>
+              <a:buSzPct val="100000"/>
+              <a:buChar char="▪"/>
+            </a:pPr>
+            <a:r>
+              <a:rPr lang="en-US" sz="1100" dirty="0">
+                <a:solidFill>
+                  <a:srgbClr val="E7EAF0"/>
+                </a:solidFill>
+                <a:latin typeface="Yu Gothic" pitchFamily="34" charset="0"/>
+                <a:ea typeface="Yu Gothic" pitchFamily="34" charset="-122"/>
+                <a:cs typeface="Yu Gothic" pitchFamily="34" charset="-120"/>
+              </a:rPr>
+              <a:t>TVCM・OOHへのキャラクター使用（都心での巨大ウルトラマンAR演出）</a:t>
+            </a:r>
+            <a:endParaRPr lang="en-US" sz="1100" dirty="0"/>
+          </a:p>
+          <a:p>
+            <a:pPr marL="152400" indent="-152400">
+              <a:lnSpc>
+                <a:spcPts val="1550"/>
+              </a:lnSpc>
+              <a:spcAft>
+                <a:spcPts val="600"/>
+              </a:spcAft>
+              <a:buSzPct val="100000"/>
+              <a:buChar char="▪"/>
+            </a:pPr>
+            <a:r>
+              <a:rPr lang="en-US" sz="1100" dirty="0">
+                <a:solidFill>
+                  <a:srgbClr val="E7EAF0"/>
+                </a:solidFill>
+                <a:latin typeface="Yu Gothic" pitchFamily="34" charset="0"/>
+                <a:ea typeface="Yu Gothic" pitchFamily="34" charset="-122"/>
+                <a:cs typeface="Yu Gothic" pitchFamily="34" charset="-120"/>
+              </a:rPr>
+              <a:t>共同発表会・店頭イベントへのウルトラマン登壇（ショー派遣）</a:t>
+            </a:r>
+            <a:endParaRPr lang="en-US" sz="1100" dirty="0"/>
+          </a:p>
+          <a:p>
+            <a:pPr marL="152400" indent="-152400">
+              <a:lnSpc>
+                <a:spcPts val="1550"/>
+              </a:lnSpc>
+              <a:spcAft>
+                <a:spcPts val="600"/>
+              </a:spcAft>
+              <a:buSzPct val="100000"/>
+              <a:buChar char="▪"/>
+            </a:pPr>
+            <a:r>
+              <a:rPr lang="en-US" sz="1100" dirty="0">
+                <a:solidFill>
+                  <a:srgbClr val="E7EAF0"/>
+                </a:solidFill>
+                <a:latin typeface="Yu Gothic" pitchFamily="34" charset="0"/>
+                <a:ea typeface="Yu Gothic" pitchFamily="34" charset="-122"/>
+                <a:cs typeface="Yu Gothic" pitchFamily="34" charset="-120"/>
+              </a:rPr>
+              <a:t>限定モデル「ULTRAMAN EDITION」3,000台（カラータイマー型ケース・変身音・シリアルNo.・60周年ロゴ）</a:t>
+            </a:r>
+            <a:endParaRPr lang="en-US" sz="1100" dirty="0"/>
+          </a:p>
+          <a:p>
+            <a:pPr marL="152400" indent="-152400">
+              <a:lnSpc>
+                <a:spcPts val="1550"/>
+              </a:lnSpc>
+              <a:spcAft>
+                <a:spcPts val="600"/>
+              </a:spcAft>
+              <a:buSzPct val="100000"/>
+              <a:buChar char="▪"/>
+            </a:pPr>
+            <a:r>
+              <a:rPr lang="en-US" sz="1100" dirty="0">
+                <a:solidFill>
+                  <a:srgbClr val="E7EAF0"/>
+                </a:solidFill>
+                <a:latin typeface="Yu Gothic" pitchFamily="34" charset="0"/>
+                <a:ea typeface="Yu Gothic" pitchFamily="34" charset="-122"/>
+                <a:cs typeface="Yu Gothic" pitchFamily="34" charset="-120"/>
+              </a:rPr>
+              <a:t>60周年展 出展枠・『ウルトラマンティオ』放送連動 ※</a:t>
+            </a:r>
+            <a:endParaRPr lang="en-US" sz="1100" dirty="0"/>
+          </a:p>
+          <a:p>
+            <a:pPr marL="152400" indent="-152400">
+              <a:lnSpc>
+                <a:spcPts val="1550"/>
+              </a:lnSpc>
+              <a:spcAft>
+                <a:spcPts val="600"/>
+              </a:spcAft>
+              <a:buSzPct val="100000"/>
+              <a:buChar char="▪"/>
+            </a:pPr>
+            <a:r>
+              <a:rPr lang="en-US" sz="1100" dirty="0">
+                <a:solidFill>
+                  <a:srgbClr val="E7EAF0"/>
+                </a:solidFill>
+                <a:latin typeface="Yu Gothic" pitchFamily="34" charset="0"/>
+                <a:ea typeface="Yu Gothic" pitchFamily="34" charset="-122"/>
+                <a:cs typeface="Yu Gothic" pitchFamily="34" charset="-120"/>
+              </a:rPr>
+              <a:t>中国・北米・欧州 Rokid 販路の優先交渉権</a:t>
+            </a:r>
+            <a:endParaRPr lang="en-US" sz="1100" dirty="0"/>
+          </a:p>
+        </p:txBody>
+      </p:sp>
+      <p:sp>
+        <p:nvSpPr>
+          <p:cNvPr id="20" name="Text 16"/>
+          <p:cNvSpPr/>
+          <p:nvPr/>
+        </p:nvSpPr>
+        <p:spPr>
+          <a:xfrm>
+            <a:off x="640080" y="6309360"/>
+            <a:ext cx="10927080" cy="384048"/>
           </a:xfrm>
           <a:prstGeom prst="rect">
             <a:avLst/>
@@ -9181,62 +10488,28 @@
           <a:p>
             <a:pPr indent="0" marL="0">
               <a:lnSpc>
-                <a:spcPts val="2400"/>
+                <a:spcPts val="1250"/>
               </a:lnSpc>
               <a:buNone/>
             </a:pPr>
             <a:r>
-              <a:rPr lang="en-US" sz="1550" b="1" dirty="0">
-                <a:solidFill>
-                  <a:srgbClr val="FFFFFF"/>
-                </a:solidFill>
-                <a:latin typeface="Yu Gothic" pitchFamily="34" charset="0"/>
-                <a:ea typeface="Yu Gothic" pitchFamily="34" charset="-122"/>
-                <a:cs typeface="Yu Gothic" pitchFamily="34" charset="-120"/>
-              </a:rPr>
-              <a:t>収益は入口にすぎません。本質的な価値は、</a:t>
-            </a:r>
-            <a:pPr indent="0" marL="0">
-              <a:lnSpc>
-                <a:spcPts val="2400"/>
-              </a:lnSpc>
-              <a:buNone/>
-            </a:pPr>
-            <a:r>
-              <a:rPr lang="en-US" sz="1550" b="1" dirty="0">
-                <a:solidFill>
-                  <a:srgbClr val="E8354F"/>
-                </a:solidFill>
-                <a:latin typeface="Yu Gothic" pitchFamily="34" charset="0"/>
-                <a:ea typeface="Yu Gothic" pitchFamily="34" charset="-122"/>
-                <a:cs typeface="Yu Gothic" pitchFamily="34" charset="-120"/>
-              </a:rPr>
-              <a:t>「ARグラスの最初のIP体験」という歴史的ポジション</a:t>
-            </a:r>
-            <a:pPr indent="0" marL="0">
-              <a:lnSpc>
-                <a:spcPts val="2400"/>
-              </a:lnSpc>
-              <a:buNone/>
-            </a:pPr>
-            <a:r>
-              <a:rPr lang="en-US" sz="1550" b="1" dirty="0">
-                <a:solidFill>
-                  <a:srgbClr val="FFFFFF"/>
-                </a:solidFill>
-                <a:latin typeface="Yu Gothic" pitchFamily="34" charset="0"/>
-                <a:ea typeface="Yu Gothic" pitchFamily="34" charset="-122"/>
-                <a:cs typeface="Yu Gothic" pitchFamily="34" charset="-120"/>
-              </a:rPr>
-              <a:t> を両社で独占することです。</a:t>
-            </a:r>
-            <a:endParaRPr lang="en-US" sz="1550" dirty="0"/>
-          </a:p>
-        </p:txBody>
-      </p:sp>
-      <p:sp>
-        <p:nvSpPr>
-          <p:cNvPr id="27" name="Text 21"/>
+              <a:rPr lang="en-US" sz="900" dirty="0">
+                <a:solidFill>
+                  <a:srgbClr val="78808F"/>
+                </a:solidFill>
+                <a:latin typeface="Yu Gothic" pitchFamily="34" charset="0"/>
+                <a:ea typeface="Yu Gothic" pitchFamily="34" charset="-122"/>
+                <a:cs typeface="Yu Gothic" pitchFamily="34" charset="-120"/>
+              </a:rPr>
+              <a:t>※ 60周年イベント・番組連動の実施形態は円谷社内の企画枠調整を経て確定。ハード製造原価・アプリ実装費は Rokid 様負担、売上ロイヤリティ設計は別途協議（MG充当方式も可）。</a:t>
+            </a:r>
+            <a:endParaRPr lang="en-US" sz="900" dirty="0"/>
+          </a:p>
+        </p:txBody>
+      </p:sp>
+      <p:sp>
+        <p:nvSpPr>
+          <p:cNvPr id="21" name="Text 17"/>
           <p:cNvSpPr/>
           <p:nvPr/>
         </p:nvSpPr>
@@ -9320,8 +10593,8 @@
         </p:nvSpPr>
         <p:spPr>
           <a:xfrm>
-            <a:off x="2834640" y="274320"/>
-            <a:ext cx="8778240" cy="1828800"/>
+            <a:off x="3291840" y="274320"/>
+            <a:ext cx="8321040" cy="1920240"/>
           </a:xfrm>
           <a:prstGeom prst="rect">
             <a:avLst/>
@@ -9337,7 +10610,7 @@
               <a:buNone/>
             </a:pPr>
             <a:r>
-              <a:rPr lang="en-US" sz="10000" b="1" spc="600" kern="0" dirty="0">
+              <a:rPr lang="en-US" sz="10500" b="1" spc="600" kern="0" dirty="0">
                 <a:solidFill>
                   <a:srgbClr val="181E2B"/>
                 </a:solidFill>
@@ -9345,9 +10618,9 @@
                 <a:ea typeface="Arial Black" pitchFamily="34" charset="-122"/>
                 <a:cs typeface="Arial Black" pitchFamily="34" charset="-120"/>
               </a:rPr>
-              <a:t>Q4 2026</a:t>
-            </a:r>
-            <a:endParaRPr lang="en-US" sz="10000" dirty="0"/>
+              <a:t>IMPACT</a:t>
+            </a:r>
+            <a:endParaRPr lang="en-US" sz="10500" dirty="0"/>
           </a:p>
         </p:txBody>
       </p:sp>
@@ -9411,7 +10684,7 @@
                 <a:ea typeface="Arial" pitchFamily="34" charset="-122"/>
                 <a:cs typeface="Arial" pitchFamily="34" charset="-120"/>
               </a:rPr>
-              <a:t>08 / TIMELINE</a:t>
+              <a:t>08 / IMPACT</a:t>
             </a:r>
             <a:endParaRPr lang="en-US" sz="1050" dirty="0"/>
           </a:p>
@@ -9450,7 +10723,7 @@
                 <a:ea typeface="Yu Gothic" pitchFamily="34" charset="-122"/>
                 <a:cs typeface="Yu Gothic" pitchFamily="34" charset="-120"/>
               </a:rPr>
-              <a:t>年末商戦から、逆算する</a:t>
+              <a:t>期待効果（初年度目安）</a:t>
             </a:r>
             <a:endParaRPr lang="en-US" sz="2800" dirty="0"/>
           </a:p>
@@ -9464,16 +10737,182 @@
         </p:nvSpPr>
         <p:spPr>
           <a:xfrm>
-            <a:off x="1051560" y="3547872"/>
-            <a:ext cx="9966960" cy="0"/>
+            <a:off x="1700784" y="2148840"/>
+            <a:ext cx="603504" cy="603504"/>
+          </a:xfrm>
+          <a:prstGeom prst="ellipse">
+            <a:avLst/>
+          </a:prstGeom>
+          <a:solidFill>
+            <a:srgbClr val="C8102E"/>
+          </a:solidFill>
+          <a:ln/>
+          <a:effectLst>
+            <a:outerShdw sx="100000" sy="100000" kx="0" ky="0" algn="bl" rotWithShape="0" blurRad="152400" dist="50800" dir="16200000">
+              <a:srgbClr val="C8102E">
+                <a:alpha val="50000"/>
+              </a:srgbClr>
+            </a:outerShdw>
+          </a:effectLst>
+        </p:spPr>
+      </p:sp>
+      <p:pic>
+        <p:nvPicPr>
+          <p:cNvPr id="7" name="Image 0" descr="/tmp/claude-0/-home-user-kessho-lens/63555445-5e6f-583b-ab8a-87e352d31a90/scratchpad/icons/FaStore.png">    </p:cNvPr>
+          <p:cNvPicPr>
+            <a:picLocks noChangeAspect="1"/>
+          </p:cNvPicPr>
+          <p:nvPr/>
+        </p:nvPicPr>
+        <p:blipFill>
+          <a:blip r:embed="rId2"/>
+          <a:stretch>
+            <a:fillRect/>
+          </a:stretch>
+        </p:blipFill>
+        <p:spPr>
+          <a:xfrm>
+            <a:off x="1863730" y="2311786"/>
+            <a:ext cx="277612" cy="277612"/>
+          </a:xfrm>
+          <a:prstGeom prst="rect">
+            <a:avLst/>
+          </a:prstGeom>
+        </p:spPr>
+      </p:pic>
+      <p:sp>
+        <p:nvSpPr>
+          <p:cNvPr id="8" name="Text 5"/>
+          <p:cNvSpPr/>
+          <p:nvPr/>
+        </p:nvSpPr>
+        <p:spPr>
+          <a:xfrm>
+            <a:off x="731520" y="2971800"/>
+            <a:ext cx="2542032" cy="731520"/>
+          </a:xfrm>
+          <a:prstGeom prst="rect">
+            <a:avLst/>
+          </a:prstGeom>
+          <a:noFill/>
+          <a:ln/>
+        </p:spPr>
+        <p:txBody>
+          <a:bodyPr wrap="square" lIns="0" tIns="0" rIns="0" bIns="0" rtlCol="0" anchor="ctr"/>
+          <a:lstStyle/>
+          <a:p>
+            <a:pPr algn="ctr" indent="0" marL="0">
+              <a:buNone/>
+            </a:pPr>
+            <a:r>
+              <a:rPr lang="en-US" sz="3800" b="1" dirty="0">
+                <a:solidFill>
+                  <a:srgbClr val="FFFFFF"/>
+                </a:solidFill>
+                <a:latin typeface="Arial" pitchFamily="34" charset="0"/>
+                <a:ea typeface="Arial" pitchFamily="34" charset="-122"/>
+                <a:cs typeface="Arial" pitchFamily="34" charset="-120"/>
+              </a:rPr>
+              <a:t>10万</a:t>
+            </a:r>
+            <a:pPr algn="ctr" indent="0" marL="0">
+              <a:buNone/>
+            </a:pPr>
+            <a:r>
+              <a:rPr lang="en-US" sz="1700" b="1" dirty="0">
+                <a:solidFill>
+                  <a:srgbClr val="E8354F"/>
+                </a:solidFill>
+                <a:latin typeface="Yu Gothic" pitchFamily="34" charset="0"/>
+                <a:ea typeface="Yu Gothic" pitchFamily="34" charset="-122"/>
+                <a:cs typeface="Yu Gothic" pitchFamily="34" charset="-120"/>
+              </a:rPr>
+              <a:t> 人</a:t>
+            </a:r>
+            <a:endParaRPr lang="en-US" sz="3800" dirty="0"/>
+          </a:p>
+        </p:txBody>
+      </p:sp>
+      <p:sp>
+        <p:nvSpPr>
+          <p:cNvPr id="9" name="Text 6"/>
+          <p:cNvSpPr/>
+          <p:nvPr/>
+        </p:nvSpPr>
+        <p:spPr>
+          <a:xfrm>
+            <a:off x="822960" y="3794760"/>
+            <a:ext cx="2359152" cy="777240"/>
+          </a:xfrm>
+          <a:prstGeom prst="rect">
+            <a:avLst/>
+          </a:prstGeom>
+          <a:noFill/>
+          <a:ln/>
+        </p:spPr>
+        <p:txBody>
+          <a:bodyPr wrap="square" lIns="0" tIns="0" rIns="0" bIns="0" rtlCol="0" anchor="t"/>
+          <a:lstStyle/>
+          <a:p>
+            <a:pPr algn="ctr" indent="0" marL="0">
+              <a:lnSpc>
+                <a:spcPts val="1600"/>
+              </a:lnSpc>
+              <a:buNone/>
+            </a:pPr>
+            <a:r>
+              <a:rPr lang="en-US" sz="1150" dirty="0">
+                <a:solidFill>
+                  <a:srgbClr val="AEB6C4"/>
+                </a:solidFill>
+                <a:latin typeface="Yu Gothic" pitchFamily="34" charset="0"/>
+                <a:ea typeface="Yu Gothic" pitchFamily="34" charset="-122"/>
+                <a:cs typeface="Yu Gothic" pitchFamily="34" charset="-120"/>
+              </a:rPr>
+              <a:t>店頭・イベントでの</a:t>
+            </a:r>
+            <a:endParaRPr lang="en-US" sz="1150" dirty="0"/>
+          </a:p>
+          <a:p>
+            <a:pPr algn="ctr" indent="0" marL="0">
+              <a:lnSpc>
+                <a:spcPts val="1600"/>
+              </a:lnSpc>
+              <a:buNone/>
+            </a:pPr>
+            <a:r>
+              <a:rPr lang="en-US" sz="1150" dirty="0">
+                <a:solidFill>
+                  <a:srgbClr val="AEB6C4"/>
+                </a:solidFill>
+                <a:latin typeface="Yu Gothic" pitchFamily="34" charset="0"/>
+                <a:ea typeface="Yu Gothic" pitchFamily="34" charset="-122"/>
+                <a:cs typeface="Yu Gothic" pitchFamily="34" charset="-120"/>
+              </a:rPr>
+              <a:t>装着体験</a:t>
+            </a:r>
+            <a:endParaRPr lang="en-US" sz="1150" dirty="0"/>
+          </a:p>
+        </p:txBody>
+      </p:sp>
+      <p:sp>
+        <p:nvSpPr>
+          <p:cNvPr id="10" name="Shape 7"/>
+          <p:cNvSpPr/>
+          <p:nvPr/>
+        </p:nvSpPr>
+        <p:spPr>
+          <a:xfrm>
+            <a:off x="3364992" y="2148840"/>
+            <a:ext cx="0" cy="2651760"/>
           </a:xfrm>
           <a:prstGeom prst="line">
             <a:avLst/>
           </a:prstGeom>
           <a:noFill/>
-          <a:ln w="19050">
+          <a:ln w="12700">
             <a:solidFill>
-              <a:srgbClr val="3A4257"/>
+              <a:srgbClr val="2A3140"/>
             </a:solidFill>
             <a:prstDash val="solid"/>
           </a:ln>
@@ -9481,14 +10920,14 @@
       </p:sp>
       <p:sp>
         <p:nvSpPr>
-          <p:cNvPr id="7" name="Shape 5"/>
-          <p:cNvSpPr/>
-          <p:nvPr/>
-        </p:nvSpPr>
-        <p:spPr>
-          <a:xfrm>
-            <a:off x="932688" y="3429000"/>
-            <a:ext cx="237744" cy="237744"/>
+          <p:cNvPr id="11" name="Shape 8"/>
+          <p:cNvSpPr/>
+          <p:nvPr/>
+        </p:nvSpPr>
+        <p:spPr>
+          <a:xfrm>
+            <a:off x="4425696" y="2148840"/>
+            <a:ext cx="603504" cy="603504"/>
           </a:xfrm>
           <a:prstGeom prst="ellipse">
             <a:avLst/>
@@ -9500,22 +10939,46 @@
           <a:effectLst>
             <a:outerShdw sx="100000" sy="100000" kx="0" ky="0" algn="bl" rotWithShape="0" blurRad="152400" dist="50800" dir="16200000">
               <a:srgbClr val="C8102E">
-                <a:alpha val="80000"/>
+                <a:alpha val="50000"/>
               </a:srgbClr>
             </a:outerShdw>
           </a:effectLst>
         </p:spPr>
       </p:sp>
-      <p:sp>
-        <p:nvSpPr>
-          <p:cNvPr id="8" name="Text 6"/>
-          <p:cNvSpPr/>
-          <p:nvPr/>
-        </p:nvSpPr>
-        <p:spPr>
-          <a:xfrm>
-            <a:off x="182880" y="2624328"/>
-            <a:ext cx="1737360" cy="320040"/>
+      <p:pic>
+        <p:nvPicPr>
+          <p:cNvPr id="12" name="Image 1" descr="/tmp/claude-0/-home-user-kessho-lens/63555445-5e6f-583b-ab8a-87e352d31a90/scratchpad/icons/FaHashtag.png">    </p:cNvPr>
+          <p:cNvPicPr>
+            <a:picLocks noChangeAspect="1"/>
+          </p:cNvPicPr>
+          <p:nvPr/>
+        </p:nvPicPr>
+        <p:blipFill>
+          <a:blip r:embed="rId3"/>
+          <a:stretch>
+            <a:fillRect/>
+          </a:stretch>
+        </p:blipFill>
+        <p:spPr>
+          <a:xfrm>
+            <a:off x="4588642" y="2311786"/>
+            <a:ext cx="277612" cy="277612"/>
+          </a:xfrm>
+          <a:prstGeom prst="rect">
+            <a:avLst/>
+          </a:prstGeom>
+        </p:spPr>
+      </p:pic>
+      <p:sp>
+        <p:nvSpPr>
+          <p:cNvPr id="13" name="Text 9"/>
+          <p:cNvSpPr/>
+          <p:nvPr/>
+        </p:nvSpPr>
+        <p:spPr>
+          <a:xfrm>
+            <a:off x="3456432" y="2971800"/>
+            <a:ext cx="2542032" cy="731520"/>
           </a:xfrm>
           <a:prstGeom prst="rect">
             <a:avLst/>
@@ -9531,69 +10994,44 @@
               <a:buNone/>
             </a:pPr>
             <a:r>
-              <a:rPr lang="en-US" sz="1250" b="1" dirty="0">
-                <a:solidFill>
-                  <a:srgbClr val="E8354F"/>
+              <a:rPr lang="en-US" sz="3800" b="1" dirty="0">
+                <a:solidFill>
+                  <a:srgbClr val="FFFFFF"/>
                 </a:solidFill>
                 <a:latin typeface="Arial" pitchFamily="34" charset="0"/>
                 <a:ea typeface="Arial" pitchFamily="34" charset="-122"/>
                 <a:cs typeface="Arial" pitchFamily="34" charset="-120"/>
               </a:rPr>
-              <a:t>2026.8</a:t>
-            </a:r>
-            <a:endParaRPr lang="en-US" sz="1250" dirty="0"/>
-          </a:p>
-        </p:txBody>
-      </p:sp>
-      <p:sp>
-        <p:nvSpPr>
-          <p:cNvPr id="9" name="Text 7"/>
-          <p:cNvSpPr/>
-          <p:nvPr/>
-        </p:nvSpPr>
-        <p:spPr>
-          <a:xfrm>
-            <a:off x="182880" y="2944368"/>
-            <a:ext cx="1737360" cy="320040"/>
-          </a:xfrm>
-          <a:prstGeom prst="rect">
-            <a:avLst/>
-          </a:prstGeom>
-          <a:noFill/>
-          <a:ln/>
-        </p:spPr>
-        <p:txBody>
-          <a:bodyPr wrap="square" lIns="0" tIns="0" rIns="0" bIns="0" rtlCol="0" anchor="ctr"/>
-          <a:lstStyle/>
-          <a:p>
+              <a:t>1万</a:t>
+            </a:r>
             <a:pPr algn="ctr" indent="0" marL="0">
               <a:buNone/>
             </a:pPr>
             <a:r>
-              <a:rPr lang="en-US" sz="1350" b="1" dirty="0">
-                <a:solidFill>
-                  <a:srgbClr val="FFFFFF"/>
-                </a:solidFill>
-                <a:latin typeface="Yu Gothic" pitchFamily="34" charset="0"/>
-                <a:ea typeface="Yu Gothic" pitchFamily="34" charset="-122"/>
-                <a:cs typeface="Yu Gothic" pitchFamily="34" charset="-120"/>
-              </a:rPr>
-              <a:t>基本合意</a:t>
-            </a:r>
-            <a:endParaRPr lang="en-US" sz="1350" dirty="0"/>
-          </a:p>
-        </p:txBody>
-      </p:sp>
-      <p:sp>
-        <p:nvSpPr>
-          <p:cNvPr id="10" name="Text 8"/>
-          <p:cNvSpPr/>
-          <p:nvPr/>
-        </p:nvSpPr>
-        <p:spPr>
-          <a:xfrm>
-            <a:off x="137160" y="3867912"/>
-            <a:ext cx="1828800" cy="731520"/>
+              <a:rPr lang="en-US" sz="1700" b="1" dirty="0">
+                <a:solidFill>
+                  <a:srgbClr val="E8354F"/>
+                </a:solidFill>
+                <a:latin typeface="Yu Gothic" pitchFamily="34" charset="0"/>
+                <a:ea typeface="Yu Gothic" pitchFamily="34" charset="-122"/>
+                <a:cs typeface="Yu Gothic" pitchFamily="34" charset="-120"/>
+              </a:rPr>
+              <a:t> 件</a:t>
+            </a:r>
+            <a:endParaRPr lang="en-US" sz="3800" dirty="0"/>
+          </a:p>
+        </p:txBody>
+      </p:sp>
+      <p:sp>
+        <p:nvSpPr>
+          <p:cNvPr id="14" name="Text 10"/>
+          <p:cNvSpPr/>
+          <p:nvPr/>
+        </p:nvSpPr>
+        <p:spPr>
+          <a:xfrm>
+            <a:off x="3547872" y="3794760"/>
+            <a:ext cx="2359152" cy="777240"/>
           </a:xfrm>
           <a:prstGeom prst="rect">
             <a:avLst/>
@@ -9607,12 +11045,12 @@
           <a:p>
             <a:pPr algn="ctr" indent="0" marL="0">
               <a:lnSpc>
-                <a:spcPts val="1400"/>
+                <a:spcPts val="1600"/>
               </a:lnSpc>
               <a:buNone/>
             </a:pPr>
             <a:r>
-              <a:rPr lang="en-US" sz="1000" dirty="0">
+              <a:rPr lang="en-US" sz="1150" dirty="0">
                 <a:solidFill>
                   <a:srgbClr val="AEB6C4"/>
                 </a:solidFill>
@@ -9620,22 +11058,65 @@
                 <a:ea typeface="Yu Gothic" pitchFamily="34" charset="-122"/>
                 <a:cs typeface="Yu Gothic" pitchFamily="34" charset="-120"/>
               </a:rPr>
-              <a:t>企画確定</a:t>
-            </a:r>
-            <a:endParaRPr lang="en-US" sz="1000" dirty="0"/>
-          </a:p>
-        </p:txBody>
-      </p:sp>
-      <p:sp>
-        <p:nvSpPr>
-          <p:cNvPr id="11" name="Shape 9"/>
-          <p:cNvSpPr/>
-          <p:nvPr/>
-        </p:nvSpPr>
-        <p:spPr>
-          <a:xfrm>
-            <a:off x="2926080" y="3429000"/>
-            <a:ext cx="237744" cy="237744"/>
+              <a:t>光線撮影UGC</a:t>
+            </a:r>
+            <a:endParaRPr lang="en-US" sz="1150" dirty="0"/>
+          </a:p>
+          <a:p>
+            <a:pPr algn="ctr" indent="0" marL="0">
+              <a:lnSpc>
+                <a:spcPts val="1600"/>
+              </a:lnSpc>
+              <a:buNone/>
+            </a:pPr>
+            <a:r>
+              <a:rPr lang="en-US" sz="1150" dirty="0">
+                <a:solidFill>
+                  <a:srgbClr val="AEB6C4"/>
+                </a:solidFill>
+                <a:latin typeface="Yu Gothic" pitchFamily="34" charset="0"/>
+                <a:ea typeface="Yu Gothic" pitchFamily="34" charset="-122"/>
+                <a:cs typeface="Yu Gothic" pitchFamily="34" charset="-120"/>
+              </a:rPr>
+              <a:t>（SNS投稿）</a:t>
+            </a:r>
+            <a:endParaRPr lang="en-US" sz="1150" dirty="0"/>
+          </a:p>
+        </p:txBody>
+      </p:sp>
+      <p:sp>
+        <p:nvSpPr>
+          <p:cNvPr id="15" name="Shape 11"/>
+          <p:cNvSpPr/>
+          <p:nvPr/>
+        </p:nvSpPr>
+        <p:spPr>
+          <a:xfrm>
+            <a:off x="6089904" y="2148840"/>
+            <a:ext cx="0" cy="2651760"/>
+          </a:xfrm>
+          <a:prstGeom prst="line">
+            <a:avLst/>
+          </a:prstGeom>
+          <a:noFill/>
+          <a:ln w="12700">
+            <a:solidFill>
+              <a:srgbClr val="2A3140"/>
+            </a:solidFill>
+            <a:prstDash val="solid"/>
+          </a:ln>
+        </p:spPr>
+      </p:sp>
+      <p:sp>
+        <p:nvSpPr>
+          <p:cNvPr id="16" name="Shape 12"/>
+          <p:cNvSpPr/>
+          <p:nvPr/>
+        </p:nvSpPr>
+        <p:spPr>
+          <a:xfrm>
+            <a:off x="7150608" y="2148840"/>
+            <a:ext cx="603504" cy="603504"/>
           </a:xfrm>
           <a:prstGeom prst="ellipse">
             <a:avLst/>
@@ -9647,22 +11128,46 @@
           <a:effectLst>
             <a:outerShdw sx="100000" sy="100000" kx="0" ky="0" algn="bl" rotWithShape="0" blurRad="152400" dist="50800" dir="16200000">
               <a:srgbClr val="C8102E">
-                <a:alpha val="80000"/>
+                <a:alpha val="50000"/>
               </a:srgbClr>
             </a:outerShdw>
           </a:effectLst>
         </p:spPr>
       </p:sp>
-      <p:sp>
-        <p:nvSpPr>
-          <p:cNvPr id="12" name="Text 10"/>
-          <p:cNvSpPr/>
-          <p:nvPr/>
-        </p:nvSpPr>
-        <p:spPr>
-          <a:xfrm>
-            <a:off x="2176272" y="2624328"/>
-            <a:ext cx="1737360" cy="320040"/>
+      <p:pic>
+        <p:nvPicPr>
+          <p:cNvPr id="17" name="Image 2" descr="/tmp/claude-0/-home-user-kessho-lens/63555445-5e6f-583b-ab8a-87e352d31a90/scratchpad/icons/FaYenSign.png">    </p:cNvPr>
+          <p:cNvPicPr>
+            <a:picLocks noChangeAspect="1"/>
+          </p:cNvPicPr>
+          <p:nvPr/>
+        </p:nvPicPr>
+        <p:blipFill>
+          <a:blip r:embed="rId4"/>
+          <a:stretch>
+            <a:fillRect/>
+          </a:stretch>
+        </p:blipFill>
+        <p:spPr>
+          <a:xfrm>
+            <a:off x="7313554" y="2311786"/>
+            <a:ext cx="277612" cy="277612"/>
+          </a:xfrm>
+          <a:prstGeom prst="rect">
+            <a:avLst/>
+          </a:prstGeom>
+        </p:spPr>
+      </p:pic>
+      <p:sp>
+        <p:nvSpPr>
+          <p:cNvPr id="18" name="Text 13"/>
+          <p:cNvSpPr/>
+          <p:nvPr/>
+        </p:nvSpPr>
+        <p:spPr>
+          <a:xfrm>
+            <a:off x="6181344" y="2971800"/>
+            <a:ext cx="2542032" cy="731520"/>
           </a:xfrm>
           <a:prstGeom prst="rect">
             <a:avLst/>
@@ -9678,69 +11183,44 @@
               <a:buNone/>
             </a:pPr>
             <a:r>
-              <a:rPr lang="en-US" sz="1250" b="1" dirty="0">
-                <a:solidFill>
-                  <a:srgbClr val="E8354F"/>
+              <a:rPr lang="en-US" sz="3800" b="1" dirty="0">
+                <a:solidFill>
+                  <a:srgbClr val="FFFFFF"/>
                 </a:solidFill>
                 <a:latin typeface="Arial" pitchFamily="34" charset="0"/>
                 <a:ea typeface="Arial" pitchFamily="34" charset="-122"/>
                 <a:cs typeface="Arial" pitchFamily="34" charset="-120"/>
               </a:rPr>
-              <a:t>2026.9</a:t>
-            </a:r>
-            <a:endParaRPr lang="en-US" sz="1250" dirty="0"/>
-          </a:p>
-        </p:txBody>
-      </p:sp>
-      <p:sp>
-        <p:nvSpPr>
-          <p:cNvPr id="13" name="Text 11"/>
-          <p:cNvSpPr/>
-          <p:nvPr/>
-        </p:nvSpPr>
-        <p:spPr>
-          <a:xfrm>
-            <a:off x="2176272" y="2944368"/>
-            <a:ext cx="1737360" cy="320040"/>
-          </a:xfrm>
-          <a:prstGeom prst="rect">
-            <a:avLst/>
-          </a:prstGeom>
-          <a:noFill/>
-          <a:ln/>
-        </p:spPr>
-        <p:txBody>
-          <a:bodyPr wrap="square" lIns="0" tIns="0" rIns="0" bIns="0" rtlCol="0" anchor="ctr"/>
-          <a:lstStyle/>
-          <a:p>
+              <a:t>3.3億</a:t>
+            </a:r>
             <a:pPr algn="ctr" indent="0" marL="0">
               <a:buNone/>
             </a:pPr>
             <a:r>
-              <a:rPr lang="en-US" sz="1350" b="1" dirty="0">
-                <a:solidFill>
-                  <a:srgbClr val="FFFFFF"/>
-                </a:solidFill>
-                <a:latin typeface="Yu Gothic" pitchFamily="34" charset="0"/>
-                <a:ea typeface="Yu Gothic" pitchFamily="34" charset="-122"/>
-                <a:cs typeface="Yu Gothic" pitchFamily="34" charset="-120"/>
-              </a:rPr>
-              <a:t>契約締結</a:t>
-            </a:r>
-            <a:endParaRPr lang="en-US" sz="1350" dirty="0"/>
-          </a:p>
-        </p:txBody>
-      </p:sp>
-      <p:sp>
-        <p:nvSpPr>
-          <p:cNvPr id="14" name="Text 12"/>
-          <p:cNvSpPr/>
-          <p:nvPr/>
-        </p:nvSpPr>
-        <p:spPr>
-          <a:xfrm>
-            <a:off x="2130552" y="3867912"/>
-            <a:ext cx="1828800" cy="731520"/>
+              <a:rPr lang="en-US" sz="1700" b="1" dirty="0">
+                <a:solidFill>
+                  <a:srgbClr val="E8354F"/>
+                </a:solidFill>
+                <a:latin typeface="Yu Gothic" pitchFamily="34" charset="0"/>
+                <a:ea typeface="Yu Gothic" pitchFamily="34" charset="-122"/>
+                <a:cs typeface="Yu Gothic" pitchFamily="34" charset="-120"/>
+              </a:rPr>
+              <a:t> 円</a:t>
+            </a:r>
+            <a:endParaRPr lang="en-US" sz="3800" dirty="0"/>
+          </a:p>
+        </p:txBody>
+      </p:sp>
+      <p:sp>
+        <p:nvSpPr>
+          <p:cNvPr id="19" name="Text 14"/>
+          <p:cNvSpPr/>
+          <p:nvPr/>
+        </p:nvSpPr>
+        <p:spPr>
+          <a:xfrm>
+            <a:off x="6272784" y="3794760"/>
+            <a:ext cx="2359152" cy="777240"/>
           </a:xfrm>
           <a:prstGeom prst="rect">
             <a:avLst/>
@@ -9754,12 +11234,12 @@
           <a:p>
             <a:pPr algn="ctr" indent="0" marL="0">
               <a:lnSpc>
-                <a:spcPts val="1400"/>
+                <a:spcPts val="1600"/>
               </a:lnSpc>
               <a:buNone/>
             </a:pPr>
             <a:r>
-              <a:rPr lang="en-US" sz="1000" dirty="0">
+              <a:rPr lang="en-US" sz="1150" dirty="0">
                 <a:solidFill>
                   <a:srgbClr val="AEB6C4"/>
                 </a:solidFill>
@@ -9767,22 +11247,65 @@
                 <a:ea typeface="Yu Gothic" pitchFamily="34" charset="-122"/>
                 <a:cs typeface="Yu Gothic" pitchFamily="34" charset="-120"/>
               </a:rPr>
-              <a:t>監修開始</a:t>
-            </a:r>
-            <a:endParaRPr lang="en-US" sz="1000" dirty="0"/>
-          </a:p>
-        </p:txBody>
-      </p:sp>
-      <p:sp>
-        <p:nvSpPr>
-          <p:cNvPr id="15" name="Shape 13"/>
-          <p:cNvSpPr/>
-          <p:nvPr/>
-        </p:nvSpPr>
-        <p:spPr>
-          <a:xfrm>
-            <a:off x="4919472" y="3429000"/>
-            <a:ext cx="237744" cy="237744"/>
+              <a:t>限定モデル小売規模</a:t>
+            </a:r>
+            <a:endParaRPr lang="en-US" sz="1150" dirty="0"/>
+          </a:p>
+          <a:p>
+            <a:pPr algn="ctr" indent="0" marL="0">
+              <a:lnSpc>
+                <a:spcPts val="1600"/>
+              </a:lnSpc>
+              <a:buNone/>
+            </a:pPr>
+            <a:r>
+              <a:rPr lang="en-US" sz="1150" dirty="0">
+                <a:solidFill>
+                  <a:srgbClr val="AEB6C4"/>
+                </a:solidFill>
+                <a:latin typeface="Yu Gothic" pitchFamily="34" charset="0"/>
+                <a:ea typeface="Yu Gothic" pitchFamily="34" charset="-122"/>
+                <a:cs typeface="Yu Gothic" pitchFamily="34" charset="-120"/>
+              </a:rPr>
+              <a:t>（3,000台完売時）</a:t>
+            </a:r>
+            <a:endParaRPr lang="en-US" sz="1150" dirty="0"/>
+          </a:p>
+        </p:txBody>
+      </p:sp>
+      <p:sp>
+        <p:nvSpPr>
+          <p:cNvPr id="20" name="Shape 15"/>
+          <p:cNvSpPr/>
+          <p:nvPr/>
+        </p:nvSpPr>
+        <p:spPr>
+          <a:xfrm>
+            <a:off x="8814816" y="2148840"/>
+            <a:ext cx="0" cy="2651760"/>
+          </a:xfrm>
+          <a:prstGeom prst="line">
+            <a:avLst/>
+          </a:prstGeom>
+          <a:noFill/>
+          <a:ln w="12700">
+            <a:solidFill>
+              <a:srgbClr val="2A3140"/>
+            </a:solidFill>
+            <a:prstDash val="solid"/>
+          </a:ln>
+        </p:spPr>
+      </p:sp>
+      <p:sp>
+        <p:nvSpPr>
+          <p:cNvPr id="21" name="Shape 16"/>
+          <p:cNvSpPr/>
+          <p:nvPr/>
+        </p:nvSpPr>
+        <p:spPr>
+          <a:xfrm>
+            <a:off x="9875520" y="2148840"/>
+            <a:ext cx="603504" cy="603504"/>
           </a:xfrm>
           <a:prstGeom prst="ellipse">
             <a:avLst/>
@@ -9794,22 +11317,46 @@
           <a:effectLst>
             <a:outerShdw sx="100000" sy="100000" kx="0" ky="0" algn="bl" rotWithShape="0" blurRad="152400" dist="50800" dir="16200000">
               <a:srgbClr val="C8102E">
-                <a:alpha val="80000"/>
+                <a:alpha val="50000"/>
               </a:srgbClr>
             </a:outerShdw>
           </a:effectLst>
         </p:spPr>
       </p:sp>
-      <p:sp>
-        <p:nvSpPr>
-          <p:cNvPr id="16" name="Text 14"/>
-          <p:cNvSpPr/>
-          <p:nvPr/>
-        </p:nvSpPr>
-        <p:spPr>
-          <a:xfrm>
-            <a:off x="4169664" y="2624328"/>
-            <a:ext cx="1737360" cy="320040"/>
+      <p:pic>
+        <p:nvPicPr>
+          <p:cNvPr id="22" name="Image 3" descr="/tmp/claude-0/-home-user-kessho-lens/63555445-5e6f-583b-ab8a-87e352d31a90/scratchpad/icons/FaBullhorn.png">    </p:cNvPr>
+          <p:cNvPicPr>
+            <a:picLocks noChangeAspect="1"/>
+          </p:cNvPicPr>
+          <p:nvPr/>
+        </p:nvPicPr>
+        <p:blipFill>
+          <a:blip r:embed="rId5"/>
+          <a:stretch>
+            <a:fillRect/>
+          </a:stretch>
+        </p:blipFill>
+        <p:spPr>
+          <a:xfrm>
+            <a:off x="10038466" y="2311786"/>
+            <a:ext cx="277612" cy="277612"/>
+          </a:xfrm>
+          <a:prstGeom prst="rect">
+            <a:avLst/>
+          </a:prstGeom>
+        </p:spPr>
+      </p:pic>
+      <p:sp>
+        <p:nvSpPr>
+          <p:cNvPr id="23" name="Text 17"/>
+          <p:cNvSpPr/>
+          <p:nvPr/>
+        </p:nvSpPr>
+        <p:spPr>
+          <a:xfrm>
+            <a:off x="8906256" y="2971800"/>
+            <a:ext cx="2542032" cy="731520"/>
           </a:xfrm>
           <a:prstGeom prst="rect">
             <a:avLst/>
@@ -9825,69 +11372,44 @@
               <a:buNone/>
             </a:pPr>
             <a:r>
-              <a:rPr lang="en-US" sz="1250" b="1" dirty="0">
-                <a:solidFill>
-                  <a:srgbClr val="E8354F"/>
+              <a:rPr lang="en-US" sz="3800" b="1" dirty="0">
+                <a:solidFill>
+                  <a:srgbClr val="FFFFFF"/>
                 </a:solidFill>
                 <a:latin typeface="Arial" pitchFamily="34" charset="0"/>
                 <a:ea typeface="Arial" pitchFamily="34" charset="-122"/>
                 <a:cs typeface="Arial" pitchFamily="34" charset="-120"/>
               </a:rPr>
-              <a:t>2026.10</a:t>
-            </a:r>
-            <a:endParaRPr lang="en-US" sz="1250" dirty="0"/>
-          </a:p>
-        </p:txBody>
-      </p:sp>
-      <p:sp>
-        <p:nvSpPr>
-          <p:cNvPr id="17" name="Text 15"/>
-          <p:cNvSpPr/>
-          <p:nvPr/>
-        </p:nvSpPr>
-        <p:spPr>
-          <a:xfrm>
-            <a:off x="4169664" y="2944368"/>
-            <a:ext cx="1737360" cy="320040"/>
-          </a:xfrm>
-          <a:prstGeom prst="rect">
-            <a:avLst/>
-          </a:prstGeom>
-          <a:noFill/>
-          <a:ln/>
-        </p:spPr>
-        <p:txBody>
-          <a:bodyPr wrap="square" lIns="0" tIns="0" rIns="0" bIns="0" rtlCol="0" anchor="ctr"/>
-          <a:lstStyle/>
-          <a:p>
+              <a:t>5億</a:t>
+            </a:r>
             <a:pPr algn="ctr" indent="0" marL="0">
               <a:buNone/>
             </a:pPr>
             <a:r>
-              <a:rPr lang="en-US" sz="1350" b="1" dirty="0">
-                <a:solidFill>
-                  <a:srgbClr val="FFFFFF"/>
-                </a:solidFill>
-                <a:latin typeface="Yu Gothic" pitchFamily="34" charset="0"/>
-                <a:ea typeface="Yu Gothic" pitchFamily="34" charset="-122"/>
-                <a:cs typeface="Yu Gothic" pitchFamily="34" charset="-120"/>
-              </a:rPr>
-              <a:t>開発・製造</a:t>
-            </a:r>
-            <a:endParaRPr lang="en-US" sz="1350" dirty="0"/>
-          </a:p>
-        </p:txBody>
-      </p:sp>
-      <p:sp>
-        <p:nvSpPr>
-          <p:cNvPr id="18" name="Text 16"/>
-          <p:cNvSpPr/>
-          <p:nvPr/>
-        </p:nvSpPr>
-        <p:spPr>
-          <a:xfrm>
-            <a:off x="4123944" y="3867912"/>
-            <a:ext cx="1828800" cy="731520"/>
+              <a:rPr lang="en-US" sz="1700" b="1" dirty="0">
+                <a:solidFill>
+                  <a:srgbClr val="E8354F"/>
+                </a:solidFill>
+                <a:latin typeface="Yu Gothic" pitchFamily="34" charset="0"/>
+                <a:ea typeface="Yu Gothic" pitchFamily="34" charset="-122"/>
+                <a:cs typeface="Yu Gothic" pitchFamily="34" charset="-120"/>
+              </a:rPr>
+              <a:t> 円+</a:t>
+            </a:r>
+            <a:endParaRPr lang="en-US" sz="3800" dirty="0"/>
+          </a:p>
+        </p:txBody>
+      </p:sp>
+      <p:sp>
+        <p:nvSpPr>
+          <p:cNvPr id="24" name="Text 18"/>
+          <p:cNvSpPr/>
+          <p:nvPr/>
+        </p:nvSpPr>
+        <p:spPr>
+          <a:xfrm>
+            <a:off x="8997696" y="3794760"/>
+            <a:ext cx="2359152" cy="777240"/>
           </a:xfrm>
           <a:prstGeom prst="rect">
             <a:avLst/>
@@ -9901,12 +11423,12 @@
           <a:p>
             <a:pPr algn="ctr" indent="0" marL="0">
               <a:lnSpc>
-                <a:spcPts val="1400"/>
+                <a:spcPts val="1600"/>
               </a:lnSpc>
               <a:buNone/>
             </a:pPr>
             <a:r>
-              <a:rPr lang="en-US" sz="1000" dirty="0">
+              <a:rPr lang="en-US" sz="1150" dirty="0">
                 <a:solidFill>
                   <a:srgbClr val="AEB6C4"/>
                 </a:solidFill>
@@ -9914,19 +11436,19 @@
                 <a:ea typeface="Yu Gothic" pitchFamily="34" charset="-122"/>
                 <a:cs typeface="Yu Gothic" pitchFamily="34" charset="-120"/>
               </a:rPr>
-              <a:t>ULTRAMAN MODE /</a:t>
-            </a:r>
-            <a:endParaRPr lang="en-US" sz="1000" dirty="0"/>
+              <a:t>メディア露出換算</a:t>
+            </a:r>
+            <a:endParaRPr lang="en-US" sz="1150" dirty="0"/>
           </a:p>
           <a:p>
             <a:pPr algn="ctr" indent="0" marL="0">
               <a:lnSpc>
-                <a:spcPts val="1400"/>
+                <a:spcPts val="1600"/>
               </a:lnSpc>
               <a:buNone/>
             </a:pPr>
             <a:r>
-              <a:rPr lang="en-US" sz="1000" dirty="0">
+              <a:rPr lang="en-US" sz="1150" dirty="0">
                 <a:solidFill>
                   <a:srgbClr val="AEB6C4"/>
                 </a:solidFill>
@@ -9934,537 +11456,30 @@
                 <a:ea typeface="Yu Gothic" pitchFamily="34" charset="-122"/>
                 <a:cs typeface="Yu Gothic" pitchFamily="34" charset="-120"/>
               </a:rPr>
-              <a:t>限定モデル着手</a:t>
-            </a:r>
-            <a:endParaRPr lang="en-US" sz="1000" dirty="0"/>
-          </a:p>
-        </p:txBody>
-      </p:sp>
-      <p:sp>
-        <p:nvSpPr>
-          <p:cNvPr id="19" name="Shape 17"/>
-          <p:cNvSpPr/>
-          <p:nvPr/>
-        </p:nvSpPr>
-        <p:spPr>
-          <a:xfrm>
-            <a:off x="6912864" y="3429000"/>
-            <a:ext cx="237744" cy="237744"/>
-          </a:xfrm>
-          <a:prstGeom prst="ellipse">
-            <a:avLst/>
-          </a:prstGeom>
-          <a:solidFill>
-            <a:srgbClr val="C8102E"/>
-          </a:solidFill>
-          <a:ln/>
-          <a:effectLst>
-            <a:outerShdw sx="100000" sy="100000" kx="0" ky="0" algn="bl" rotWithShape="0" blurRad="152400" dist="50800" dir="16200000">
-              <a:srgbClr val="C8102E">
-                <a:alpha val="80000"/>
-              </a:srgbClr>
-            </a:outerShdw>
-          </a:effectLst>
-        </p:spPr>
-      </p:sp>
-      <p:sp>
-        <p:nvSpPr>
-          <p:cNvPr id="20" name="Text 18"/>
-          <p:cNvSpPr/>
-          <p:nvPr/>
-        </p:nvSpPr>
-        <p:spPr>
-          <a:xfrm>
-            <a:off x="6163056" y="2624328"/>
-            <a:ext cx="1737360" cy="320040"/>
-          </a:xfrm>
-          <a:prstGeom prst="rect">
-            <a:avLst/>
-          </a:prstGeom>
-          <a:noFill/>
-          <a:ln/>
-        </p:spPr>
-        <p:txBody>
-          <a:bodyPr wrap="square" lIns="0" tIns="0" rIns="0" bIns="0" rtlCol="0" anchor="ctr"/>
-          <a:lstStyle/>
-          <a:p>
-            <a:pPr algn="ctr" indent="0" marL="0">
-              <a:buNone/>
-            </a:pPr>
-            <a:r>
-              <a:rPr lang="en-US" sz="1250" b="1" dirty="0">
-                <a:solidFill>
-                  <a:srgbClr val="E8354F"/>
-                </a:solidFill>
-                <a:latin typeface="Arial" pitchFamily="34" charset="0"/>
-                <a:ea typeface="Arial" pitchFamily="34" charset="-122"/>
-                <a:cs typeface="Arial" pitchFamily="34" charset="-120"/>
-              </a:rPr>
-              <a:t>2026.11</a:t>
-            </a:r>
-            <a:endParaRPr lang="en-US" sz="1250" dirty="0"/>
-          </a:p>
-        </p:txBody>
-      </p:sp>
-      <p:sp>
-        <p:nvSpPr>
-          <p:cNvPr id="21" name="Text 19"/>
-          <p:cNvSpPr/>
-          <p:nvPr/>
-        </p:nvSpPr>
-        <p:spPr>
-          <a:xfrm>
-            <a:off x="6163056" y="2944368"/>
-            <a:ext cx="1737360" cy="320040"/>
-          </a:xfrm>
-          <a:prstGeom prst="rect">
-            <a:avLst/>
-          </a:prstGeom>
-          <a:noFill/>
-          <a:ln/>
-        </p:spPr>
-        <p:txBody>
-          <a:bodyPr wrap="square" lIns="0" tIns="0" rIns="0" bIns="0" rtlCol="0" anchor="ctr"/>
-          <a:lstStyle/>
-          <a:p>
-            <a:pPr algn="ctr" indent="0" marL="0">
-              <a:buNone/>
-            </a:pPr>
-            <a:r>
-              <a:rPr lang="en-US" sz="1350" b="1" dirty="0">
-                <a:solidFill>
-                  <a:srgbClr val="FFFFFF"/>
-                </a:solidFill>
-                <a:latin typeface="Yu Gothic" pitchFamily="34" charset="0"/>
-                <a:ea typeface="Yu Gothic" pitchFamily="34" charset="-122"/>
-                <a:cs typeface="Yu Gothic" pitchFamily="34" charset="-120"/>
-              </a:rPr>
-              <a:t>発表</a:t>
-            </a:r>
-            <a:endParaRPr lang="en-US" sz="1350" dirty="0"/>
-          </a:p>
-        </p:txBody>
-      </p:sp>
-      <p:sp>
-        <p:nvSpPr>
-          <p:cNvPr id="22" name="Text 20"/>
-          <p:cNvSpPr/>
-          <p:nvPr/>
-        </p:nvSpPr>
-        <p:spPr>
-          <a:xfrm>
-            <a:off x="6117336" y="3867912"/>
-            <a:ext cx="1828800" cy="731520"/>
-          </a:xfrm>
-          <a:prstGeom prst="rect">
-            <a:avLst/>
-          </a:prstGeom>
-          <a:noFill/>
-          <a:ln/>
-        </p:spPr>
-        <p:txBody>
-          <a:bodyPr wrap="square" lIns="0" tIns="0" rIns="0" bIns="0" rtlCol="0" anchor="t"/>
-          <a:lstStyle/>
-          <a:p>
-            <a:pPr algn="ctr" indent="0" marL="0">
-              <a:lnSpc>
-                <a:spcPts val="1400"/>
-              </a:lnSpc>
-              <a:buNone/>
-            </a:pPr>
-            <a:r>
-              <a:rPr lang="en-US" sz="1000" dirty="0">
-                <a:solidFill>
-                  <a:srgbClr val="AEB6C4"/>
-                </a:solidFill>
-                <a:latin typeface="Yu Gothic" pitchFamily="34" charset="0"/>
-                <a:ea typeface="Yu Gothic" pitchFamily="34" charset="-122"/>
-                <a:cs typeface="Yu Gothic" pitchFamily="34" charset="-120"/>
-              </a:rPr>
-              <a:t>年末商戦 ×</a:t>
-            </a:r>
-            <a:endParaRPr lang="en-US" sz="1000" dirty="0"/>
-          </a:p>
-          <a:p>
-            <a:pPr algn="ctr" indent="0" marL="0">
-              <a:lnSpc>
-                <a:spcPts val="1400"/>
-              </a:lnSpc>
-              <a:buNone/>
-            </a:pPr>
-            <a:r>
-              <a:rPr lang="en-US" sz="1000" dirty="0">
-                <a:solidFill>
-                  <a:srgbClr val="AEB6C4"/>
-                </a:solidFill>
-                <a:latin typeface="Yu Gothic" pitchFamily="34" charset="0"/>
-                <a:ea typeface="Yu Gothic" pitchFamily="34" charset="-122"/>
-                <a:cs typeface="Yu Gothic" pitchFamily="34" charset="-120"/>
-              </a:rPr>
-              <a:t>60周年の頂点で</a:t>
-            </a:r>
-            <a:endParaRPr lang="en-US" sz="1000" dirty="0"/>
-          </a:p>
-        </p:txBody>
-      </p:sp>
-      <p:sp>
-        <p:nvSpPr>
-          <p:cNvPr id="23" name="Shape 21"/>
-          <p:cNvSpPr/>
-          <p:nvPr/>
-        </p:nvSpPr>
-        <p:spPr>
-          <a:xfrm>
-            <a:off x="8906256" y="3429000"/>
-            <a:ext cx="237744" cy="237744"/>
-          </a:xfrm>
-          <a:prstGeom prst="ellipse">
-            <a:avLst/>
-          </a:prstGeom>
-          <a:solidFill>
-            <a:srgbClr val="C8102E"/>
-          </a:solidFill>
-          <a:ln/>
-          <a:effectLst>
-            <a:outerShdw sx="100000" sy="100000" kx="0" ky="0" algn="bl" rotWithShape="0" blurRad="152400" dist="50800" dir="16200000">
-              <a:srgbClr val="C8102E">
-                <a:alpha val="80000"/>
-              </a:srgbClr>
-            </a:outerShdw>
-          </a:effectLst>
-        </p:spPr>
-      </p:sp>
-      <p:sp>
-        <p:nvSpPr>
-          <p:cNvPr id="24" name="Text 22"/>
-          <p:cNvSpPr/>
-          <p:nvPr/>
-        </p:nvSpPr>
-        <p:spPr>
-          <a:xfrm>
-            <a:off x="8156448" y="2624328"/>
-            <a:ext cx="1737360" cy="320040"/>
-          </a:xfrm>
-          <a:prstGeom prst="rect">
-            <a:avLst/>
-          </a:prstGeom>
-          <a:noFill/>
-          <a:ln/>
-        </p:spPr>
-        <p:txBody>
-          <a:bodyPr wrap="square" lIns="0" tIns="0" rIns="0" bIns="0" rtlCol="0" anchor="ctr"/>
-          <a:lstStyle/>
-          <a:p>
-            <a:pPr algn="ctr" indent="0" marL="0">
-              <a:buNone/>
-            </a:pPr>
-            <a:r>
-              <a:rPr lang="en-US" sz="1250" b="1" dirty="0">
-                <a:solidFill>
-                  <a:srgbClr val="E8354F"/>
-                </a:solidFill>
-                <a:latin typeface="Arial" pitchFamily="34" charset="0"/>
-                <a:ea typeface="Arial" pitchFamily="34" charset="-122"/>
-                <a:cs typeface="Arial" pitchFamily="34" charset="-120"/>
-              </a:rPr>
-              <a:t>2026.12</a:t>
-            </a:r>
-            <a:endParaRPr lang="en-US" sz="1250" dirty="0"/>
-          </a:p>
-        </p:txBody>
-      </p:sp>
-      <p:sp>
-        <p:nvSpPr>
-          <p:cNvPr id="25" name="Text 23"/>
-          <p:cNvSpPr/>
-          <p:nvPr/>
-        </p:nvSpPr>
-        <p:spPr>
-          <a:xfrm>
-            <a:off x="8156448" y="2944368"/>
-            <a:ext cx="1737360" cy="320040"/>
-          </a:xfrm>
-          <a:prstGeom prst="rect">
-            <a:avLst/>
-          </a:prstGeom>
-          <a:noFill/>
-          <a:ln/>
-        </p:spPr>
-        <p:txBody>
-          <a:bodyPr wrap="square" lIns="0" tIns="0" rIns="0" bIns="0" rtlCol="0" anchor="ctr"/>
-          <a:lstStyle/>
-          <a:p>
-            <a:pPr algn="ctr" indent="0" marL="0">
-              <a:buNone/>
-            </a:pPr>
-            <a:r>
-              <a:rPr lang="en-US" sz="1350" b="1" dirty="0">
-                <a:solidFill>
-                  <a:srgbClr val="FFFFFF"/>
-                </a:solidFill>
-                <a:latin typeface="Yu Gothic" pitchFamily="34" charset="0"/>
-                <a:ea typeface="Yu Gothic" pitchFamily="34" charset="-122"/>
-                <a:cs typeface="Yu Gothic" pitchFamily="34" charset="-120"/>
-              </a:rPr>
-              <a:t>発売・配信</a:t>
-            </a:r>
-            <a:endParaRPr lang="en-US" sz="1350" dirty="0"/>
-          </a:p>
-        </p:txBody>
-      </p:sp>
-      <p:sp>
-        <p:nvSpPr>
-          <p:cNvPr id="26" name="Text 24"/>
-          <p:cNvSpPr/>
-          <p:nvPr/>
-        </p:nvSpPr>
-        <p:spPr>
-          <a:xfrm>
-            <a:off x="8110728" y="3867912"/>
-            <a:ext cx="1828800" cy="731520"/>
-          </a:xfrm>
-          <a:prstGeom prst="rect">
-            <a:avLst/>
-          </a:prstGeom>
-          <a:noFill/>
-          <a:ln/>
-        </p:spPr>
-        <p:txBody>
-          <a:bodyPr wrap="square" lIns="0" tIns="0" rIns="0" bIns="0" rtlCol="0" anchor="t"/>
-          <a:lstStyle/>
-          <a:p>
-            <a:pPr algn="ctr" indent="0" marL="0">
-              <a:lnSpc>
-                <a:spcPts val="1400"/>
-              </a:lnSpc>
-              <a:buNone/>
-            </a:pPr>
-            <a:r>
-              <a:rPr lang="en-US" sz="1000" dirty="0">
-                <a:solidFill>
-                  <a:srgbClr val="AEB6C4"/>
-                </a:solidFill>
-                <a:latin typeface="Yu Gothic" pitchFamily="34" charset="0"/>
-                <a:ea typeface="Yu Gothic" pitchFamily="34" charset="-122"/>
-                <a:cs typeface="Yu Gothic" pitchFamily="34" charset="-120"/>
-              </a:rPr>
-              <a:t>限定モデル /</a:t>
-            </a:r>
-            <a:endParaRPr lang="en-US" sz="1000" dirty="0"/>
-          </a:p>
-          <a:p>
-            <a:pPr algn="ctr" indent="0" marL="0">
-              <a:lnSpc>
-                <a:spcPts val="1400"/>
-              </a:lnSpc>
-              <a:buNone/>
-            </a:pPr>
-            <a:r>
-              <a:rPr lang="en-US" sz="1000" dirty="0">
-                <a:solidFill>
-                  <a:srgbClr val="AEB6C4"/>
-                </a:solidFill>
-                <a:latin typeface="Yu Gothic" pitchFamily="34" charset="0"/>
-                <a:ea typeface="Yu Gothic" pitchFamily="34" charset="-122"/>
-                <a:cs typeface="Yu Gothic" pitchFamily="34" charset="-120"/>
-              </a:rPr>
-              <a:t>体験パック</a:t>
-            </a:r>
-            <a:endParaRPr lang="en-US" sz="1000" dirty="0"/>
-          </a:p>
-        </p:txBody>
-      </p:sp>
-      <p:sp>
-        <p:nvSpPr>
-          <p:cNvPr id="27" name="Shape 25"/>
-          <p:cNvSpPr/>
-          <p:nvPr/>
-        </p:nvSpPr>
-        <p:spPr>
-          <a:xfrm>
-            <a:off x="10899648" y="3429000"/>
-            <a:ext cx="237744" cy="237744"/>
-          </a:xfrm>
-          <a:prstGeom prst="ellipse">
-            <a:avLst/>
-          </a:prstGeom>
-          <a:solidFill>
-            <a:srgbClr val="2EA8E0"/>
-          </a:solidFill>
-          <a:ln/>
-          <a:effectLst>
-            <a:outerShdw sx="100000" sy="100000" kx="0" ky="0" algn="bl" rotWithShape="0" blurRad="152400" dist="50800" dir="16200000">
-              <a:srgbClr val="2EA8E0">
-                <a:alpha val="80000"/>
-              </a:srgbClr>
-            </a:outerShdw>
-          </a:effectLst>
-        </p:spPr>
-      </p:sp>
-      <p:sp>
-        <p:nvSpPr>
-          <p:cNvPr id="28" name="Text 26"/>
-          <p:cNvSpPr/>
-          <p:nvPr/>
-        </p:nvSpPr>
-        <p:spPr>
-          <a:xfrm>
-            <a:off x="10149840" y="2624328"/>
-            <a:ext cx="1737360" cy="320040"/>
-          </a:xfrm>
-          <a:prstGeom prst="rect">
-            <a:avLst/>
-          </a:prstGeom>
-          <a:noFill/>
-          <a:ln/>
-        </p:spPr>
-        <p:txBody>
-          <a:bodyPr wrap="square" lIns="0" tIns="0" rIns="0" bIns="0" rtlCol="0" anchor="ctr"/>
-          <a:lstStyle/>
-          <a:p>
-            <a:pPr algn="ctr" indent="0" marL="0">
-              <a:buNone/>
-            </a:pPr>
-            <a:r>
-              <a:rPr lang="en-US" sz="1250" b="1" dirty="0">
-                <a:solidFill>
-                  <a:srgbClr val="2EA8E0"/>
-                </a:solidFill>
-                <a:latin typeface="Arial" pitchFamily="34" charset="0"/>
-                <a:ea typeface="Arial" pitchFamily="34" charset="-122"/>
-                <a:cs typeface="Arial" pitchFamily="34" charset="-120"/>
-              </a:rPr>
-              <a:t>2027.7.10</a:t>
-            </a:r>
-            <a:endParaRPr lang="en-US" sz="1250" dirty="0"/>
-          </a:p>
-        </p:txBody>
-      </p:sp>
-      <p:sp>
-        <p:nvSpPr>
-          <p:cNvPr id="29" name="Text 27"/>
-          <p:cNvSpPr/>
-          <p:nvPr/>
-        </p:nvSpPr>
-        <p:spPr>
-          <a:xfrm>
-            <a:off x="10149840" y="2944368"/>
-            <a:ext cx="1737360" cy="320040"/>
-          </a:xfrm>
-          <a:prstGeom prst="rect">
-            <a:avLst/>
-          </a:prstGeom>
-          <a:noFill/>
-          <a:ln/>
-        </p:spPr>
-        <p:txBody>
-          <a:bodyPr wrap="square" lIns="0" tIns="0" rIns="0" bIns="0" rtlCol="0" anchor="ctr"/>
-          <a:lstStyle/>
-          <a:p>
-            <a:pPr algn="ctr" indent="0" marL="0">
-              <a:buNone/>
-            </a:pPr>
-            <a:r>
-              <a:rPr lang="en-US" sz="1350" b="1" dirty="0">
-                <a:solidFill>
-                  <a:srgbClr val="FFFFFF"/>
-                </a:solidFill>
-                <a:latin typeface="Yu Gothic" pitchFamily="34" charset="0"/>
-                <a:ea typeface="Yu Gothic" pitchFamily="34" charset="-122"/>
-                <a:cs typeface="Yu Gothic" pitchFamily="34" charset="-120"/>
-              </a:rPr>
-              <a:t>「変身の日」</a:t>
-            </a:r>
-            <a:endParaRPr lang="en-US" sz="1350" dirty="0"/>
-          </a:p>
-        </p:txBody>
-      </p:sp>
-      <p:sp>
-        <p:nvSpPr>
-          <p:cNvPr id="30" name="Text 28"/>
-          <p:cNvSpPr/>
-          <p:nvPr/>
-        </p:nvSpPr>
-        <p:spPr>
-          <a:xfrm>
-            <a:off x="10104120" y="3867912"/>
-            <a:ext cx="1828800" cy="731520"/>
-          </a:xfrm>
-          <a:prstGeom prst="rect">
-            <a:avLst/>
-          </a:prstGeom>
-          <a:noFill/>
-          <a:ln/>
-        </p:spPr>
-        <p:txBody>
-          <a:bodyPr wrap="square" lIns="0" tIns="0" rIns="0" bIns="0" rtlCol="0" anchor="t"/>
-          <a:lstStyle/>
-          <a:p>
-            <a:pPr algn="ctr" indent="0" marL="0">
-              <a:lnSpc>
-                <a:spcPts val="1400"/>
-              </a:lnSpc>
-              <a:buNone/>
-            </a:pPr>
-            <a:r>
-              <a:rPr lang="en-US" sz="1000" dirty="0">
-                <a:solidFill>
-                  <a:srgbClr val="AEB6C4"/>
-                </a:solidFill>
-                <a:latin typeface="Yu Gothic" pitchFamily="34" charset="0"/>
-                <a:ea typeface="Yu Gothic" pitchFamily="34" charset="-122"/>
-                <a:cs typeface="Yu Gothic" pitchFamily="34" charset="-120"/>
-              </a:rPr>
-              <a:t>1周年施策 →</a:t>
-            </a:r>
-            <a:endParaRPr lang="en-US" sz="1000" dirty="0"/>
-          </a:p>
-          <a:p>
-            <a:pPr algn="ctr" indent="0" marL="0">
-              <a:lnSpc>
-                <a:spcPts val="1400"/>
-              </a:lnSpc>
-              <a:buNone/>
-            </a:pPr>
-            <a:r>
-              <a:rPr lang="en-US" sz="1000" dirty="0">
-                <a:solidFill>
-                  <a:srgbClr val="AEB6C4"/>
-                </a:solidFill>
-                <a:latin typeface="Yu Gothic" pitchFamily="34" charset="0"/>
-                <a:ea typeface="Yu Gothic" pitchFamily="34" charset="-122"/>
-                <a:cs typeface="Yu Gothic" pitchFamily="34" charset="-120"/>
-              </a:rPr>
-              <a:t>継続契約へ</a:t>
-            </a:r>
-            <a:endParaRPr lang="en-US" sz="1000" dirty="0"/>
-          </a:p>
-        </p:txBody>
-      </p:sp>
-      <p:sp>
-        <p:nvSpPr>
-          <p:cNvPr id="31" name="Shape 29"/>
-          <p:cNvSpPr/>
-          <p:nvPr/>
-        </p:nvSpPr>
-        <p:spPr>
-          <a:xfrm>
-            <a:off x="640080" y="5257800"/>
-            <a:ext cx="10908792" cy="914400"/>
-          </a:xfrm>
-          <a:prstGeom prst="roundRect">
-            <a:avLst>
-              <a:gd name="adj" fmla="val 10000"/>
-            </a:avLst>
-          </a:prstGeom>
-          <a:solidFill>
-            <a:srgbClr val="141926">
-              <a:alpha val="86000"/>
-            </a:srgbClr>
-          </a:solidFill>
-          <a:ln w="15875">
+              <a:t>（Plan U 実施時）</a:t>
+            </a:r>
+            <a:endParaRPr lang="en-US" sz="1150" dirty="0"/>
+          </a:p>
+        </p:txBody>
+      </p:sp>
+      <p:sp>
+        <p:nvSpPr>
+          <p:cNvPr id="25" name="Shape 19"/>
+          <p:cNvSpPr/>
+          <p:nvPr/>
+        </p:nvSpPr>
+        <p:spPr>
+          <a:xfrm>
+            <a:off x="640080" y="5212080"/>
+            <a:ext cx="10908792" cy="0"/>
+          </a:xfrm>
+          <a:prstGeom prst="line">
+            <a:avLst/>
+          </a:prstGeom>
+          <a:noFill/>
+          <a:ln w="12700">
             <a:solidFill>
-              <a:srgbClr val="5A2430"/>
+              <a:srgbClr val="2A3140"/>
             </a:solidFill>
             <a:prstDash val="solid"/>
           </a:ln>
@@ -10472,33 +11487,50 @@
       </p:sp>
       <p:sp>
         <p:nvSpPr>
-          <p:cNvPr id="32" name="Text 30"/>
-          <p:cNvSpPr/>
-          <p:nvPr/>
-        </p:nvSpPr>
-        <p:spPr>
-          <a:xfrm>
-            <a:off x="960120" y="5257800"/>
-            <a:ext cx="10332720" cy="914400"/>
-          </a:xfrm>
-          <a:prstGeom prst="rect">
-            <a:avLst/>
-          </a:prstGeom>
-          <a:noFill/>
-          <a:ln/>
-        </p:spPr>
-        <p:txBody>
-          <a:bodyPr wrap="square" lIns="0" tIns="0" rIns="0" bIns="0" rtlCol="0" anchor="ctr"/>
+          <p:cNvPr id="26" name="Text 20"/>
+          <p:cNvSpPr/>
+          <p:nvPr/>
+        </p:nvSpPr>
+        <p:spPr>
+          <a:xfrm>
+            <a:off x="640080" y="5440680"/>
+            <a:ext cx="10927080" cy="868680"/>
+          </a:xfrm>
+          <a:prstGeom prst="rect">
+            <a:avLst/>
+          </a:prstGeom>
+          <a:noFill/>
+          <a:ln/>
+        </p:spPr>
+        <p:txBody>
+          <a:bodyPr wrap="square" lIns="0" tIns="0" rIns="0" bIns="0" rtlCol="0" anchor="t"/>
           <a:lstStyle/>
           <a:p>
             <a:pPr indent="0" marL="0">
               <a:lnSpc>
-                <a:spcPts val="1900"/>
+                <a:spcPts val="2400"/>
               </a:lnSpc>
               <a:buNone/>
             </a:pPr>
             <a:r>
-              <a:rPr lang="en-US" sz="1300" b="1" dirty="0">
+              <a:rPr lang="en-US" sz="1550" b="1" dirty="0">
+                <a:solidFill>
+                  <a:srgbClr val="FFFFFF"/>
+                </a:solidFill>
+                <a:latin typeface="Yu Gothic" pitchFamily="34" charset="0"/>
+                <a:ea typeface="Yu Gothic" pitchFamily="34" charset="-122"/>
+                <a:cs typeface="Yu Gothic" pitchFamily="34" charset="-120"/>
+              </a:rPr>
+              <a:t>収益は入口にすぎません。本質的な価値は、</a:t>
+            </a:r>
+            <a:pPr indent="0" marL="0">
+              <a:lnSpc>
+                <a:spcPts val="2400"/>
+              </a:lnSpc>
+              <a:buNone/>
+            </a:pPr>
+            <a:r>
+              <a:rPr lang="en-US" sz="1550" b="1" dirty="0">
                 <a:solidFill>
                   <a:srgbClr val="E8354F"/>
                 </a:solidFill>
@@ -10506,32 +11538,32 @@
                 <a:ea typeface="Yu Gothic" pitchFamily="34" charset="-122"/>
                 <a:cs typeface="Yu Gothic" pitchFamily="34" charset="-120"/>
               </a:rPr>
-              <a:t>11月発表に間に合わせるには、8月中の基本合意が必要です。</a:t>
+              <a:t>「ARグラスの最初のIP体験」という歴史的ポジション</a:t>
             </a:r>
             <a:pPr indent="0" marL="0">
               <a:lnSpc>
-                <a:spcPts val="1900"/>
+                <a:spcPts val="2400"/>
               </a:lnSpc>
               <a:buNone/>
             </a:pPr>
             <a:r>
-              <a:rPr lang="en-US" sz="1300" dirty="0">
-                <a:solidFill>
-                  <a:srgbClr val="E7EAF0"/>
-                </a:solidFill>
-                <a:latin typeface="Yu Gothic" pitchFamily="34" charset="0"/>
-                <a:ea typeface="Yu Gothic" pitchFamily="34" charset="-122"/>
-                <a:cs typeface="Yu Gothic" pitchFamily="34" charset="-120"/>
-              </a:rPr>
-              <a:t>　意匠変更をカラー・テンプル・充電ケース・起動音に限定することで、この日程は実現可能です。</a:t>
-            </a:r>
-            <a:endParaRPr lang="en-US" sz="1300" dirty="0"/>
-          </a:p>
-        </p:txBody>
-      </p:sp>
-      <p:sp>
-        <p:nvSpPr>
-          <p:cNvPr id="33" name="Text 31"/>
+              <a:rPr lang="en-US" sz="1550" b="1" dirty="0">
+                <a:solidFill>
+                  <a:srgbClr val="FFFFFF"/>
+                </a:solidFill>
+                <a:latin typeface="Yu Gothic" pitchFamily="34" charset="0"/>
+                <a:ea typeface="Yu Gothic" pitchFamily="34" charset="-122"/>
+                <a:cs typeface="Yu Gothic" pitchFamily="34" charset="-120"/>
+              </a:rPr>
+              <a:t> を両社で独占することです。</a:t>
+            </a:r>
+            <a:endParaRPr lang="en-US" sz="1550" dirty="0"/>
+          </a:p>
+        </p:txBody>
+      </p:sp>
+      <p:sp>
+        <p:nvSpPr>
+          <p:cNvPr id="27" name="Text 21"/>
           <p:cNvSpPr/>
           <p:nvPr/>
         </p:nvSpPr>
